--- a/multi-agent-development-framework/MADF_Framework.pptx
+++ b/multi-agent-development-framework/MADF_Framework.pptx
@@ -12,9 +12,10 @@
     <p:sldId id="260" r:id="rId6"/>
     <p:sldId id="261" r:id="rId7"/>
     <p:sldId id="262" r:id="rId8"/>
+    <p:sldId id="263" r:id="rId9"/>
   </p:sldIdLst>
   <p:notesMasterIdLst>
-    <p:notesMasterId r:id="rId9"/>
+    <p:notesMasterId r:id="rId10"/>
   </p:notesMasterIdLst>
   <p:sldSz cx="12192000" cy="6858000"/>
   <p:notesSz cx="6858000" cy="12192000"/>
@@ -1060,6 +1061,94 @@
             <a:fld id="{F7021451-1387-4CA6-816F-3879F97B5CBC}" type="slidenum">
               <a:rPr lang="en-US"/>
               <a:t>7</a:t>
+            </a:fld>
+            <a:endParaRPr lang="en-US"/>
+          </a:p>
+        </p:txBody>
+      </p:sp>
+    </p:spTree>
+    <p:extLst>
+      <p:ext uri="{BB962C8B-B14F-4D97-AF65-F5344CB8AC3E}">
+        <p14:creationId xmlns:p14="http://schemas.microsoft.com/office/powerpoint/2010/main" val="1024086991"/>
+      </p:ext>
+    </p:extLst>
+  </p:cSld>
+  <p:clrMapOvr>
+    <a:masterClrMapping/>
+  </p:clrMapOvr>
+</p:notes>
+</file>
+
+<file path=ppt/notesSlides/notesSlide8.xml><?xml version="1.0" encoding="utf-8"?>
+<p:notes xmlns:a="http://schemas.openxmlformats.org/drawingml/2006/main" xmlns:r="http://schemas.openxmlformats.org/officeDocument/2006/relationships" xmlns:p="http://schemas.openxmlformats.org/presentationml/2006/main">
+  <p:cSld>
+    <p:spTree>
+      <p:nvGrpSpPr>
+        <p:cNvPr id="1" name=""/>
+        <p:cNvGrpSpPr/>
+        <p:nvPr/>
+      </p:nvGrpSpPr>
+      <p:grpSpPr>
+        <a:xfrm>
+          <a:off x="0" y="0"/>
+          <a:ext cx="0" cy="0"/>
+          <a:chOff x="0" y="0"/>
+          <a:chExt cx="0" cy="0"/>
+        </a:xfrm>
+      </p:grpSpPr>
+      <p:sp>
+        <p:nvSpPr>
+          <p:cNvPr id="2" name="Slide Image Placeholder 1"/>
+          <p:cNvSpPr>
+            <a:spLocks noGrp="1" noRot="1" noChangeAspect="1"/>
+          </p:cNvSpPr>
+          <p:nvPr>
+            <p:ph type="sldImg"/>
+          </p:nvPr>
+        </p:nvSpPr>
+        <p:spPr/>
+      </p:sp>
+      <p:sp>
+        <p:nvSpPr>
+          <p:cNvPr id="3" name="Notes Placeholder 2"/>
+          <p:cNvSpPr>
+            <a:spLocks noGrp="1"/>
+          </p:cNvSpPr>
+          <p:nvPr>
+            <p:ph type="body" idx="1"/>
+          </p:nvPr>
+        </p:nvSpPr>
+        <p:spPr/>
+        <p:txBody>
+          <a:bodyPr/>
+          <a:lstStyle/>
+          <a:p>
+            <a:r>
+              <a:rPr lang="en-US" dirty="0"/>
+              <a:t/>
+            </a:r>
+            <a:endParaRPr lang="en-US" dirty="0"/>
+          </a:p>
+        </p:txBody>
+      </p:sp>
+      <p:sp>
+        <p:nvSpPr>
+          <p:cNvPr id="4" name="Slide Number Placeholder 3"/>
+          <p:cNvSpPr>
+            <a:spLocks noGrp="1"/>
+          </p:cNvSpPr>
+          <p:nvPr>
+            <p:ph type="sldNum" sz="quarter" idx="10"/>
+          </p:nvPr>
+        </p:nvSpPr>
+        <p:spPr/>
+        <p:txBody>
+          <a:bodyPr/>
+          <a:lstStyle/>
+          <a:p>
+            <a:fld id="{F7021451-1387-4CA6-816F-3879F97B5CBC}" type="slidenum">
+              <a:rPr lang="en-US"/>
+              <a:t>8</a:t>
             </a:fld>
             <a:endParaRPr lang="en-US"/>
           </a:p>
@@ -1501,7 +1590,7 @@
                 <a:ea typeface="Segoe UI" pitchFamily="34" charset="-122"/>
                 <a:cs typeface="Segoe UI" pitchFamily="34" charset="-120"/>
               </a:rPr>
-              <a:t>13 AI Agents That Build Software Like a Real Team</a:t>
+              <a:t>13 AI Agents + 15 Skills — Build Software Like a Real Team</a:t>
             </a:r>
             <a:endParaRPr lang="en-US" sz="2000" dirty="0"/>
           </a:p>
@@ -1540,7 +1629,7 @@
                 <a:ea typeface="Segoe UI" pitchFamily="34" charset="-122"/>
                 <a:cs typeface="Segoe UI" pitchFamily="34" charset="-120"/>
               </a:rPr>
-              <a:t>4-Level Hierarchy  |  Phase-Gate Workflow  |  12 Artifact Templates  |  Self-Improving</a:t>
+              <a:t>MADF v2.1  |  4-Level Hierarchy  |  Phase-Gate Workflow  |  Boil the Lake  |  Self-Improving</a:t>
             </a:r>
             <a:endParaRPr lang="en-US" sz="1400" dirty="0"/>
           </a:p>
@@ -2680,7 +2769,7 @@
                 <a:ea typeface="Segoe UI" pitchFamily="34" charset="-122"/>
                 <a:cs typeface="Segoe UI" pitchFamily="34" charset="-120"/>
               </a:rPr>
-              <a:t>A 13-agent framework organized in a 4-level hierarchy — mirroring how real engineering teams work.</a:t>
+              <a:t>13 agents in a 4-level hierarchy — mirroring how real engineering teams work.</a:t>
             </a:r>
             <a:endParaRPr lang="en-US" sz="1500" dirty="0"/>
           </a:p>
@@ -2697,7 +2786,7 @@
                 <a:ea typeface="Segoe UI" pitchFamily="34" charset="-122"/>
                 <a:cs typeface="Segoe UI" pitchFamily="34" charset="-120"/>
               </a:rPr>
-              <a:t>Each agent has a single responsibility, defined inputs/outputs, and communicates through artifacts.</a:t>
+              <a:t>Each agent has a single responsibility, defined inputs/outputs, and communicates through persistent artifacts.</a:t>
             </a:r>
             <a:endParaRPr lang="en-US" sz="1500" dirty="0"/>
           </a:p>
@@ -3741,7 +3830,7 @@
                 <a:ea typeface="Segoe UI" pitchFamily="34" charset="-122"/>
                 <a:cs typeface="Segoe UI" pitchFamily="34" charset="-120"/>
               </a:rPr>
-              <a:t>+ Learning Agent, Hooks Agent, Skills Agent — 13 total agents, each with a cursor-rule file</a:t>
+              <a:t>+ Learning Agent, Reactive Maintenance, Proactive Evolution — 13 agents, 17 cursor-rule files</a:t>
             </a:r>
             <a:endParaRPr lang="en-US" sz="1200" dirty="0"/>
           </a:p>
@@ -3832,7 +3921,7 @@
                 <a:ea typeface="Segoe UI" pitchFamily="34" charset="-122"/>
                 <a:cs typeface="Segoe UI" pitchFamily="34" charset="-120"/>
               </a:rPr>
-              <a:t>The 90/10 Philosophy</a:t>
+              <a:t>Philosophy: Plan Deep, Build Complete</a:t>
             </a:r>
             <a:endParaRPr lang="en-US" sz="3000" dirty="0"/>
           </a:p>
@@ -3840,57 +3929,18 @@
       </p:sp>
       <p:sp>
         <p:nvSpPr>
-          <p:cNvPr id="4" name="Text 2"/>
-          <p:cNvSpPr/>
-          <p:nvPr/>
-        </p:nvSpPr>
-        <p:spPr>
-          <a:xfrm>
-            <a:off x="731520" y="1188720"/>
-            <a:ext cx="10058400" cy="365760"/>
-          </a:xfrm>
-          <a:prstGeom prst="rect">
-            <a:avLst/>
-          </a:prstGeom>
-          <a:noFill/>
-          <a:ln/>
-        </p:spPr>
-        <p:txBody>
-          <a:bodyPr wrap="square" rtlCol="0" anchor="ctr"/>
-          <a:lstStyle/>
-          <a:p>
-            <a:pPr indent="0" marL="0">
-              <a:buNone/>
-            </a:pPr>
-            <a:r>
-              <a:rPr lang="en-US" sz="1500" dirty="0">
-                <a:solidFill>
-                  <a:srgbClr val="E0E0E0"/>
-                </a:solidFill>
-                <a:latin typeface="Segoe UI" pitchFamily="34" charset="0"/>
-                <a:ea typeface="Segoe UI" pitchFamily="34" charset="-122"/>
-                <a:cs typeface="Segoe UI" pitchFamily="34" charset="-120"/>
-              </a:rPr>
-              <a:t>90% planning, 10% coding. Every phase has exit criteria — no skipping ahead.</a:t>
-            </a:r>
-            <a:endParaRPr lang="en-US" sz="1500" dirty="0"/>
-          </a:p>
-        </p:txBody>
-      </p:sp>
-      <p:sp>
-        <p:nvSpPr>
-          <p:cNvPr id="5" name="Shape 3"/>
-          <p:cNvSpPr/>
-          <p:nvPr/>
-        </p:nvSpPr>
-        <p:spPr>
-          <a:xfrm>
-            <a:off x="274320" y="1828800"/>
-            <a:ext cx="2788920" cy="4754880"/>
+          <p:cNvPr id="4" name="Shape 2"/>
+          <p:cNvSpPr/>
+          <p:nvPr/>
+        </p:nvSpPr>
+        <p:spPr>
+          <a:xfrm>
+            <a:off x="457200" y="1371600"/>
+            <a:ext cx="5486400" cy="2560320"/>
           </a:xfrm>
           <a:prstGeom prst="roundRect">
             <a:avLst>
-              <a:gd name="adj" fmla="val 3279"/>
+              <a:gd name="adj" fmla="val 3571"/>
             </a:avLst>
           </a:prstGeom>
           <a:solidFill>
@@ -3913,14 +3963,14 @@
       </p:sp>
       <p:sp>
         <p:nvSpPr>
-          <p:cNvPr id="6" name="Shape 4"/>
-          <p:cNvSpPr/>
-          <p:nvPr/>
-        </p:nvSpPr>
-        <p:spPr>
-          <a:xfrm>
-            <a:off x="274320" y="1828800"/>
-            <a:ext cx="2788920" cy="36576"/>
+          <p:cNvPr id="5" name="Shape 3"/>
+          <p:cNvSpPr/>
+          <p:nvPr/>
+        </p:nvSpPr>
+        <p:spPr>
+          <a:xfrm>
+            <a:off x="457200" y="1371600"/>
+            <a:ext cx="5486400" cy="36576"/>
           </a:xfrm>
           <a:prstGeom prst="rect">
             <a:avLst/>
@@ -3933,90 +3983,26 @@
       </p:sp>
       <p:sp>
         <p:nvSpPr>
-          <p:cNvPr id="7" name="Shape 5"/>
-          <p:cNvSpPr/>
-          <p:nvPr/>
-        </p:nvSpPr>
-        <p:spPr>
-          <a:xfrm>
-            <a:off x="1280160" y="2011680"/>
-            <a:ext cx="548640" cy="548640"/>
-          </a:xfrm>
-          <a:prstGeom prst="ellipse">
-            <a:avLst/>
-          </a:prstGeom>
-          <a:solidFill>
-            <a:srgbClr val="007ACC"/>
-          </a:solidFill>
-          <a:ln w="12700">
-            <a:solidFill>
-              <a:srgbClr val="007ACC"/>
-            </a:solidFill>
-            <a:prstDash val="solid"/>
-          </a:ln>
-        </p:spPr>
-      </p:sp>
-      <p:sp>
-        <p:nvSpPr>
-          <p:cNvPr id="8" name="Text 6"/>
-          <p:cNvSpPr/>
-          <p:nvPr/>
-        </p:nvSpPr>
-        <p:spPr>
-          <a:xfrm>
-            <a:off x="1280160" y="2011680"/>
-            <a:ext cx="548640" cy="548640"/>
-          </a:xfrm>
-          <a:prstGeom prst="rect">
-            <a:avLst/>
-          </a:prstGeom>
-          <a:noFill/>
-          <a:ln/>
-        </p:spPr>
-        <p:txBody>
-          <a:bodyPr wrap="square" rtlCol="0" anchor="ctr"/>
-          <a:lstStyle/>
-          <a:p>
-            <a:pPr algn="ctr" indent="0" marL="0">
-              <a:buNone/>
-            </a:pPr>
-            <a:r>
-              <a:rPr lang="en-US" sz="1200" b="1" dirty="0">
-                <a:solidFill>
-                  <a:srgbClr val="FFFFFF"/>
-                </a:solidFill>
-                <a:latin typeface="Segoe UI" pitchFamily="34" charset="0"/>
-                <a:ea typeface="Segoe UI" pitchFamily="34" charset="-122"/>
-                <a:cs typeface="Segoe UI" pitchFamily="34" charset="-120"/>
-              </a:rPr>
-              <a:t>1</a:t>
-            </a:r>
-            <a:endParaRPr lang="en-US" sz="1200" dirty="0"/>
-          </a:p>
-        </p:txBody>
-      </p:sp>
-      <p:sp>
-        <p:nvSpPr>
-          <p:cNvPr id="9" name="Text 7"/>
-          <p:cNvSpPr/>
-          <p:nvPr/>
-        </p:nvSpPr>
-        <p:spPr>
-          <a:xfrm>
-            <a:off x="411480" y="2697480"/>
-            <a:ext cx="2514600" cy="365760"/>
-          </a:xfrm>
-          <a:prstGeom prst="rect">
-            <a:avLst/>
-          </a:prstGeom>
-          <a:noFill/>
-          <a:ln/>
-        </p:spPr>
-        <p:txBody>
-          <a:bodyPr wrap="square" rtlCol="0" anchor="ctr"/>
-          <a:lstStyle/>
-          <a:p>
-            <a:pPr algn="ctr" indent="0" marL="0">
+          <p:cNvPr id="6" name="Text 4"/>
+          <p:cNvSpPr/>
+          <p:nvPr/>
+        </p:nvSpPr>
+        <p:spPr>
+          <a:xfrm>
+            <a:off x="640080" y="1508760"/>
+            <a:ext cx="5120640" cy="320040"/>
+          </a:xfrm>
+          <a:prstGeom prst="rect">
+            <a:avLst/>
+          </a:prstGeom>
+          <a:noFill/>
+          <a:ln/>
+        </p:spPr>
+        <p:txBody>
+          <a:bodyPr wrap="square" rtlCol="0" anchor="ctr"/>
+          <a:lstStyle/>
+          <a:p>
+            <a:pPr indent="0" marL="0">
               <a:buNone/>
             </a:pPr>
             <a:r>
@@ -4028,7 +4014,7 @@
                 <a:ea typeface="Segoe UI" pitchFamily="34" charset="-122"/>
                 <a:cs typeface="Segoe UI" pitchFamily="34" charset="-120"/>
               </a:rPr>
-              <a:t>Discovery</a:t>
+              <a:t>The 90/10 Rule</a:t>
             </a:r>
             <a:endParaRPr lang="en-US" sz="1700" dirty="0"/>
           </a:p>
@@ -4036,14 +4022,14 @@
       </p:sp>
       <p:sp>
         <p:nvSpPr>
-          <p:cNvPr id="10" name="Text 8"/>
-          <p:cNvSpPr/>
-          <p:nvPr/>
-        </p:nvSpPr>
-        <p:spPr>
-          <a:xfrm>
-            <a:off x="457200" y="3108960"/>
-            <a:ext cx="2423160" cy="3291840"/>
+          <p:cNvPr id="7" name="Text 5"/>
+          <p:cNvSpPr/>
+          <p:nvPr/>
+        </p:nvSpPr>
+        <p:spPr>
+          <a:xfrm>
+            <a:off x="640080" y="1920240"/>
+            <a:ext cx="5120640" cy="1828800"/>
           </a:xfrm>
           <a:prstGeom prst="rect">
             <a:avLst/>
@@ -4062,7 +4048,7 @@
               <a:buNone/>
             </a:pPr>
             <a:r>
-              <a:rPr lang="en-US" sz="1200" dirty="0">
+              <a:rPr lang="en-US" sz="1250" dirty="0">
                 <a:solidFill>
                   <a:srgbClr val="E0E0E0"/>
                 </a:solidFill>
@@ -4070,9 +4056,9 @@
                 <a:ea typeface="Segoe UI" pitchFamily="34" charset="-122"/>
                 <a:cs typeface="Segoe UI" pitchFamily="34" charset="-120"/>
               </a:rPr>
-              <a:t>Understand the problem deeply</a:t>
-            </a:r>
-            <a:endParaRPr lang="en-US" sz="1200" dirty="0"/>
+              <a:t>90% planning, 10% coding. Every phase has exit</a:t>
+            </a:r>
+            <a:endParaRPr lang="en-US" sz="1250" dirty="0"/>
           </a:p>
           <a:p>
             <a:pPr indent="0" marL="0">
@@ -4082,7 +4068,7 @@
               <a:buNone/>
             </a:pPr>
             <a:r>
-              <a:rPr lang="en-US" sz="1200" dirty="0">
+              <a:rPr lang="en-US" sz="1250" dirty="0">
                 <a:solidFill>
                   <a:srgbClr val="E0E0E0"/>
                 </a:solidFill>
@@ -4090,9 +4076,9 @@
                 <a:ea typeface="Segoe UI" pitchFamily="34" charset="-122"/>
                 <a:cs typeface="Segoe UI" pitchFamily="34" charset="-120"/>
               </a:rPr>
-              <a:t>before proposing solutions.</a:t>
-            </a:r>
-            <a:endParaRPr lang="en-US" sz="1200" dirty="0"/>
+              <a:t>criteria — no skipping ahead.</a:t>
+            </a:r>
+            <a:endParaRPr lang="en-US" sz="1250" dirty="0"/>
           </a:p>
           <a:p>
             <a:pPr indent="0" marL="0">
@@ -4101,7 +4087,7 @@
               </a:lnSpc>
               <a:buNone/>
             </a:pPr>
-            <a:endParaRPr lang="en-US" sz="1200" dirty="0"/>
+            <a:endParaRPr lang="en-US" sz="1250" dirty="0"/>
           </a:p>
           <a:p>
             <a:pPr indent="0" marL="0">
@@ -4111,7 +4097,7 @@
               <a:buNone/>
             </a:pPr>
             <a:r>
-              <a:rPr lang="en-US" sz="1200" dirty="0">
+              <a:rPr lang="en-US" sz="1250" dirty="0">
                 <a:solidFill>
                   <a:srgbClr val="E0E0E0"/>
                 </a:solidFill>
@@ -4119,9 +4105,9 @@
                 <a:ea typeface="Segoe UI" pitchFamily="34" charset="-122"/>
                 <a:cs typeface="Segoe UI" pitchFamily="34" charset="-120"/>
               </a:rPr>
-              <a:t>• User stories &amp; pain points</a:t>
-            </a:r>
-            <a:endParaRPr lang="en-US" sz="1200" dirty="0"/>
+              <a:t>Phase-gate workflow:</a:t>
+            </a:r>
+            <a:endParaRPr lang="en-US" sz="1250" dirty="0"/>
           </a:p>
           <a:p>
             <a:pPr indent="0" marL="0">
@@ -4131,7 +4117,7 @@
               <a:buNone/>
             </a:pPr>
             <a:r>
-              <a:rPr lang="en-US" sz="1200" dirty="0">
+              <a:rPr lang="en-US" sz="1250" dirty="0">
                 <a:solidFill>
                   <a:srgbClr val="E0E0E0"/>
                 </a:solidFill>
@@ -4139,9 +4125,9 @@
                 <a:ea typeface="Segoe UI" pitchFamily="34" charset="-122"/>
                 <a:cs typeface="Segoe UI" pitchFamily="34" charset="-120"/>
               </a:rPr>
-              <a:t>• Existing system analysis</a:t>
-            </a:r>
-            <a:endParaRPr lang="en-US" sz="1200" dirty="0"/>
+              <a:t>Discovery  -&gt;  Planning  -&gt;  Building  -&gt;  Lifecycle</a:t>
+            </a:r>
+            <a:endParaRPr lang="en-US" sz="1250" dirty="0"/>
           </a:p>
           <a:p>
             <a:pPr indent="0" marL="0">
@@ -4150,18 +4136,7 @@
               </a:lnSpc>
               <a:buNone/>
             </a:pPr>
-            <a:r>
-              <a:rPr lang="en-US" sz="1200" dirty="0">
-                <a:solidFill>
-                  <a:srgbClr val="E0E0E0"/>
-                </a:solidFill>
-                <a:latin typeface="Segoe UI" pitchFamily="34" charset="0"/>
-                <a:ea typeface="Segoe UI" pitchFamily="34" charset="-122"/>
-                <a:cs typeface="Segoe UI" pitchFamily="34" charset="-120"/>
-              </a:rPr>
-              <a:t>• Constraints &amp; trade-offs</a:t>
-            </a:r>
-            <a:endParaRPr lang="en-US" sz="1200" dirty="0"/>
+            <a:endParaRPr lang="en-US" sz="1250" dirty="0"/>
           </a:p>
           <a:p>
             <a:pPr indent="0" marL="0">
@@ -4171,7 +4146,7 @@
               <a:buNone/>
             </a:pPr>
             <a:r>
-              <a:rPr lang="en-US" sz="1200" dirty="0">
+              <a:rPr lang="en-US" sz="1250" dirty="0">
                 <a:solidFill>
                   <a:srgbClr val="E0E0E0"/>
                 </a:solidFill>
@@ -4179,65 +4154,46 @@
                 <a:ea typeface="Segoe UI" pitchFamily="34" charset="-122"/>
                 <a:cs typeface="Segoe UI" pitchFamily="34" charset="-120"/>
               </a:rPr>
-              <a:t>• Success criteria defined</a:t>
-            </a:r>
-            <a:endParaRPr lang="en-US" sz="1200" dirty="0"/>
-          </a:p>
-        </p:txBody>
-      </p:sp>
-      <p:sp>
-        <p:nvSpPr>
-          <p:cNvPr id="11" name="Text 9"/>
-          <p:cNvSpPr/>
-          <p:nvPr/>
-        </p:nvSpPr>
-        <p:spPr>
-          <a:xfrm>
-            <a:off x="3017520" y="3657600"/>
-            <a:ext cx="365760" cy="457200"/>
-          </a:xfrm>
-          <a:prstGeom prst="rect">
-            <a:avLst/>
-          </a:prstGeom>
-          <a:noFill/>
-          <a:ln/>
-        </p:spPr>
-        <p:txBody>
-          <a:bodyPr wrap="square" rtlCol="0" anchor="ctr"/>
-          <a:lstStyle/>
-          <a:p>
-            <a:pPr algn="ctr" indent="0" marL="0">
-              <a:buNone/>
-            </a:pPr>
-            <a:r>
-              <a:rPr lang="en-US" sz="2000" dirty="0">
-                <a:solidFill>
-                  <a:srgbClr val="A0A0A0"/>
-                </a:solidFill>
-                <a:latin typeface="Segoe UI" pitchFamily="34" charset="0"/>
-                <a:ea typeface="Segoe UI" pitchFamily="34" charset="-122"/>
-                <a:cs typeface="Segoe UI" pitchFamily="34" charset="-120"/>
-              </a:rPr>
-              <a:t>→</a:t>
-            </a:r>
-            <a:endParaRPr lang="en-US" sz="2000" dirty="0"/>
-          </a:p>
-        </p:txBody>
-      </p:sp>
-      <p:sp>
-        <p:nvSpPr>
-          <p:cNvPr id="12" name="Shape 10"/>
-          <p:cNvSpPr/>
-          <p:nvPr/>
-        </p:nvSpPr>
-        <p:spPr>
-          <a:xfrm>
-            <a:off x="3246120" y="1828800"/>
-            <a:ext cx="2788920" cy="4754880"/>
+              <a:t>Each gate needs explicit approval before progressing.</a:t>
+            </a:r>
+            <a:endParaRPr lang="en-US" sz="1250" dirty="0"/>
+          </a:p>
+          <a:p>
+            <a:pPr indent="0" marL="0">
+              <a:lnSpc>
+                <a:spcPct val="125000"/>
+              </a:lnSpc>
+              <a:buNone/>
+            </a:pPr>
+            <a:r>
+              <a:rPr lang="en-US" sz="1250" dirty="0">
+                <a:solidFill>
+                  <a:srgbClr val="E0E0E0"/>
+                </a:solidFill>
+                <a:latin typeface="Segoe UI" pitchFamily="34" charset="0"/>
+                <a:ea typeface="Segoe UI" pitchFamily="34" charset="-122"/>
+                <a:cs typeface="Segoe UI" pitchFamily="34" charset="-120"/>
+              </a:rPr>
+              <a:t>CTO Agent reviews at every gate transition.</a:t>
+            </a:r>
+            <a:endParaRPr lang="en-US" sz="1250" dirty="0"/>
+          </a:p>
+        </p:txBody>
+      </p:sp>
+      <p:sp>
+        <p:nvSpPr>
+          <p:cNvPr id="8" name="Shape 6"/>
+          <p:cNvSpPr/>
+          <p:nvPr/>
+        </p:nvSpPr>
+        <p:spPr>
+          <a:xfrm>
+            <a:off x="6217920" y="1371600"/>
+            <a:ext cx="5486400" cy="2560320"/>
           </a:xfrm>
           <a:prstGeom prst="roundRect">
             <a:avLst>
-              <a:gd name="adj" fmla="val 3279"/>
+              <a:gd name="adj" fmla="val 3571"/>
             </a:avLst>
           </a:prstGeom>
           <a:solidFill>
@@ -4260,14 +4216,14 @@
       </p:sp>
       <p:sp>
         <p:nvSpPr>
-          <p:cNvPr id="13" name="Shape 11"/>
-          <p:cNvSpPr/>
-          <p:nvPr/>
-        </p:nvSpPr>
-        <p:spPr>
-          <a:xfrm>
-            <a:off x="3246120" y="1828800"/>
-            <a:ext cx="2788920" cy="36576"/>
+          <p:cNvPr id="9" name="Shape 7"/>
+          <p:cNvSpPr/>
+          <p:nvPr/>
+        </p:nvSpPr>
+        <p:spPr>
+          <a:xfrm>
+            <a:off x="6217920" y="1371600"/>
+            <a:ext cx="5486400" cy="36576"/>
           </a:xfrm>
           <a:prstGeom prst="rect">
             <a:avLst/>
@@ -4280,90 +4236,26 @@
       </p:sp>
       <p:sp>
         <p:nvSpPr>
-          <p:cNvPr id="14" name="Shape 12"/>
-          <p:cNvSpPr/>
-          <p:nvPr/>
-        </p:nvSpPr>
-        <p:spPr>
-          <a:xfrm>
-            <a:off x="4251960" y="2011680"/>
-            <a:ext cx="548640" cy="548640"/>
-          </a:xfrm>
-          <a:prstGeom prst="ellipse">
-            <a:avLst/>
-          </a:prstGeom>
-          <a:solidFill>
-            <a:srgbClr val="00B4A0"/>
-          </a:solidFill>
-          <a:ln w="12700">
-            <a:solidFill>
-              <a:srgbClr val="00B4A0"/>
-            </a:solidFill>
-            <a:prstDash val="solid"/>
-          </a:ln>
-        </p:spPr>
-      </p:sp>
-      <p:sp>
-        <p:nvSpPr>
-          <p:cNvPr id="15" name="Text 13"/>
-          <p:cNvSpPr/>
-          <p:nvPr/>
-        </p:nvSpPr>
-        <p:spPr>
-          <a:xfrm>
-            <a:off x="4251960" y="2011680"/>
-            <a:ext cx="548640" cy="548640"/>
-          </a:xfrm>
-          <a:prstGeom prst="rect">
-            <a:avLst/>
-          </a:prstGeom>
-          <a:noFill/>
-          <a:ln/>
-        </p:spPr>
-        <p:txBody>
-          <a:bodyPr wrap="square" rtlCol="0" anchor="ctr"/>
-          <a:lstStyle/>
-          <a:p>
-            <a:pPr algn="ctr" indent="0" marL="0">
-              <a:buNone/>
-            </a:pPr>
-            <a:r>
-              <a:rPr lang="en-US" sz="1200" b="1" dirty="0">
-                <a:solidFill>
-                  <a:srgbClr val="FFFFFF"/>
-                </a:solidFill>
-                <a:latin typeface="Segoe UI" pitchFamily="34" charset="0"/>
-                <a:ea typeface="Segoe UI" pitchFamily="34" charset="-122"/>
-                <a:cs typeface="Segoe UI" pitchFamily="34" charset="-120"/>
-              </a:rPr>
-              <a:t>2</a:t>
-            </a:r>
-            <a:endParaRPr lang="en-US" sz="1200" dirty="0"/>
-          </a:p>
-        </p:txBody>
-      </p:sp>
-      <p:sp>
-        <p:nvSpPr>
-          <p:cNvPr id="16" name="Text 14"/>
-          <p:cNvSpPr/>
-          <p:nvPr/>
-        </p:nvSpPr>
-        <p:spPr>
-          <a:xfrm>
-            <a:off x="3383280" y="2697480"/>
-            <a:ext cx="2514600" cy="365760"/>
-          </a:xfrm>
-          <a:prstGeom prst="rect">
-            <a:avLst/>
-          </a:prstGeom>
-          <a:noFill/>
-          <a:ln/>
-        </p:spPr>
-        <p:txBody>
-          <a:bodyPr wrap="square" rtlCol="0" anchor="ctr"/>
-          <a:lstStyle/>
-          <a:p>
-            <a:pPr algn="ctr" indent="0" marL="0">
+          <p:cNvPr id="10" name="Text 8"/>
+          <p:cNvSpPr/>
+          <p:nvPr/>
+        </p:nvSpPr>
+        <p:spPr>
+          <a:xfrm>
+            <a:off x="6400800" y="1508760"/>
+            <a:ext cx="5120640" cy="320040"/>
+          </a:xfrm>
+          <a:prstGeom prst="rect">
+            <a:avLst/>
+          </a:prstGeom>
+          <a:noFill/>
+          <a:ln/>
+        </p:spPr>
+        <p:txBody>
+          <a:bodyPr wrap="square" rtlCol="0" anchor="ctr"/>
+          <a:lstStyle/>
+          <a:p>
+            <a:pPr indent="0" marL="0">
               <a:buNone/>
             </a:pPr>
             <a:r>
@@ -4375,7 +4267,7 @@
                 <a:ea typeface="Segoe UI" pitchFamily="34" charset="-122"/>
                 <a:cs typeface="Segoe UI" pitchFamily="34" charset="-120"/>
               </a:rPr>
-              <a:t>Planning</a:t>
+              <a:t>Boil the Lake</a:t>
             </a:r>
             <a:endParaRPr lang="en-US" sz="1700" dirty="0"/>
           </a:p>
@@ -4383,14 +4275,14 @@
       </p:sp>
       <p:sp>
         <p:nvSpPr>
-          <p:cNvPr id="17" name="Text 15"/>
-          <p:cNvSpPr/>
-          <p:nvPr/>
-        </p:nvSpPr>
-        <p:spPr>
-          <a:xfrm>
-            <a:off x="3429000" y="3108960"/>
-            <a:ext cx="2423160" cy="3291840"/>
+          <p:cNvPr id="11" name="Text 9"/>
+          <p:cNvSpPr/>
+          <p:nvPr/>
+        </p:nvSpPr>
+        <p:spPr>
+          <a:xfrm>
+            <a:off x="6400800" y="1920240"/>
+            <a:ext cx="5120640" cy="1828800"/>
           </a:xfrm>
           <a:prstGeom prst="rect">
             <a:avLst/>
@@ -4409,7 +4301,7 @@
               <a:buNone/>
             </a:pPr>
             <a:r>
-              <a:rPr lang="en-US" sz="1200" dirty="0">
+              <a:rPr lang="en-US" sz="1250" dirty="0">
                 <a:solidFill>
                   <a:srgbClr val="E0E0E0"/>
                 </a:solidFill>
@@ -4417,9 +4309,9 @@
                 <a:ea typeface="Segoe UI" pitchFamily="34" charset="-122"/>
                 <a:cs typeface="Segoe UI" pitchFamily="34" charset="-120"/>
               </a:rPr>
-              <a:t>Design the architecture and</a:t>
-            </a:r>
-            <a:endParaRPr lang="en-US" sz="1200" dirty="0"/>
+              <a:t>AI makes the marginal cost of completeness</a:t>
+            </a:r>
+            <a:endParaRPr lang="en-US" sz="1250" dirty="0"/>
           </a:p>
           <a:p>
             <a:pPr indent="0" marL="0">
@@ -4429,7 +4321,7 @@
               <a:buNone/>
             </a:pPr>
             <a:r>
-              <a:rPr lang="en-US" sz="1200" dirty="0">
+              <a:rPr lang="en-US" sz="1250" dirty="0">
                 <a:solidFill>
                   <a:srgbClr val="E0E0E0"/>
                 </a:solidFill>
@@ -4437,9 +4329,9 @@
                 <a:ea typeface="Segoe UI" pitchFamily="34" charset="-122"/>
                 <a:cs typeface="Segoe UI" pitchFamily="34" charset="-120"/>
               </a:rPr>
-              <a:t>get human alignment.</a:t>
-            </a:r>
-            <a:endParaRPr lang="en-US" sz="1200" dirty="0"/>
+              <a:t>near-zero. When the complete implementation costs</a:t>
+            </a:r>
+            <a:endParaRPr lang="en-US" sz="1250" dirty="0"/>
           </a:p>
           <a:p>
             <a:pPr indent="0" marL="0">
@@ -4448,7 +4340,18 @@
               </a:lnSpc>
               <a:buNone/>
             </a:pPr>
-            <a:endParaRPr lang="en-US" sz="1200" dirty="0"/>
+            <a:r>
+              <a:rPr lang="en-US" sz="1250" dirty="0">
+                <a:solidFill>
+                  <a:srgbClr val="E0E0E0"/>
+                </a:solidFill>
+                <a:latin typeface="Segoe UI" pitchFamily="34" charset="0"/>
+                <a:ea typeface="Segoe UI" pitchFamily="34" charset="-122"/>
+                <a:cs typeface="Segoe UI" pitchFamily="34" charset="-120"/>
+              </a:rPr>
+              <a:t>minutes more than the shortcut — do the complete</a:t>
+            </a:r>
+            <a:endParaRPr lang="en-US" sz="1250" dirty="0"/>
           </a:p>
           <a:p>
             <a:pPr indent="0" marL="0">
@@ -4458,7 +4361,7 @@
               <a:buNone/>
             </a:pPr>
             <a:r>
-              <a:rPr lang="en-US" sz="1200" dirty="0">
+              <a:rPr lang="en-US" sz="1250" dirty="0">
                 <a:solidFill>
                   <a:srgbClr val="E0E0E0"/>
                 </a:solidFill>
@@ -4466,9 +4369,9 @@
                 <a:ea typeface="Segoe UI" pitchFamily="34" charset="-122"/>
                 <a:cs typeface="Segoe UI" pitchFamily="34" charset="-120"/>
               </a:rPr>
-              <a:t>• MVP_PLAN artifact created</a:t>
-            </a:r>
-            <a:endParaRPr lang="en-US" sz="1200" dirty="0"/>
+              <a:t>thing. Every time.</a:t>
+            </a:r>
+            <a:endParaRPr lang="en-US" sz="1250" dirty="0"/>
           </a:p>
           <a:p>
             <a:pPr indent="0" marL="0">
@@ -4477,18 +4380,7 @@
               </a:lnSpc>
               <a:buNone/>
             </a:pPr>
-            <a:r>
-              <a:rPr lang="en-US" sz="1200" dirty="0">
-                <a:solidFill>
-                  <a:srgbClr val="E0E0E0"/>
-                </a:solidFill>
-                <a:latin typeface="Segoe UI" pitchFamily="34" charset="0"/>
-                <a:ea typeface="Segoe UI" pitchFamily="34" charset="-122"/>
-                <a:cs typeface="Segoe UI" pitchFamily="34" charset="-120"/>
-              </a:rPr>
-              <a:t>• SYSTEM_BLUEPRINT designed</a:t>
-            </a:r>
-            <a:endParaRPr lang="en-US" sz="1200" dirty="0"/>
+            <a:endParaRPr lang="en-US" sz="1250" dirty="0"/>
           </a:p>
           <a:p>
             <a:pPr indent="0" marL="0">
@@ -4498,7 +4390,7 @@
               <a:buNone/>
             </a:pPr>
             <a:r>
-              <a:rPr lang="en-US" sz="1200" dirty="0">
+              <a:rPr lang="en-US" sz="1250" dirty="0">
                 <a:solidFill>
                   <a:srgbClr val="E0E0E0"/>
                 </a:solidFill>
@@ -4506,9 +4398,9 @@
                 <a:ea typeface="Segoe UI" pitchFamily="34" charset="-122"/>
                 <a:cs typeface="Segoe UI" pitchFamily="34" charset="-120"/>
               </a:rPr>
-              <a:t>• API_CONTRACT defined</a:t>
-            </a:r>
-            <a:endParaRPr lang="en-US" sz="1200" dirty="0"/>
+              <a:t>100% test coverage, all edge cases, all error paths.</a:t>
+            </a:r>
+            <a:endParaRPr lang="en-US" sz="1250" dirty="0"/>
           </a:p>
           <a:p>
             <a:pPr indent="0" marL="0">
@@ -4518,7 +4410,7 @@
               <a:buNone/>
             </a:pPr>
             <a:r>
-              <a:rPr lang="en-US" sz="1200" dirty="0">
+              <a:rPr lang="en-US" sz="1250" dirty="0">
                 <a:solidFill>
                   <a:srgbClr val="E0E0E0"/>
                 </a:solidFill>
@@ -4526,65 +4418,46 @@
                 <a:ea typeface="Segoe UI" pitchFamily="34" charset="-122"/>
                 <a:cs typeface="Segoe UI" pitchFamily="34" charset="-120"/>
               </a:rPr>
-              <a:t>• DECISIONS.md started</a:t>
-            </a:r>
-            <a:endParaRPr lang="en-US" sz="1200" dirty="0"/>
-          </a:p>
-        </p:txBody>
-      </p:sp>
-      <p:sp>
-        <p:nvSpPr>
-          <p:cNvPr id="18" name="Text 16"/>
-          <p:cNvSpPr/>
-          <p:nvPr/>
-        </p:nvSpPr>
-        <p:spPr>
-          <a:xfrm>
-            <a:off x="5989320" y="3657600"/>
-            <a:ext cx="365760" cy="457200"/>
-          </a:xfrm>
-          <a:prstGeom prst="rect">
-            <a:avLst/>
-          </a:prstGeom>
-          <a:noFill/>
-          <a:ln/>
-        </p:spPr>
-        <p:txBody>
-          <a:bodyPr wrap="square" rtlCol="0" anchor="ctr"/>
-          <a:lstStyle/>
-          <a:p>
-            <a:pPr algn="ctr" indent="0" marL="0">
-              <a:buNone/>
-            </a:pPr>
-            <a:r>
-              <a:rPr lang="en-US" sz="2000" dirty="0">
-                <a:solidFill>
-                  <a:srgbClr val="A0A0A0"/>
-                </a:solidFill>
-                <a:latin typeface="Segoe UI" pitchFamily="34" charset="0"/>
-                <a:ea typeface="Segoe UI" pitchFamily="34" charset="-122"/>
-                <a:cs typeface="Segoe UI" pitchFamily="34" charset="-120"/>
-              </a:rPr>
-              <a:t>→</a:t>
-            </a:r>
-            <a:endParaRPr lang="en-US" sz="2000" dirty="0"/>
-          </a:p>
-        </p:txBody>
-      </p:sp>
-      <p:sp>
-        <p:nvSpPr>
-          <p:cNvPr id="19" name="Shape 17"/>
-          <p:cNvSpPr/>
-          <p:nvPr/>
-        </p:nvSpPr>
-        <p:spPr>
-          <a:xfrm>
-            <a:off x="6217920" y="1828800"/>
-            <a:ext cx="2788920" cy="4754880"/>
+              <a:t>The last 10% that teams used to skip?</a:t>
+            </a:r>
+            <a:endParaRPr lang="en-US" sz="1250" dirty="0"/>
+          </a:p>
+          <a:p>
+            <a:pPr indent="0" marL="0">
+              <a:lnSpc>
+                <a:spcPct val="125000"/>
+              </a:lnSpc>
+              <a:buNone/>
+            </a:pPr>
+            <a:r>
+              <a:rPr lang="en-US" sz="1250" dirty="0">
+                <a:solidFill>
+                  <a:srgbClr val="E0E0E0"/>
+                </a:solidFill>
+                <a:latin typeface="Segoe UI" pitchFamily="34" charset="0"/>
+                <a:ea typeface="Segoe UI" pitchFamily="34" charset="-122"/>
+                <a:cs typeface="Segoe UI" pitchFamily="34" charset="-120"/>
+              </a:rPr>
+              <a:t>It costs seconds now.</a:t>
+            </a:r>
+            <a:endParaRPr lang="en-US" sz="1250" dirty="0"/>
+          </a:p>
+        </p:txBody>
+      </p:sp>
+      <p:sp>
+        <p:nvSpPr>
+          <p:cNvPr id="12" name="Shape 10"/>
+          <p:cNvSpPr/>
+          <p:nvPr/>
+        </p:nvSpPr>
+        <p:spPr>
+          <a:xfrm>
+            <a:off x="457200" y="4206240"/>
+            <a:ext cx="5486400" cy="2560320"/>
           </a:xfrm>
           <a:prstGeom prst="roundRect">
             <a:avLst>
-              <a:gd name="adj" fmla="val 3279"/>
+              <a:gd name="adj" fmla="val 3571"/>
             </a:avLst>
           </a:prstGeom>
           <a:solidFill>
@@ -4607,122 +4480,58 @@
       </p:sp>
       <p:sp>
         <p:nvSpPr>
-          <p:cNvPr id="20" name="Shape 18"/>
-          <p:cNvSpPr/>
-          <p:nvPr/>
-        </p:nvSpPr>
-        <p:spPr>
-          <a:xfrm>
-            <a:off x="6217920" y="1828800"/>
-            <a:ext cx="2788920" cy="36576"/>
+          <p:cNvPr id="13" name="Shape 11"/>
+          <p:cNvSpPr/>
+          <p:nvPr/>
+        </p:nvSpPr>
+        <p:spPr>
+          <a:xfrm>
+            <a:off x="457200" y="4206240"/>
+            <a:ext cx="5486400" cy="36576"/>
           </a:xfrm>
           <a:prstGeom prst="rect">
             <a:avLst/>
           </a:prstGeom>
           <a:solidFill>
-            <a:srgbClr val="9B59B6"/>
+            <a:srgbClr val="2ECC71"/>
           </a:solidFill>
           <a:ln/>
         </p:spPr>
       </p:sp>
       <p:sp>
         <p:nvSpPr>
-          <p:cNvPr id="21" name="Shape 19"/>
-          <p:cNvSpPr/>
-          <p:nvPr/>
-        </p:nvSpPr>
-        <p:spPr>
-          <a:xfrm>
-            <a:off x="7223760" y="2011680"/>
-            <a:ext cx="548640" cy="548640"/>
-          </a:xfrm>
-          <a:prstGeom prst="ellipse">
-            <a:avLst/>
-          </a:prstGeom>
-          <a:solidFill>
-            <a:srgbClr val="9B59B6"/>
-          </a:solidFill>
-          <a:ln w="12700">
-            <a:solidFill>
-              <a:srgbClr val="9B59B6"/>
-            </a:solidFill>
-            <a:prstDash val="solid"/>
-          </a:ln>
-        </p:spPr>
-      </p:sp>
-      <p:sp>
-        <p:nvSpPr>
-          <p:cNvPr id="22" name="Text 20"/>
-          <p:cNvSpPr/>
-          <p:nvPr/>
-        </p:nvSpPr>
-        <p:spPr>
-          <a:xfrm>
-            <a:off x="7223760" y="2011680"/>
-            <a:ext cx="548640" cy="548640"/>
-          </a:xfrm>
-          <a:prstGeom prst="rect">
-            <a:avLst/>
-          </a:prstGeom>
-          <a:noFill/>
-          <a:ln/>
-        </p:spPr>
-        <p:txBody>
-          <a:bodyPr wrap="square" rtlCol="0" anchor="ctr"/>
-          <a:lstStyle/>
-          <a:p>
-            <a:pPr algn="ctr" indent="0" marL="0">
-              <a:buNone/>
-            </a:pPr>
-            <a:r>
-              <a:rPr lang="en-US" sz="1200" b="1" dirty="0">
-                <a:solidFill>
-                  <a:srgbClr val="FFFFFF"/>
-                </a:solidFill>
-                <a:latin typeface="Segoe UI" pitchFamily="34" charset="0"/>
-                <a:ea typeface="Segoe UI" pitchFamily="34" charset="-122"/>
-                <a:cs typeface="Segoe UI" pitchFamily="34" charset="-120"/>
-              </a:rPr>
-              <a:t>3</a:t>
-            </a:r>
-            <a:endParaRPr lang="en-US" sz="1200" dirty="0"/>
-          </a:p>
-        </p:txBody>
-      </p:sp>
-      <p:sp>
-        <p:nvSpPr>
-          <p:cNvPr id="23" name="Text 21"/>
-          <p:cNvSpPr/>
-          <p:nvPr/>
-        </p:nvSpPr>
-        <p:spPr>
-          <a:xfrm>
-            <a:off x="6355080" y="2697480"/>
-            <a:ext cx="2514600" cy="365760"/>
-          </a:xfrm>
-          <a:prstGeom prst="rect">
-            <a:avLst/>
-          </a:prstGeom>
-          <a:noFill/>
-          <a:ln/>
-        </p:spPr>
-        <p:txBody>
-          <a:bodyPr wrap="square" rtlCol="0" anchor="ctr"/>
-          <a:lstStyle/>
-          <a:p>
-            <a:pPr algn="ctr" indent="0" marL="0">
+          <p:cNvPr id="14" name="Text 12"/>
+          <p:cNvSpPr/>
+          <p:nvPr/>
+        </p:nvSpPr>
+        <p:spPr>
+          <a:xfrm>
+            <a:off x="640080" y="4343400"/>
+            <a:ext cx="5120640" cy="320040"/>
+          </a:xfrm>
+          <a:prstGeom prst="rect">
+            <a:avLst/>
+          </a:prstGeom>
+          <a:noFill/>
+          <a:ln/>
+        </p:spPr>
+        <p:txBody>
+          <a:bodyPr wrap="square" rtlCol="0" anchor="ctr"/>
+          <a:lstStyle/>
+          <a:p>
+            <a:pPr indent="0" marL="0">
               <a:buNone/>
             </a:pPr>
             <a:r>
               <a:rPr lang="en-US" sz="1700" b="1" dirty="0">
                 <a:solidFill>
-                  <a:srgbClr val="9B59B6"/>
-                </a:solidFill>
-                <a:latin typeface="Segoe UI" pitchFamily="34" charset="0"/>
-                <a:ea typeface="Segoe UI" pitchFamily="34" charset="-122"/>
-                <a:cs typeface="Segoe UI" pitchFamily="34" charset="-120"/>
-              </a:rPr>
-              <a:t>Building</a:t>
+                  <a:srgbClr val="2ECC71"/>
+                </a:solidFill>
+                <a:latin typeface="Segoe UI" pitchFamily="34" charset="0"/>
+                <a:ea typeface="Segoe UI" pitchFamily="34" charset="-122"/>
+                <a:cs typeface="Segoe UI" pitchFamily="34" charset="-120"/>
+              </a:rPr>
+              <a:t>Search Before Building</a:t>
             </a:r>
             <a:endParaRPr lang="en-US" sz="1700" dirty="0"/>
           </a:p>
@@ -4730,14 +4539,14 @@
       </p:sp>
       <p:sp>
         <p:nvSpPr>
-          <p:cNvPr id="24" name="Text 22"/>
-          <p:cNvSpPr/>
-          <p:nvPr/>
-        </p:nvSpPr>
-        <p:spPr>
-          <a:xfrm>
-            <a:off x="6400800" y="3108960"/>
-            <a:ext cx="2423160" cy="3291840"/>
+          <p:cNvPr id="15" name="Text 13"/>
+          <p:cNvSpPr/>
+          <p:nvPr/>
+        </p:nvSpPr>
+        <p:spPr>
+          <a:xfrm>
+            <a:off x="640080" y="4754880"/>
+            <a:ext cx="5120640" cy="1828800"/>
           </a:xfrm>
           <a:prstGeom prst="rect">
             <a:avLst/>
@@ -4756,7 +4565,7 @@
               <a:buNone/>
             </a:pPr>
             <a:r>
-              <a:rPr lang="en-US" sz="1200" dirty="0">
+              <a:rPr lang="en-US" sz="1250" dirty="0">
                 <a:solidFill>
                   <a:srgbClr val="E0E0E0"/>
                 </a:solidFill>
@@ -4764,9 +4573,9 @@
                 <a:ea typeface="Segoe UI" pitchFamily="34" charset="-122"/>
                 <a:cs typeface="Segoe UI" pitchFamily="34" charset="-120"/>
               </a:rPr>
-              <a:t>Implement with continuous</a:t>
-            </a:r>
-            <a:endParaRPr lang="en-US" sz="1200" dirty="0"/>
+              <a:t>First instinct: "Has someone already solved this?"</a:t>
+            </a:r>
+            <a:endParaRPr lang="en-US" sz="1250" dirty="0"/>
           </a:p>
           <a:p>
             <a:pPr indent="0" marL="0">
@@ -4776,7 +4585,7 @@
               <a:buNone/>
             </a:pPr>
             <a:r>
-              <a:rPr lang="en-US" sz="1200" dirty="0">
+              <a:rPr lang="en-US" sz="1250" dirty="0">
                 <a:solidFill>
                   <a:srgbClr val="E0E0E0"/>
                 </a:solidFill>
@@ -4784,9 +4593,9 @@
                 <a:ea typeface="Segoe UI" pitchFamily="34" charset="-122"/>
                 <a:cs typeface="Segoe UI" pitchFamily="34" charset="-120"/>
               </a:rPr>
-              <a:t>validation at each step.</a:t>
-            </a:r>
-            <a:endParaRPr lang="en-US" sz="1200" dirty="0"/>
+              <a:t>not "Let me design it from scratch."</a:t>
+            </a:r>
+            <a:endParaRPr lang="en-US" sz="1250" dirty="0"/>
           </a:p>
           <a:p>
             <a:pPr indent="0" marL="0">
@@ -4795,7 +4604,7 @@
               </a:lnSpc>
               <a:buNone/>
             </a:pPr>
-            <a:endParaRPr lang="en-US" sz="1200" dirty="0"/>
+            <a:endParaRPr lang="en-US" sz="1250" dirty="0"/>
           </a:p>
           <a:p>
             <a:pPr indent="0" marL="0">
@@ -4805,7 +4614,7 @@
               <a:buNone/>
             </a:pPr>
             <a:r>
-              <a:rPr lang="en-US" sz="1200" dirty="0">
+              <a:rPr lang="en-US" sz="1250" dirty="0">
                 <a:solidFill>
                   <a:srgbClr val="E0E0E0"/>
                 </a:solidFill>
@@ -4813,9 +4622,9 @@
                 <a:ea typeface="Segoe UI" pitchFamily="34" charset="-122"/>
                 <a:cs typeface="Segoe UI" pitchFamily="34" charset="-120"/>
               </a:rPr>
-              <a:t>• Test-first development</a:t>
-            </a:r>
-            <a:endParaRPr lang="en-US" sz="1200" dirty="0"/>
+              <a:t>Three layers of knowledge:</a:t>
+            </a:r>
+            <a:endParaRPr lang="en-US" sz="1250" dirty="0"/>
           </a:p>
           <a:p>
             <a:pPr indent="0" marL="0">
@@ -4825,7 +4634,7 @@
               <a:buNone/>
             </a:pPr>
             <a:r>
-              <a:rPr lang="en-US" sz="1200" dirty="0">
+              <a:rPr lang="en-US" sz="1250" dirty="0">
                 <a:solidFill>
                   <a:srgbClr val="E0E0E0"/>
                 </a:solidFill>
@@ -4833,9 +4642,9 @@
                 <a:ea typeface="Segoe UI" pitchFamily="34" charset="-122"/>
                 <a:cs typeface="Segoe UI" pitchFamily="34" charset="-120"/>
               </a:rPr>
-              <a:t>• Security review per module</a:t>
-            </a:r>
-            <a:endParaRPr lang="en-US" sz="1200" dirty="0"/>
+              <a:t>1. Tried &amp; true — standard patterns, battle-tested</a:t>
+            </a:r>
+            <a:endParaRPr lang="en-US" sz="1250" dirty="0"/>
           </a:p>
           <a:p>
             <a:pPr indent="0" marL="0">
@@ -4845,7 +4654,7 @@
               <a:buNone/>
             </a:pPr>
             <a:r>
-              <a:rPr lang="en-US" sz="1200" dirty="0">
+              <a:rPr lang="en-US" sz="1250" dirty="0">
                 <a:solidFill>
                   <a:srgbClr val="E0E0E0"/>
                 </a:solidFill>
@@ -4853,9 +4662,9 @@
                 <a:ea typeface="Segoe UI" pitchFamily="34" charset="-122"/>
                 <a:cs typeface="Segoe UI" pitchFamily="34" charset="-120"/>
               </a:rPr>
-              <a:t>• Artifact updates as code ships</a:t>
-            </a:r>
-            <a:endParaRPr lang="en-US" sz="1200" dirty="0"/>
+              <a:t>2. New &amp; popular — current practices, scrutinize</a:t>
+            </a:r>
+            <a:endParaRPr lang="en-US" sz="1250" dirty="0"/>
           </a:p>
           <a:p>
             <a:pPr indent="0" marL="0">
@@ -4865,7 +4674,7 @@
               <a:buNone/>
             </a:pPr>
             <a:r>
-              <a:rPr lang="en-US" sz="1200" dirty="0">
+              <a:rPr lang="en-US" sz="1250" dirty="0">
                 <a:solidFill>
                   <a:srgbClr val="E0E0E0"/>
                 </a:solidFill>
@@ -4873,65 +4682,26 @@
                 <a:ea typeface="Segoe UI" pitchFamily="34" charset="-122"/>
                 <a:cs typeface="Segoe UI" pitchFamily="34" charset="-120"/>
               </a:rPr>
-              <a:t>• No 'big bang' integration</a:t>
-            </a:r>
-            <a:endParaRPr lang="en-US" sz="1200" dirty="0"/>
-          </a:p>
-        </p:txBody>
-      </p:sp>
-      <p:sp>
-        <p:nvSpPr>
-          <p:cNvPr id="25" name="Text 23"/>
-          <p:cNvSpPr/>
-          <p:nvPr/>
-        </p:nvSpPr>
-        <p:spPr>
-          <a:xfrm>
-            <a:off x="8961120" y="3657600"/>
-            <a:ext cx="365760" cy="457200"/>
-          </a:xfrm>
-          <a:prstGeom prst="rect">
-            <a:avLst/>
-          </a:prstGeom>
-          <a:noFill/>
-          <a:ln/>
-        </p:spPr>
-        <p:txBody>
-          <a:bodyPr wrap="square" rtlCol="0" anchor="ctr"/>
-          <a:lstStyle/>
-          <a:p>
-            <a:pPr algn="ctr" indent="0" marL="0">
-              <a:buNone/>
-            </a:pPr>
-            <a:r>
-              <a:rPr lang="en-US" sz="2000" dirty="0">
-                <a:solidFill>
-                  <a:srgbClr val="A0A0A0"/>
-                </a:solidFill>
-                <a:latin typeface="Segoe UI" pitchFamily="34" charset="0"/>
-                <a:ea typeface="Segoe UI" pitchFamily="34" charset="-122"/>
-                <a:cs typeface="Segoe UI" pitchFamily="34" charset="-120"/>
-              </a:rPr>
-              <a:t>→</a:t>
-            </a:r>
-            <a:endParaRPr lang="en-US" sz="2000" dirty="0"/>
-          </a:p>
-        </p:txBody>
-      </p:sp>
-      <p:sp>
-        <p:nvSpPr>
-          <p:cNvPr id="26" name="Shape 24"/>
-          <p:cNvSpPr/>
-          <p:nvPr/>
-        </p:nvSpPr>
-        <p:spPr>
-          <a:xfrm>
-            <a:off x="9189720" y="1828800"/>
-            <a:ext cx="2788920" cy="4754880"/>
+              <a:t>3. First principles — original reasoning (most valuable)</a:t>
+            </a:r>
+            <a:endParaRPr lang="en-US" sz="1250" dirty="0"/>
+          </a:p>
+        </p:txBody>
+      </p:sp>
+      <p:sp>
+        <p:nvSpPr>
+          <p:cNvPr id="16" name="Shape 14"/>
+          <p:cNvSpPr/>
+          <p:nvPr/>
+        </p:nvSpPr>
+        <p:spPr>
+          <a:xfrm>
+            <a:off x="6217920" y="4206240"/>
+            <a:ext cx="5486400" cy="2560320"/>
           </a:xfrm>
           <a:prstGeom prst="roundRect">
             <a:avLst>
-              <a:gd name="adj" fmla="val 3279"/>
+              <a:gd name="adj" fmla="val 3571"/>
             </a:avLst>
           </a:prstGeom>
           <a:solidFill>
@@ -4954,122 +4724,58 @@
       </p:sp>
       <p:sp>
         <p:nvSpPr>
-          <p:cNvPr id="27" name="Shape 25"/>
-          <p:cNvSpPr/>
-          <p:nvPr/>
-        </p:nvSpPr>
-        <p:spPr>
-          <a:xfrm>
-            <a:off x="9189720" y="1828800"/>
-            <a:ext cx="2788920" cy="36576"/>
+          <p:cNvPr id="17" name="Shape 15"/>
+          <p:cNvSpPr/>
+          <p:nvPr/>
+        </p:nvSpPr>
+        <p:spPr>
+          <a:xfrm>
+            <a:off x="6217920" y="4206240"/>
+            <a:ext cx="5486400" cy="36576"/>
           </a:xfrm>
           <a:prstGeom prst="rect">
             <a:avLst/>
           </a:prstGeom>
           <a:solidFill>
-            <a:srgbClr val="2ECC71"/>
+            <a:srgbClr val="FF8C00"/>
           </a:solidFill>
           <a:ln/>
         </p:spPr>
       </p:sp>
       <p:sp>
         <p:nvSpPr>
-          <p:cNvPr id="28" name="Shape 26"/>
-          <p:cNvSpPr/>
-          <p:nvPr/>
-        </p:nvSpPr>
-        <p:spPr>
-          <a:xfrm>
-            <a:off x="10195560" y="2011680"/>
-            <a:ext cx="548640" cy="548640"/>
-          </a:xfrm>
-          <a:prstGeom prst="ellipse">
-            <a:avLst/>
-          </a:prstGeom>
-          <a:solidFill>
-            <a:srgbClr val="2ECC71"/>
-          </a:solidFill>
-          <a:ln w="12700">
-            <a:solidFill>
-              <a:srgbClr val="2ECC71"/>
-            </a:solidFill>
-            <a:prstDash val="solid"/>
-          </a:ln>
-        </p:spPr>
-      </p:sp>
-      <p:sp>
-        <p:nvSpPr>
-          <p:cNvPr id="29" name="Text 27"/>
-          <p:cNvSpPr/>
-          <p:nvPr/>
-        </p:nvSpPr>
-        <p:spPr>
-          <a:xfrm>
-            <a:off x="10195560" y="2011680"/>
-            <a:ext cx="548640" cy="548640"/>
-          </a:xfrm>
-          <a:prstGeom prst="rect">
-            <a:avLst/>
-          </a:prstGeom>
-          <a:noFill/>
-          <a:ln/>
-        </p:spPr>
-        <p:txBody>
-          <a:bodyPr wrap="square" rtlCol="0" anchor="ctr"/>
-          <a:lstStyle/>
-          <a:p>
-            <a:pPr algn="ctr" indent="0" marL="0">
-              <a:buNone/>
-            </a:pPr>
-            <a:r>
-              <a:rPr lang="en-US" sz="1200" b="1" dirty="0">
-                <a:solidFill>
-                  <a:srgbClr val="FFFFFF"/>
-                </a:solidFill>
-                <a:latin typeface="Segoe UI" pitchFamily="34" charset="0"/>
-                <a:ea typeface="Segoe UI" pitchFamily="34" charset="-122"/>
-                <a:cs typeface="Segoe UI" pitchFamily="34" charset="-120"/>
-              </a:rPr>
-              <a:t>4</a:t>
-            </a:r>
-            <a:endParaRPr lang="en-US" sz="1200" dirty="0"/>
-          </a:p>
-        </p:txBody>
-      </p:sp>
-      <p:sp>
-        <p:nvSpPr>
-          <p:cNvPr id="30" name="Text 28"/>
-          <p:cNvSpPr/>
-          <p:nvPr/>
-        </p:nvSpPr>
-        <p:spPr>
-          <a:xfrm>
-            <a:off x="9326880" y="2697480"/>
-            <a:ext cx="2514600" cy="365760"/>
-          </a:xfrm>
-          <a:prstGeom prst="rect">
-            <a:avLst/>
-          </a:prstGeom>
-          <a:noFill/>
-          <a:ln/>
-        </p:spPr>
-        <p:txBody>
-          <a:bodyPr wrap="square" rtlCol="0" anchor="ctr"/>
-          <a:lstStyle/>
-          <a:p>
-            <a:pPr algn="ctr" indent="0" marL="0">
+          <p:cNvPr id="18" name="Text 16"/>
+          <p:cNvSpPr/>
+          <p:nvPr/>
+        </p:nvSpPr>
+        <p:spPr>
+          <a:xfrm>
+            <a:off x="6400800" y="4343400"/>
+            <a:ext cx="5120640" cy="320040"/>
+          </a:xfrm>
+          <a:prstGeom prst="rect">
+            <a:avLst/>
+          </a:prstGeom>
+          <a:noFill/>
+          <a:ln/>
+        </p:spPr>
+        <p:txBody>
+          <a:bodyPr wrap="square" rtlCol="0" anchor="ctr"/>
+          <a:lstStyle/>
+          <a:p>
+            <a:pPr indent="0" marL="0">
               <a:buNone/>
             </a:pPr>
             <a:r>
               <a:rPr lang="en-US" sz="1700" b="1" dirty="0">
                 <a:solidFill>
-                  <a:srgbClr val="2ECC71"/>
-                </a:solidFill>
-                <a:latin typeface="Segoe UI" pitchFamily="34" charset="0"/>
-                <a:ea typeface="Segoe UI" pitchFamily="34" charset="-122"/>
-                <a:cs typeface="Segoe UI" pitchFamily="34" charset="-120"/>
-              </a:rPr>
-              <a:t>Lifecycle</a:t>
+                  <a:srgbClr val="FF8C00"/>
+                </a:solidFill>
+                <a:latin typeface="Segoe UI" pitchFamily="34" charset="0"/>
+                <a:ea typeface="Segoe UI" pitchFamily="34" charset="-122"/>
+                <a:cs typeface="Segoe UI" pitchFamily="34" charset="-120"/>
+              </a:rPr>
+              <a:t>Alignment Protocol</a:t>
             </a:r>
             <a:endParaRPr lang="en-US" sz="1700" dirty="0"/>
           </a:p>
@@ -5077,14 +4783,14 @@
       </p:sp>
       <p:sp>
         <p:nvSpPr>
-          <p:cNvPr id="31" name="Text 29"/>
-          <p:cNvSpPr/>
-          <p:nvPr/>
-        </p:nvSpPr>
-        <p:spPr>
-          <a:xfrm>
-            <a:off x="9372600" y="3108960"/>
-            <a:ext cx="2423160" cy="3291840"/>
+          <p:cNvPr id="19" name="Text 17"/>
+          <p:cNvSpPr/>
+          <p:nvPr/>
+        </p:nvSpPr>
+        <p:spPr>
+          <a:xfrm>
+            <a:off x="6400800" y="4754880"/>
+            <a:ext cx="5120640" cy="1828800"/>
           </a:xfrm>
           <a:prstGeom prst="rect">
             <a:avLst/>
@@ -5103,7 +4809,7 @@
               <a:buNone/>
             </a:pPr>
             <a:r>
-              <a:rPr lang="en-US" sz="1200" dirty="0">
+              <a:rPr lang="en-US" sz="1250" dirty="0">
                 <a:solidFill>
                   <a:srgbClr val="E0E0E0"/>
                 </a:solidFill>
@@ -5111,9 +4817,9 @@
                 <a:ea typeface="Segoe UI" pitchFamily="34" charset="-122"/>
                 <a:cs typeface="Segoe UI" pitchFamily="34" charset="-120"/>
               </a:rPr>
-              <a:t>Maintain, learn, evolve.</a:t>
-            </a:r>
-            <a:endParaRPr lang="en-US" sz="1200" dirty="0"/>
+              <a:t>The AI never guesses. If confidence &lt; 80%:</a:t>
+            </a:r>
+            <a:endParaRPr lang="en-US" sz="1250" dirty="0"/>
           </a:p>
           <a:p>
             <a:pPr indent="0" marL="0">
@@ -5122,7 +4828,18 @@
               </a:lnSpc>
               <a:buNone/>
             </a:pPr>
-            <a:endParaRPr lang="en-US" sz="1200" dirty="0"/>
+            <a:r>
+              <a:rPr lang="en-US" sz="1250" dirty="0">
+                <a:solidFill>
+                  <a:srgbClr val="E0E0E0"/>
+                </a:solidFill>
+                <a:latin typeface="Segoe UI" pitchFamily="34" charset="0"/>
+                <a:ea typeface="Segoe UI" pitchFamily="34" charset="-122"/>
+                <a:cs typeface="Segoe UI" pitchFamily="34" charset="-120"/>
+              </a:rPr>
+              <a:t>STOP -&gt; STATE uncertainty -&gt; PRESENT options -&gt; WAIT</a:t>
+            </a:r>
+            <a:endParaRPr lang="en-US" sz="1250" dirty="0"/>
           </a:p>
           <a:p>
             <a:pPr indent="0" marL="0">
@@ -5131,18 +4848,7 @@
               </a:lnSpc>
               <a:buNone/>
             </a:pPr>
-            <a:r>
-              <a:rPr lang="en-US" sz="1200" dirty="0">
-                <a:solidFill>
-                  <a:srgbClr val="E0E0E0"/>
-                </a:solidFill>
-                <a:latin typeface="Segoe UI" pitchFamily="34" charset="0"/>
-                <a:ea typeface="Segoe UI" pitchFamily="34" charset="-122"/>
-                <a:cs typeface="Segoe UI" pitchFamily="34" charset="-120"/>
-              </a:rPr>
-              <a:t>• Performance monitoring</a:t>
-            </a:r>
-            <a:endParaRPr lang="en-US" sz="1200" dirty="0"/>
+            <a:endParaRPr lang="en-US" sz="1250" dirty="0"/>
           </a:p>
           <a:p>
             <a:pPr indent="0" marL="0">
@@ -5152,7 +4858,7 @@
               <a:buNone/>
             </a:pPr>
             <a:r>
-              <a:rPr lang="en-US" sz="1200" dirty="0">
+              <a:rPr lang="en-US" sz="1250" dirty="0">
                 <a:solidFill>
                   <a:srgbClr val="E0E0E0"/>
                 </a:solidFill>
@@ -5160,9 +4866,9 @@
                 <a:ea typeface="Segoe UI" pitchFamily="34" charset="-122"/>
                 <a:cs typeface="Segoe UI" pitchFamily="34" charset="-120"/>
               </a:rPr>
-              <a:t>• Pattern learning captured</a:t>
-            </a:r>
-            <a:endParaRPr lang="en-US" sz="1200" dirty="0"/>
+              <a:t>Before every task:</a:t>
+            </a:r>
+            <a:endParaRPr lang="en-US" sz="1250" dirty="0"/>
           </a:p>
           <a:p>
             <a:pPr indent="0" marL="0">
@@ -5172,7 +4878,7 @@
               <a:buNone/>
             </a:pPr>
             <a:r>
-              <a:rPr lang="en-US" sz="1200" dirty="0">
+              <a:rPr lang="en-US" sz="1250" dirty="0">
                 <a:solidFill>
                   <a:srgbClr val="E0E0E0"/>
                 </a:solidFill>
@@ -5180,9 +4886,9 @@
                 <a:ea typeface="Segoe UI" pitchFamily="34" charset="-122"/>
                 <a:cs typeface="Segoe UI" pitchFamily="34" charset="-120"/>
               </a:rPr>
-              <a:t>• Framework improvements</a:t>
-            </a:r>
-            <a:endParaRPr lang="en-US" sz="1200" dirty="0"/>
+              <a:t>1. Summarize understanding</a:t>
+            </a:r>
+            <a:endParaRPr lang="en-US" sz="1250" dirty="0"/>
           </a:p>
           <a:p>
             <a:pPr indent="0" marL="0">
@@ -5192,7 +4898,7 @@
               <a:buNone/>
             </a:pPr>
             <a:r>
-              <a:rPr lang="en-US" sz="1200" dirty="0">
+              <a:rPr lang="en-US" sz="1250" dirty="0">
                 <a:solidFill>
                   <a:srgbClr val="E0E0E0"/>
                 </a:solidFill>
@@ -5200,9 +4906,9 @@
                 <a:ea typeface="Segoe UI" pitchFamily="34" charset="-122"/>
                 <a:cs typeface="Segoe UI" pitchFamily="34" charset="-120"/>
               </a:rPr>
-              <a:t>• Knowledge persistence</a:t>
-            </a:r>
-            <a:endParaRPr lang="en-US" sz="1200" dirty="0"/>
+              <a:t>2. List context files to read</a:t>
+            </a:r>
+            <a:endParaRPr lang="en-US" sz="1250" dirty="0"/>
           </a:p>
           <a:p>
             <a:pPr indent="0" marL="0">
@@ -5212,7 +4918,7 @@
               <a:buNone/>
             </a:pPr>
             <a:r>
-              <a:rPr lang="en-US" sz="1200" dirty="0">
+              <a:rPr lang="en-US" sz="1250" dirty="0">
                 <a:solidFill>
                   <a:srgbClr val="E0E0E0"/>
                 </a:solidFill>
@@ -5220,9 +4926,49 @@
                 <a:ea typeface="Segoe UI" pitchFamily="34" charset="-122"/>
                 <a:cs typeface="Segoe UI" pitchFamily="34" charset="-120"/>
               </a:rPr>
-              <a:t>• Confidence-scored insights</a:t>
-            </a:r>
-            <a:endParaRPr lang="en-US" sz="1200" dirty="0"/>
+              <a:t>3. Flag ambiguities</a:t>
+            </a:r>
+            <a:endParaRPr lang="en-US" sz="1250" dirty="0"/>
+          </a:p>
+          <a:p>
+            <a:pPr indent="0" marL="0">
+              <a:lnSpc>
+                <a:spcPct val="125000"/>
+              </a:lnSpc>
+              <a:buNone/>
+            </a:pPr>
+            <a:r>
+              <a:rPr lang="en-US" sz="1250" dirty="0">
+                <a:solidFill>
+                  <a:srgbClr val="E0E0E0"/>
+                </a:solidFill>
+                <a:latin typeface="Segoe UI" pitchFamily="34" charset="0"/>
+                <a:ea typeface="Segoe UI" pitchFamily="34" charset="-122"/>
+                <a:cs typeface="Segoe UI" pitchFamily="34" charset="-120"/>
+              </a:rPr>
+              <a:t>4. Ask: "Does this align?"</a:t>
+            </a:r>
+            <a:endParaRPr lang="en-US" sz="1250" dirty="0"/>
+          </a:p>
+          <a:p>
+            <a:pPr indent="0" marL="0">
+              <a:lnSpc>
+                <a:spcPct val="125000"/>
+              </a:lnSpc>
+              <a:buNone/>
+            </a:pPr>
+            <a:r>
+              <a:rPr lang="en-US" sz="1250" dirty="0">
+                <a:solidFill>
+                  <a:srgbClr val="E0E0E0"/>
+                </a:solidFill>
+                <a:latin typeface="Segoe UI" pitchFamily="34" charset="0"/>
+                <a:ea typeface="Segoe UI" pitchFamily="34" charset="-122"/>
+                <a:cs typeface="Segoe UI" pitchFamily="34" charset="-120"/>
+              </a:rPr>
+              <a:t>5. WAIT for confirmation — then proceed</a:t>
+            </a:r>
+            <a:endParaRPr lang="en-US" sz="1250" dirty="0"/>
           </a:p>
         </p:txBody>
       </p:sp>
@@ -5273,7 +5019,7 @@
             <a:avLst/>
           </a:prstGeom>
           <a:solidFill>
-            <a:srgbClr val="FF8C00"/>
+            <a:srgbClr val="F1C40F"/>
           </a:solidFill>
           <a:ln/>
         </p:spPr>
@@ -5311,7 +5057,7 @@
                 <a:ea typeface="Segoe UI" pitchFamily="34" charset="-122"/>
                 <a:cs typeface="Segoe UI" pitchFamily="34" charset="-120"/>
               </a:rPr>
-              <a:t>The Alignment Protocol</a:t>
+              <a:t>15 Skills — The Full Sprint</a:t>
             </a:r>
             <a:endParaRPr lang="en-US" sz="3000" dirty="0"/>
           </a:p>
@@ -5342,7 +5088,7 @@
               <a:buNone/>
             </a:pPr>
             <a:r>
-              <a:rPr lang="en-US" sz="1500" dirty="0">
+              <a:rPr lang="en-US" sz="1400" dirty="0">
                 <a:solidFill>
                   <a:srgbClr val="E0E0E0"/>
                 </a:solidFill>
@@ -5350,9 +5096,9 @@
                 <a:ea typeface="Segoe UI" pitchFamily="34" charset="-122"/>
                 <a:cs typeface="Segoe UI" pitchFamily="34" charset="-120"/>
               </a:rPr>
-              <a:t>The core principle: AI never guesses. It asks until it understands, then proceeds with confidence.</a:t>
-            </a:r>
-            <a:endParaRPr lang="en-US" sz="1500" dirty="0"/>
+              <a:t>Think -&gt; Plan -&gt; Build -&gt; Review -&gt; Test -&gt; Ship -&gt; Monitor -&gt; Reflect. Each skill feeds into the next.</a:t>
+            </a:r>
+            <a:endParaRPr lang="en-US" sz="1400" dirty="0"/>
           </a:p>
         </p:txBody>
       </p:sp>
@@ -5364,12 +5110,12 @@
         </p:nvSpPr>
         <p:spPr>
           <a:xfrm>
-            <a:off x="457200" y="1828800"/>
-            <a:ext cx="5486400" cy="4754880"/>
+            <a:off x="274320" y="1737360"/>
+            <a:ext cx="2788920" cy="4572000"/>
           </a:xfrm>
           <a:prstGeom prst="roundRect">
             <a:avLst>
-              <a:gd name="adj" fmla="val 1923"/>
+              <a:gd name="adj" fmla="val 3279"/>
             </a:avLst>
           </a:prstGeom>
           <a:solidFill>
@@ -5398,637 +5144,105 @@
         </p:nvSpPr>
         <p:spPr>
           <a:xfrm>
-            <a:off x="457200" y="1828800"/>
-            <a:ext cx="5486400" cy="36576"/>
+            <a:off x="274320" y="1737360"/>
+            <a:ext cx="2788920" cy="36576"/>
           </a:xfrm>
           <a:prstGeom prst="rect">
             <a:avLst/>
           </a:prstGeom>
           <a:solidFill>
-            <a:srgbClr val="FF8C00"/>
+            <a:srgbClr val="007ACC"/>
           </a:solidFill>
           <a:ln/>
         </p:spPr>
       </p:sp>
       <p:sp>
         <p:nvSpPr>
-          <p:cNvPr id="7" name="Text 5"/>
-          <p:cNvSpPr/>
-          <p:nvPr/>
-        </p:nvSpPr>
-        <p:spPr>
-          <a:xfrm>
-            <a:off x="640080" y="1965960"/>
-            <a:ext cx="5120640" cy="320040"/>
-          </a:xfrm>
-          <a:prstGeom prst="rect">
-            <a:avLst/>
-          </a:prstGeom>
-          <a:noFill/>
-          <a:ln/>
-        </p:spPr>
-        <p:txBody>
-          <a:bodyPr wrap="square" rtlCol="0" anchor="ctr"/>
-          <a:lstStyle/>
-          <a:p>
-            <a:pPr indent="0" marL="0">
-              <a:buNone/>
-            </a:pPr>
-            <a:r>
-              <a:rPr lang="en-US" sz="1500" b="1" dirty="0">
-                <a:solidFill>
-                  <a:srgbClr val="FF8C00"/>
-                </a:solidFill>
-                <a:latin typeface="Segoe UI" pitchFamily="34" charset="0"/>
-                <a:ea typeface="Segoe UI" pitchFamily="34" charset="-122"/>
-                <a:cs typeface="Segoe UI" pitchFamily="34" charset="-120"/>
-              </a:rPr>
-              <a:t>How a Conversation Flows</a:t>
-            </a:r>
-            <a:endParaRPr lang="en-US" sz="1500" dirty="0"/>
-          </a:p>
-        </p:txBody>
-      </p:sp>
-      <p:sp>
-        <p:nvSpPr>
-          <p:cNvPr id="8" name="Text 6"/>
-          <p:cNvSpPr/>
-          <p:nvPr/>
-        </p:nvSpPr>
-        <p:spPr>
-          <a:xfrm>
-            <a:off x="731520" y="2423160"/>
-            <a:ext cx="1188720" cy="320040"/>
-          </a:xfrm>
-          <a:prstGeom prst="rect">
-            <a:avLst/>
-          </a:prstGeom>
-          <a:noFill/>
-          <a:ln/>
-        </p:spPr>
-        <p:txBody>
-          <a:bodyPr wrap="square" rtlCol="0" anchor="ctr"/>
-          <a:lstStyle/>
-          <a:p>
-            <a:pPr indent="0" marL="0">
-              <a:buNone/>
-            </a:pPr>
-            <a:r>
-              <a:rPr lang="en-US" sz="1100" b="1" dirty="0">
-                <a:solidFill>
-                  <a:srgbClr val="4A90D9"/>
-                </a:solidFill>
-                <a:latin typeface="Segoe UI" pitchFamily="34" charset="0"/>
-                <a:ea typeface="Segoe UI" pitchFamily="34" charset="-122"/>
-                <a:cs typeface="Segoe UI" pitchFamily="34" charset="-120"/>
-              </a:rPr>
-              <a:t>Human:</a:t>
-            </a:r>
-            <a:endParaRPr lang="en-US" sz="1100" dirty="0"/>
-          </a:p>
-        </p:txBody>
-      </p:sp>
-      <p:sp>
-        <p:nvSpPr>
-          <p:cNvPr id="9" name="Text 7"/>
-          <p:cNvSpPr/>
-          <p:nvPr/>
-        </p:nvSpPr>
-        <p:spPr>
-          <a:xfrm>
-            <a:off x="1920240" y="2423160"/>
-            <a:ext cx="3840480" cy="548640"/>
-          </a:xfrm>
-          <a:prstGeom prst="rect">
-            <a:avLst/>
-          </a:prstGeom>
-          <a:noFill/>
-          <a:ln/>
-        </p:spPr>
-        <p:txBody>
-          <a:bodyPr wrap="square" rtlCol="0" anchor="ctr"/>
-          <a:lstStyle/>
-          <a:p>
-            <a:pPr indent="0" marL="0">
-              <a:lnSpc>
-                <a:spcPct val="115000"/>
-              </a:lnSpc>
-              <a:buNone/>
-            </a:pPr>
-            <a:r>
-              <a:rPr lang="en-US" sz="1050" dirty="0">
-                <a:solidFill>
-                  <a:srgbClr val="E0E0E0"/>
-                </a:solidFill>
-                <a:latin typeface="Segoe UI" pitchFamily="34" charset="0"/>
-                <a:ea typeface="Segoe UI" pitchFamily="34" charset="-122"/>
-                <a:cs typeface="Segoe UI" pitchFamily="34" charset="-120"/>
-              </a:rPr>
-              <a:t>"I need a dashboard for test results"</a:t>
-            </a:r>
-            <a:endParaRPr lang="en-US" sz="1050" dirty="0"/>
-          </a:p>
-        </p:txBody>
-      </p:sp>
-      <p:sp>
-        <p:nvSpPr>
-          <p:cNvPr id="10" name="Text 8"/>
-          <p:cNvSpPr/>
-          <p:nvPr/>
-        </p:nvSpPr>
-        <p:spPr>
-          <a:xfrm>
-            <a:off x="731520" y="3063240"/>
-            <a:ext cx="1188720" cy="320040"/>
-          </a:xfrm>
-          <a:prstGeom prst="rect">
-            <a:avLst/>
-          </a:prstGeom>
-          <a:noFill/>
-          <a:ln/>
-        </p:spPr>
-        <p:txBody>
-          <a:bodyPr wrap="square" rtlCol="0" anchor="ctr"/>
-          <a:lstStyle/>
-          <a:p>
-            <a:pPr indent="0" marL="0">
-              <a:buNone/>
-            </a:pPr>
-            <a:r>
-              <a:rPr lang="en-US" sz="1100" b="1" dirty="0">
-                <a:solidFill>
-                  <a:srgbClr val="00B4A0"/>
-                </a:solidFill>
-                <a:latin typeface="Segoe UI" pitchFamily="34" charset="0"/>
-                <a:ea typeface="Segoe UI" pitchFamily="34" charset="-122"/>
-                <a:cs typeface="Segoe UI" pitchFamily="34" charset="-120"/>
-              </a:rPr>
-              <a:t>AI asks:</a:t>
-            </a:r>
-            <a:endParaRPr lang="en-US" sz="1100" dirty="0"/>
-          </a:p>
-        </p:txBody>
-      </p:sp>
-      <p:sp>
-        <p:nvSpPr>
-          <p:cNvPr id="11" name="Text 9"/>
-          <p:cNvSpPr/>
-          <p:nvPr/>
-        </p:nvSpPr>
-        <p:spPr>
-          <a:xfrm>
-            <a:off x="1920240" y="3063240"/>
-            <a:ext cx="3840480" cy="548640"/>
-          </a:xfrm>
-          <a:prstGeom prst="rect">
-            <a:avLst/>
-          </a:prstGeom>
-          <a:noFill/>
-          <a:ln/>
-        </p:spPr>
-        <p:txBody>
-          <a:bodyPr wrap="square" rtlCol="0" anchor="ctr"/>
-          <a:lstStyle/>
-          <a:p>
-            <a:pPr indent="0" marL="0">
-              <a:lnSpc>
-                <a:spcPct val="115000"/>
-              </a:lnSpc>
-              <a:buNone/>
-            </a:pPr>
-            <a:r>
-              <a:rPr lang="en-US" sz="1050" dirty="0">
-                <a:solidFill>
-                  <a:srgbClr val="E0E0E0"/>
-                </a:solidFill>
-                <a:latin typeface="Segoe UI" pitchFamily="34" charset="0"/>
-                <a:ea typeface="Segoe UI" pitchFamily="34" charset="-122"/>
-                <a:cs typeface="Segoe UI" pitchFamily="34" charset="-120"/>
-              </a:rPr>
-              <a:t>"What test types? Who's the audience?</a:t>
-            </a:r>
-            <a:endParaRPr lang="en-US" sz="1050" dirty="0"/>
-          </a:p>
-          <a:p>
-            <a:pPr indent="0" marL="0">
-              <a:lnSpc>
-                <a:spcPct val="115000"/>
-              </a:lnSpc>
-              <a:buNone/>
-            </a:pPr>
-            <a:r>
-              <a:rPr lang="en-US" sz="1050" dirty="0">
-                <a:solidFill>
-                  <a:srgbClr val="E0E0E0"/>
-                </a:solidFill>
-                <a:latin typeface="Segoe UI" pitchFamily="34" charset="0"/>
-                <a:ea typeface="Segoe UI" pitchFamily="34" charset="-122"/>
-                <a:cs typeface="Segoe UI" pitchFamily="34" charset="-120"/>
-              </a:rPr>
-              <a:t>  Real-time or historical? What data sources?"</a:t>
-            </a:r>
-            <a:endParaRPr lang="en-US" sz="1050" dirty="0"/>
-          </a:p>
-        </p:txBody>
-      </p:sp>
-      <p:sp>
-        <p:nvSpPr>
-          <p:cNvPr id="12" name="Text 10"/>
-          <p:cNvSpPr/>
-          <p:nvPr/>
-        </p:nvSpPr>
-        <p:spPr>
-          <a:xfrm>
-            <a:off x="731520" y="3703320"/>
-            <a:ext cx="1188720" cy="320040"/>
-          </a:xfrm>
-          <a:prstGeom prst="rect">
-            <a:avLst/>
-          </a:prstGeom>
-          <a:noFill/>
-          <a:ln/>
-        </p:spPr>
-        <p:txBody>
-          <a:bodyPr wrap="square" rtlCol="0" anchor="ctr"/>
-          <a:lstStyle/>
-          <a:p>
-            <a:pPr indent="0" marL="0">
-              <a:buNone/>
-            </a:pPr>
-            <a:r>
-              <a:rPr lang="en-US" sz="1100" b="1" dirty="0">
-                <a:solidFill>
-                  <a:srgbClr val="4A90D9"/>
-                </a:solidFill>
-                <a:latin typeface="Segoe UI" pitchFamily="34" charset="0"/>
-                <a:ea typeface="Segoe UI" pitchFamily="34" charset="-122"/>
-                <a:cs typeface="Segoe UI" pitchFamily="34" charset="-120"/>
-              </a:rPr>
-              <a:t>Human:</a:t>
-            </a:r>
-            <a:endParaRPr lang="en-US" sz="1100" dirty="0"/>
-          </a:p>
-        </p:txBody>
-      </p:sp>
-      <p:sp>
-        <p:nvSpPr>
-          <p:cNvPr id="13" name="Text 11"/>
-          <p:cNvSpPr/>
-          <p:nvPr/>
-        </p:nvSpPr>
-        <p:spPr>
-          <a:xfrm>
-            <a:off x="1920240" y="3703320"/>
-            <a:ext cx="3840480" cy="548640"/>
-          </a:xfrm>
-          <a:prstGeom prst="rect">
-            <a:avLst/>
-          </a:prstGeom>
-          <a:noFill/>
-          <a:ln/>
-        </p:spPr>
-        <p:txBody>
-          <a:bodyPr wrap="square" rtlCol="0" anchor="ctr"/>
-          <a:lstStyle/>
-          <a:p>
-            <a:pPr indent="0" marL="0">
-              <a:lnSpc>
-                <a:spcPct val="115000"/>
-              </a:lnSpc>
-              <a:buNone/>
-            </a:pPr>
-            <a:r>
-              <a:rPr lang="en-US" sz="1050" dirty="0">
-                <a:solidFill>
-                  <a:srgbClr val="E0E0E0"/>
-                </a:solidFill>
-                <a:latin typeface="Segoe UI" pitchFamily="34" charset="0"/>
-                <a:ea typeface="Segoe UI" pitchFamily="34" charset="-122"/>
-                <a:cs typeface="Segoe UI" pitchFamily="34" charset="-120"/>
-              </a:rPr>
-              <a:t>"QA leads, Playwright results, real-time"</a:t>
-            </a:r>
-            <a:endParaRPr lang="en-US" sz="1050" dirty="0"/>
-          </a:p>
-        </p:txBody>
-      </p:sp>
-      <p:sp>
-        <p:nvSpPr>
-          <p:cNvPr id="14" name="Text 12"/>
-          <p:cNvSpPr/>
-          <p:nvPr/>
-        </p:nvSpPr>
-        <p:spPr>
-          <a:xfrm>
-            <a:off x="731520" y="4343400"/>
-            <a:ext cx="1188720" cy="320040"/>
-          </a:xfrm>
-          <a:prstGeom prst="rect">
-            <a:avLst/>
-          </a:prstGeom>
-          <a:noFill/>
-          <a:ln/>
-        </p:spPr>
-        <p:txBody>
-          <a:bodyPr wrap="square" rtlCol="0" anchor="ctr"/>
-          <a:lstStyle/>
-          <a:p>
-            <a:pPr indent="0" marL="0">
-              <a:buNone/>
-            </a:pPr>
-            <a:r>
-              <a:rPr lang="en-US" sz="1100" b="1" dirty="0">
-                <a:solidFill>
-                  <a:srgbClr val="00B4A0"/>
-                </a:solidFill>
-                <a:latin typeface="Segoe UI" pitchFamily="34" charset="0"/>
-                <a:ea typeface="Segoe UI" pitchFamily="34" charset="-122"/>
-                <a:cs typeface="Segoe UI" pitchFamily="34" charset="-120"/>
-              </a:rPr>
-              <a:t>AI confirms:</a:t>
-            </a:r>
-            <a:endParaRPr lang="en-US" sz="1100" dirty="0"/>
-          </a:p>
-        </p:txBody>
-      </p:sp>
-      <p:sp>
-        <p:nvSpPr>
-          <p:cNvPr id="15" name="Text 13"/>
-          <p:cNvSpPr/>
-          <p:nvPr/>
-        </p:nvSpPr>
-        <p:spPr>
-          <a:xfrm>
-            <a:off x="1920240" y="4343400"/>
-            <a:ext cx="3840480" cy="548640"/>
-          </a:xfrm>
-          <a:prstGeom prst="rect">
-            <a:avLst/>
-          </a:prstGeom>
-          <a:noFill/>
-          <a:ln/>
-        </p:spPr>
-        <p:txBody>
-          <a:bodyPr wrap="square" rtlCol="0" anchor="ctr"/>
-          <a:lstStyle/>
-          <a:p>
-            <a:pPr indent="0" marL="0">
-              <a:lnSpc>
-                <a:spcPct val="115000"/>
-              </a:lnSpc>
-              <a:buNone/>
-            </a:pPr>
-            <a:r>
-              <a:rPr lang="en-US" sz="1050" dirty="0">
-                <a:solidFill>
-                  <a:srgbClr val="E0E0E0"/>
-                </a:solidFill>
-                <a:latin typeface="Segoe UI" pitchFamily="34" charset="0"/>
-                <a:ea typeface="Segoe UI" pitchFamily="34" charset="-122"/>
-                <a:cs typeface="Segoe UI" pitchFamily="34" charset="-120"/>
-              </a:rPr>
-              <a:t>"Building: WebSocket dashboard for QA leads</a:t>
-            </a:r>
-            <a:endParaRPr lang="en-US" sz="1050" dirty="0"/>
-          </a:p>
-          <a:p>
-            <a:pPr indent="0" marL="0">
-              <a:lnSpc>
-                <a:spcPct val="115000"/>
-              </a:lnSpc>
-              <a:buNone/>
-            </a:pPr>
-            <a:r>
-              <a:rPr lang="en-US" sz="1050" dirty="0">
-                <a:solidFill>
-                  <a:srgbClr val="E0E0E0"/>
-                </a:solidFill>
-                <a:latin typeface="Segoe UI" pitchFamily="34" charset="0"/>
-                <a:ea typeface="Segoe UI" pitchFamily="34" charset="-122"/>
-                <a:cs typeface="Segoe UI" pitchFamily="34" charset="-120"/>
-              </a:rPr>
-              <a:t>  showing live Playwright results with pass/fail</a:t>
-            </a:r>
-            <a:endParaRPr lang="en-US" sz="1050" dirty="0"/>
-          </a:p>
-          <a:p>
-            <a:pPr indent="0" marL="0">
-              <a:lnSpc>
-                <a:spcPct val="115000"/>
-              </a:lnSpc>
-              <a:buNone/>
-            </a:pPr>
-            <a:r>
-              <a:rPr lang="en-US" sz="1050" dirty="0">
-                <a:solidFill>
-                  <a:srgbClr val="E0E0E0"/>
-                </a:solidFill>
-                <a:latin typeface="Segoe UI" pitchFamily="34" charset="0"/>
-                <a:ea typeface="Segoe UI" pitchFamily="34" charset="-122"/>
-                <a:cs typeface="Segoe UI" pitchFamily="34" charset="-120"/>
-              </a:rPr>
-              <a:t>  trends. Correct?"</a:t>
-            </a:r>
-            <a:endParaRPr lang="en-US" sz="1050" dirty="0"/>
-          </a:p>
-        </p:txBody>
-      </p:sp>
-      <p:sp>
-        <p:nvSpPr>
-          <p:cNvPr id="16" name="Text 14"/>
-          <p:cNvSpPr/>
-          <p:nvPr/>
-        </p:nvSpPr>
-        <p:spPr>
-          <a:xfrm>
-            <a:off x="731520" y="4983480"/>
-            <a:ext cx="1188720" cy="320040"/>
-          </a:xfrm>
-          <a:prstGeom prst="rect">
-            <a:avLst/>
-          </a:prstGeom>
-          <a:noFill/>
-          <a:ln/>
-        </p:spPr>
-        <p:txBody>
-          <a:bodyPr wrap="square" rtlCol="0" anchor="ctr"/>
-          <a:lstStyle/>
-          <a:p>
-            <a:pPr indent="0" marL="0">
-              <a:buNone/>
-            </a:pPr>
-            <a:r>
-              <a:rPr lang="en-US" sz="1100" b="1" dirty="0">
-                <a:solidFill>
-                  <a:srgbClr val="4A90D9"/>
-                </a:solidFill>
-                <a:latin typeface="Segoe UI" pitchFamily="34" charset="0"/>
-                <a:ea typeface="Segoe UI" pitchFamily="34" charset="-122"/>
-                <a:cs typeface="Segoe UI" pitchFamily="34" charset="-120"/>
-              </a:rPr>
-              <a:t>Human:</a:t>
-            </a:r>
-            <a:endParaRPr lang="en-US" sz="1100" dirty="0"/>
-          </a:p>
-        </p:txBody>
-      </p:sp>
-      <p:sp>
-        <p:nvSpPr>
-          <p:cNvPr id="17" name="Text 15"/>
-          <p:cNvSpPr/>
-          <p:nvPr/>
-        </p:nvSpPr>
-        <p:spPr>
-          <a:xfrm>
-            <a:off x="1920240" y="4983480"/>
-            <a:ext cx="3840480" cy="548640"/>
-          </a:xfrm>
-          <a:prstGeom prst="rect">
-            <a:avLst/>
-          </a:prstGeom>
-          <a:noFill/>
-          <a:ln/>
-        </p:spPr>
-        <p:txBody>
-          <a:bodyPr wrap="square" rtlCol="0" anchor="ctr"/>
-          <a:lstStyle/>
-          <a:p>
-            <a:pPr indent="0" marL="0">
-              <a:lnSpc>
-                <a:spcPct val="115000"/>
-              </a:lnSpc>
-              <a:buNone/>
-            </a:pPr>
-            <a:r>
-              <a:rPr lang="en-US" sz="1050" dirty="0">
-                <a:solidFill>
-                  <a:srgbClr val="E0E0E0"/>
-                </a:solidFill>
-                <a:latin typeface="Segoe UI" pitchFamily="34" charset="0"/>
-                <a:ea typeface="Segoe UI" pitchFamily="34" charset="-122"/>
-                <a:cs typeface="Segoe UI" pitchFamily="34" charset="-120"/>
-              </a:rPr>
-              <a:t>"Yes, proceed."</a:t>
-            </a:r>
-            <a:endParaRPr lang="en-US" sz="1050" dirty="0"/>
-          </a:p>
-        </p:txBody>
-      </p:sp>
-      <p:sp>
-        <p:nvSpPr>
-          <p:cNvPr id="18" name="Text 16"/>
-          <p:cNvSpPr/>
-          <p:nvPr/>
-        </p:nvSpPr>
-        <p:spPr>
-          <a:xfrm>
-            <a:off x="731520" y="5623560"/>
-            <a:ext cx="1188720" cy="320040"/>
-          </a:xfrm>
-          <a:prstGeom prst="rect">
-            <a:avLst/>
-          </a:prstGeom>
-          <a:noFill/>
-          <a:ln/>
-        </p:spPr>
-        <p:txBody>
-          <a:bodyPr wrap="square" rtlCol="0" anchor="ctr"/>
-          <a:lstStyle/>
-          <a:p>
-            <a:pPr indent="0" marL="0">
-              <a:buNone/>
-            </a:pPr>
-            <a:r>
-              <a:rPr lang="en-US" sz="1100" b="1" dirty="0">
-                <a:solidFill>
-                  <a:srgbClr val="2ECC71"/>
-                </a:solidFill>
-                <a:latin typeface="Segoe UI" pitchFamily="34" charset="0"/>
-                <a:ea typeface="Segoe UI" pitchFamily="34" charset="-122"/>
-                <a:cs typeface="Segoe UI" pitchFamily="34" charset="-120"/>
-              </a:rPr>
-              <a:t>AI executes:</a:t>
-            </a:r>
-            <a:endParaRPr lang="en-US" sz="1100" dirty="0"/>
-          </a:p>
-        </p:txBody>
-      </p:sp>
-      <p:sp>
-        <p:nvSpPr>
-          <p:cNvPr id="19" name="Text 17"/>
-          <p:cNvSpPr/>
-          <p:nvPr/>
-        </p:nvSpPr>
-        <p:spPr>
-          <a:xfrm>
-            <a:off x="1920240" y="5623560"/>
-            <a:ext cx="3840480" cy="548640"/>
-          </a:xfrm>
-          <a:prstGeom prst="rect">
-            <a:avLst/>
-          </a:prstGeom>
-          <a:noFill/>
-          <a:ln/>
-        </p:spPr>
-        <p:txBody>
-          <a:bodyPr wrap="square" rtlCol="0" anchor="ctr"/>
-          <a:lstStyle/>
-          <a:p>
-            <a:pPr indent="0" marL="0">
-              <a:lnSpc>
-                <a:spcPct val="115000"/>
-              </a:lnSpc>
-              <a:buNone/>
-            </a:pPr>
-            <a:r>
-              <a:rPr lang="en-US" sz="1050" dirty="0">
-                <a:solidFill>
-                  <a:srgbClr val="E0E0E0"/>
-                </a:solidFill>
-                <a:latin typeface="Segoe UI" pitchFamily="34" charset="0"/>
-                <a:ea typeface="Segoe UI" pitchFamily="34" charset="-122"/>
-                <a:cs typeface="Segoe UI" pitchFamily="34" charset="-120"/>
-              </a:rPr>
-              <a:t>Structured plan → architecture → build →</a:t>
-            </a:r>
-            <a:endParaRPr lang="en-US" sz="1050" dirty="0"/>
-          </a:p>
-          <a:p>
-            <a:pPr indent="0" marL="0">
-              <a:lnSpc>
-                <a:spcPct val="115000"/>
-              </a:lnSpc>
-              <a:buNone/>
-            </a:pPr>
-            <a:r>
-              <a:rPr lang="en-US" sz="1050" dirty="0">
-                <a:solidFill>
-                  <a:srgbClr val="E0E0E0"/>
-                </a:solidFill>
-                <a:latin typeface="Segoe UI" pitchFamily="34" charset="0"/>
-                <a:ea typeface="Segoe UI" pitchFamily="34" charset="-122"/>
-                <a:cs typeface="Segoe UI" pitchFamily="34" charset="-120"/>
-              </a:rPr>
-              <a:t>  validate → deploy</a:t>
-            </a:r>
-            <a:endParaRPr lang="en-US" sz="1050" dirty="0"/>
-          </a:p>
-        </p:txBody>
-      </p:sp>
-      <p:sp>
-        <p:nvSpPr>
-          <p:cNvPr id="20" name="Shape 18"/>
-          <p:cNvSpPr/>
-          <p:nvPr/>
-        </p:nvSpPr>
-        <p:spPr>
-          <a:xfrm>
-            <a:off x="6217920" y="1828800"/>
-            <a:ext cx="5486400" cy="4754880"/>
+          <p:cNvPr id="7" name="Shape 5"/>
+          <p:cNvSpPr/>
+          <p:nvPr/>
+        </p:nvSpPr>
+        <p:spPr>
+          <a:xfrm>
+            <a:off x="411480" y="1874520"/>
+            <a:ext cx="2514600" cy="457200"/>
           </a:xfrm>
           <a:prstGeom prst="roundRect">
             <a:avLst>
-              <a:gd name="adj" fmla="val 1923"/>
+              <a:gd name="adj" fmla="val 20000"/>
+            </a:avLst>
+          </a:prstGeom>
+          <a:solidFill>
+            <a:srgbClr val="007ACC"/>
+          </a:solidFill>
+          <a:ln w="12700">
+            <a:solidFill>
+              <a:srgbClr val="007ACC"/>
+            </a:solidFill>
+            <a:prstDash val="solid"/>
+          </a:ln>
+          <a:effectLst>
+            <a:outerShdw sx="100000" sy="100000" kx="0" ky="0" algn="bl" rotWithShape="0" blurRad="76200" dist="25400" dir="16200000">
+              <a:srgbClr val="000000">
+                <a:alpha val="30000"/>
+              </a:srgbClr>
+            </a:outerShdw>
+          </a:effectLst>
+        </p:spPr>
+      </p:sp>
+      <p:sp>
+        <p:nvSpPr>
+          <p:cNvPr id="8" name="Text 6"/>
+          <p:cNvSpPr/>
+          <p:nvPr/>
+        </p:nvSpPr>
+        <p:spPr>
+          <a:xfrm>
+            <a:off x="411480" y="1874520"/>
+            <a:ext cx="2514600" cy="457200"/>
+          </a:xfrm>
+          <a:prstGeom prst="rect">
+            <a:avLst/>
+          </a:prstGeom>
+          <a:noFill/>
+          <a:ln/>
+        </p:spPr>
+        <p:txBody>
+          <a:bodyPr wrap="square" rtlCol="0" anchor="ctr"/>
+          <a:lstStyle/>
+          <a:p>
+            <a:pPr algn="ctr" indent="0" marL="0">
+              <a:buNone/>
+            </a:pPr>
+            <a:r>
+              <a:rPr lang="en-US" sz="1500" b="1" dirty="0">
+                <a:solidFill>
+                  <a:srgbClr val="FFFFFF"/>
+                </a:solidFill>
+                <a:latin typeface="Segoe UI" pitchFamily="34" charset="0"/>
+                <a:ea typeface="Segoe UI" pitchFamily="34" charset="-122"/>
+                <a:cs typeface="Segoe UI" pitchFamily="34" charset="-120"/>
+              </a:rPr>
+              <a:t>PLAN</a:t>
+            </a:r>
+            <a:endParaRPr lang="en-US" sz="1500" dirty="0"/>
+          </a:p>
+        </p:txBody>
+      </p:sp>
+      <p:sp>
+        <p:nvSpPr>
+          <p:cNvPr id="9" name="Shape 7"/>
+          <p:cNvSpPr/>
+          <p:nvPr/>
+        </p:nvSpPr>
+        <p:spPr>
+          <a:xfrm>
+            <a:off x="411480" y="2514600"/>
+            <a:ext cx="2514600" cy="1005840"/>
+          </a:xfrm>
+          <a:prstGeom prst="roundRect">
+            <a:avLst>
+              <a:gd name="adj" fmla="val 9091"/>
             </a:avLst>
           </a:prstGeom>
           <a:solidFill>
@@ -6051,14 +5265,350 @@
       </p:sp>
       <p:sp>
         <p:nvSpPr>
-          <p:cNvPr id="21" name="Shape 19"/>
-          <p:cNvSpPr/>
-          <p:nvPr/>
-        </p:nvSpPr>
-        <p:spPr>
-          <a:xfrm>
-            <a:off x="6217920" y="1828800"/>
-            <a:ext cx="5486400" cy="36576"/>
+          <p:cNvPr id="10" name="Text 8"/>
+          <p:cNvSpPr/>
+          <p:nvPr/>
+        </p:nvSpPr>
+        <p:spPr>
+          <a:xfrm>
+            <a:off x="548640" y="2587752"/>
+            <a:ext cx="2240280" cy="320040"/>
+          </a:xfrm>
+          <a:prstGeom prst="rect">
+            <a:avLst/>
+          </a:prstGeom>
+          <a:noFill/>
+          <a:ln/>
+        </p:spPr>
+        <p:txBody>
+          <a:bodyPr wrap="square" rtlCol="0" anchor="ctr"/>
+          <a:lstStyle/>
+          <a:p>
+            <a:pPr indent="0" marL="0">
+              <a:buNone/>
+            </a:pPr>
+            <a:r>
+              <a:rPr lang="en-US" sz="1300" b="1" dirty="0">
+                <a:solidFill>
+                  <a:srgbClr val="007ACC"/>
+                </a:solidFill>
+                <a:latin typeface="Segoe UI" pitchFamily="34" charset="0"/>
+                <a:ea typeface="Segoe UI" pitchFamily="34" charset="-122"/>
+                <a:cs typeface="Segoe UI" pitchFamily="34" charset="-120"/>
+              </a:rPr>
+              <a:t>/autoplan</a:t>
+            </a:r>
+            <a:endParaRPr lang="en-US" sz="1300" dirty="0"/>
+          </a:p>
+        </p:txBody>
+      </p:sp>
+      <p:sp>
+        <p:nvSpPr>
+          <p:cNvPr id="11" name="Text 9"/>
+          <p:cNvSpPr/>
+          <p:nvPr/>
+        </p:nvSpPr>
+        <p:spPr>
+          <a:xfrm>
+            <a:off x="548640" y="2926080"/>
+            <a:ext cx="2240280" cy="502920"/>
+          </a:xfrm>
+          <a:prstGeom prst="rect">
+            <a:avLst/>
+          </a:prstGeom>
+          <a:noFill/>
+          <a:ln/>
+        </p:spPr>
+        <p:txBody>
+          <a:bodyPr wrap="square" rtlCol="0" anchor="ctr"/>
+          <a:lstStyle/>
+          <a:p>
+            <a:pPr indent="0" marL="0">
+              <a:buNone/>
+            </a:pPr>
+            <a:r>
+              <a:rPr lang="en-US" sz="1100" dirty="0">
+                <a:solidFill>
+                  <a:srgbClr val="E0E0E0"/>
+                </a:solidFill>
+                <a:latin typeface="Segoe UI" pitchFamily="34" charset="0"/>
+                <a:ea typeface="Segoe UI" pitchFamily="34" charset="-122"/>
+                <a:cs typeface="Segoe UI" pitchFamily="34" charset="-120"/>
+              </a:rPr>
+              <a:t>Express planning (Phases 1-3)</a:t>
+            </a:r>
+            <a:endParaRPr lang="en-US" sz="1100" dirty="0"/>
+          </a:p>
+        </p:txBody>
+      </p:sp>
+      <p:sp>
+        <p:nvSpPr>
+          <p:cNvPr id="12" name="Shape 10"/>
+          <p:cNvSpPr/>
+          <p:nvPr/>
+        </p:nvSpPr>
+        <p:spPr>
+          <a:xfrm>
+            <a:off x="411480" y="3703320"/>
+            <a:ext cx="2514600" cy="1005840"/>
+          </a:xfrm>
+          <a:prstGeom prst="roundRect">
+            <a:avLst>
+              <a:gd name="adj" fmla="val 9091"/>
+            </a:avLst>
+          </a:prstGeom>
+          <a:solidFill>
+            <a:srgbClr val="262640"/>
+          </a:solidFill>
+          <a:ln w="12700">
+            <a:solidFill>
+              <a:srgbClr val="262640"/>
+            </a:solidFill>
+            <a:prstDash val="solid"/>
+          </a:ln>
+          <a:effectLst>
+            <a:outerShdw sx="100000" sy="100000" kx="0" ky="0" algn="bl" rotWithShape="0" blurRad="76200" dist="25400" dir="16200000">
+              <a:srgbClr val="000000">
+                <a:alpha val="30000"/>
+              </a:srgbClr>
+            </a:outerShdw>
+          </a:effectLst>
+        </p:spPr>
+      </p:sp>
+      <p:sp>
+        <p:nvSpPr>
+          <p:cNvPr id="13" name="Text 11"/>
+          <p:cNvSpPr/>
+          <p:nvPr/>
+        </p:nvSpPr>
+        <p:spPr>
+          <a:xfrm>
+            <a:off x="548640" y="3776472"/>
+            <a:ext cx="2240280" cy="320040"/>
+          </a:xfrm>
+          <a:prstGeom prst="rect">
+            <a:avLst/>
+          </a:prstGeom>
+          <a:noFill/>
+          <a:ln/>
+        </p:spPr>
+        <p:txBody>
+          <a:bodyPr wrap="square" rtlCol="0" anchor="ctr"/>
+          <a:lstStyle/>
+          <a:p>
+            <a:pPr indent="0" marL="0">
+              <a:buNone/>
+            </a:pPr>
+            <a:r>
+              <a:rPr lang="en-US" sz="1300" b="1" dirty="0">
+                <a:solidFill>
+                  <a:srgbClr val="007ACC"/>
+                </a:solidFill>
+                <a:latin typeface="Segoe UI" pitchFamily="34" charset="0"/>
+                <a:ea typeface="Segoe UI" pitchFamily="34" charset="-122"/>
+                <a:cs typeface="Segoe UI" pitchFamily="34" charset="-120"/>
+              </a:rPr>
+              <a:t>/search</a:t>
+            </a:r>
+            <a:endParaRPr lang="en-US" sz="1300" dirty="0"/>
+          </a:p>
+        </p:txBody>
+      </p:sp>
+      <p:sp>
+        <p:nvSpPr>
+          <p:cNvPr id="14" name="Text 12"/>
+          <p:cNvSpPr/>
+          <p:nvPr/>
+        </p:nvSpPr>
+        <p:spPr>
+          <a:xfrm>
+            <a:off x="548640" y="4114800"/>
+            <a:ext cx="2240280" cy="502920"/>
+          </a:xfrm>
+          <a:prstGeom prst="rect">
+            <a:avLst/>
+          </a:prstGeom>
+          <a:noFill/>
+          <a:ln/>
+        </p:spPr>
+        <p:txBody>
+          <a:bodyPr wrap="square" rtlCol="0" anchor="ctr"/>
+          <a:lstStyle/>
+          <a:p>
+            <a:pPr indent="0" marL="0">
+              <a:buNone/>
+            </a:pPr>
+            <a:r>
+              <a:rPr lang="en-US" sz="1100" dirty="0">
+                <a:solidFill>
+                  <a:srgbClr val="E0E0E0"/>
+                </a:solidFill>
+                <a:latin typeface="Segoe UI" pitchFamily="34" charset="0"/>
+                <a:ea typeface="Segoe UI" pitchFamily="34" charset="-122"/>
+                <a:cs typeface="Segoe UI" pitchFamily="34" charset="-120"/>
+              </a:rPr>
+              <a:t>Research before coding</a:t>
+            </a:r>
+            <a:endParaRPr lang="en-US" sz="1100" dirty="0"/>
+          </a:p>
+        </p:txBody>
+      </p:sp>
+      <p:sp>
+        <p:nvSpPr>
+          <p:cNvPr id="15" name="Shape 13"/>
+          <p:cNvSpPr/>
+          <p:nvPr/>
+        </p:nvSpPr>
+        <p:spPr>
+          <a:xfrm>
+            <a:off x="411480" y="4892040"/>
+            <a:ext cx="2514600" cy="1005840"/>
+          </a:xfrm>
+          <a:prstGeom prst="roundRect">
+            <a:avLst>
+              <a:gd name="adj" fmla="val 9091"/>
+            </a:avLst>
+          </a:prstGeom>
+          <a:solidFill>
+            <a:srgbClr val="262640"/>
+          </a:solidFill>
+          <a:ln w="12700">
+            <a:solidFill>
+              <a:srgbClr val="262640"/>
+            </a:solidFill>
+            <a:prstDash val="solid"/>
+          </a:ln>
+          <a:effectLst>
+            <a:outerShdw sx="100000" sy="100000" kx="0" ky="0" algn="bl" rotWithShape="0" blurRad="76200" dist="25400" dir="16200000">
+              <a:srgbClr val="000000">
+                <a:alpha val="30000"/>
+              </a:srgbClr>
+            </a:outerShdw>
+          </a:effectLst>
+        </p:spPr>
+      </p:sp>
+      <p:sp>
+        <p:nvSpPr>
+          <p:cNvPr id="16" name="Text 14"/>
+          <p:cNvSpPr/>
+          <p:nvPr/>
+        </p:nvSpPr>
+        <p:spPr>
+          <a:xfrm>
+            <a:off x="548640" y="4965192"/>
+            <a:ext cx="2240280" cy="320040"/>
+          </a:xfrm>
+          <a:prstGeom prst="rect">
+            <a:avLst/>
+          </a:prstGeom>
+          <a:noFill/>
+          <a:ln/>
+        </p:spPr>
+        <p:txBody>
+          <a:bodyPr wrap="square" rtlCol="0" anchor="ctr"/>
+          <a:lstStyle/>
+          <a:p>
+            <a:pPr indent="0" marL="0">
+              <a:buNone/>
+            </a:pPr>
+            <a:r>
+              <a:rPr lang="en-US" sz="1300" b="1" dirty="0">
+                <a:solidFill>
+                  <a:srgbClr val="007ACC"/>
+                </a:solidFill>
+                <a:latin typeface="Segoe UI" pitchFamily="34" charset="0"/>
+                <a:ea typeface="Segoe UI" pitchFamily="34" charset="-122"/>
+                <a:cs typeface="Segoe UI" pitchFamily="34" charset="-120"/>
+              </a:rPr>
+              <a:t>/compact</a:t>
+            </a:r>
+            <a:endParaRPr lang="en-US" sz="1300" dirty="0"/>
+          </a:p>
+        </p:txBody>
+      </p:sp>
+      <p:sp>
+        <p:nvSpPr>
+          <p:cNvPr id="17" name="Text 15"/>
+          <p:cNvSpPr/>
+          <p:nvPr/>
+        </p:nvSpPr>
+        <p:spPr>
+          <a:xfrm>
+            <a:off x="548640" y="5303520"/>
+            <a:ext cx="2240280" cy="502920"/>
+          </a:xfrm>
+          <a:prstGeom prst="rect">
+            <a:avLst/>
+          </a:prstGeom>
+          <a:noFill/>
+          <a:ln/>
+        </p:spPr>
+        <p:txBody>
+          <a:bodyPr wrap="square" rtlCol="0" anchor="ctr"/>
+          <a:lstStyle/>
+          <a:p>
+            <a:pPr indent="0" marL="0">
+              <a:buNone/>
+            </a:pPr>
+            <a:r>
+              <a:rPr lang="en-US" sz="1100" dirty="0">
+                <a:solidFill>
+                  <a:srgbClr val="E0E0E0"/>
+                </a:solidFill>
+                <a:latin typeface="Segoe UI" pitchFamily="34" charset="0"/>
+                <a:ea typeface="Segoe UI" pitchFamily="34" charset="-122"/>
+                <a:cs typeface="Segoe UI" pitchFamily="34" charset="-120"/>
+              </a:rPr>
+              <a:t>Context management</a:t>
+            </a:r>
+            <a:endParaRPr lang="en-US" sz="1100" dirty="0"/>
+          </a:p>
+        </p:txBody>
+      </p:sp>
+      <p:sp>
+        <p:nvSpPr>
+          <p:cNvPr id="18" name="Shape 16"/>
+          <p:cNvSpPr/>
+          <p:nvPr/>
+        </p:nvSpPr>
+        <p:spPr>
+          <a:xfrm>
+            <a:off x="3246120" y="1737360"/>
+            <a:ext cx="2788920" cy="4572000"/>
+          </a:xfrm>
+          <a:prstGeom prst="roundRect">
+            <a:avLst>
+              <a:gd name="adj" fmla="val 3279"/>
+            </a:avLst>
+          </a:prstGeom>
+          <a:solidFill>
+            <a:srgbClr val="262640"/>
+          </a:solidFill>
+          <a:ln w="12700">
+            <a:solidFill>
+              <a:srgbClr val="262640"/>
+            </a:solidFill>
+            <a:prstDash val="solid"/>
+          </a:ln>
+          <a:effectLst>
+            <a:outerShdw sx="100000" sy="100000" kx="0" ky="0" algn="bl" rotWithShape="0" blurRad="76200" dist="25400" dir="16200000">
+              <a:srgbClr val="000000">
+                <a:alpha val="30000"/>
+              </a:srgbClr>
+            </a:outerShdw>
+          </a:effectLst>
+        </p:spPr>
+      </p:sp>
+      <p:sp>
+        <p:nvSpPr>
+          <p:cNvPr id="19" name="Shape 17"/>
+          <p:cNvSpPr/>
+          <p:nvPr/>
+        </p:nvSpPr>
+        <p:spPr>
+          <a:xfrm>
+            <a:off x="3246120" y="1737360"/>
+            <a:ext cx="2788920" cy="36576"/>
           </a:xfrm>
           <a:prstGeom prst="rect">
             <a:avLst/>
@@ -6071,38 +5621,535 @@
       </p:sp>
       <p:sp>
         <p:nvSpPr>
-          <p:cNvPr id="22" name="Text 20"/>
-          <p:cNvSpPr/>
-          <p:nvPr/>
-        </p:nvSpPr>
-        <p:spPr>
-          <a:xfrm>
-            <a:off x="6400800" y="1965960"/>
-            <a:ext cx="5120640" cy="320040"/>
-          </a:xfrm>
-          <a:prstGeom prst="rect">
-            <a:avLst/>
-          </a:prstGeom>
-          <a:noFill/>
-          <a:ln/>
-        </p:spPr>
-        <p:txBody>
-          <a:bodyPr wrap="square" rtlCol="0" anchor="ctr"/>
-          <a:lstStyle/>
-          <a:p>
-            <a:pPr indent="0" marL="0">
+          <p:cNvPr id="20" name="Shape 18"/>
+          <p:cNvSpPr/>
+          <p:nvPr/>
+        </p:nvSpPr>
+        <p:spPr>
+          <a:xfrm>
+            <a:off x="3383280" y="1874520"/>
+            <a:ext cx="2514600" cy="457200"/>
+          </a:xfrm>
+          <a:prstGeom prst="roundRect">
+            <a:avLst>
+              <a:gd name="adj" fmla="val 20000"/>
+            </a:avLst>
+          </a:prstGeom>
+          <a:solidFill>
+            <a:srgbClr val="00B4A0"/>
+          </a:solidFill>
+          <a:ln w="12700">
+            <a:solidFill>
+              <a:srgbClr val="00B4A0"/>
+            </a:solidFill>
+            <a:prstDash val="solid"/>
+          </a:ln>
+          <a:effectLst>
+            <a:outerShdw sx="100000" sy="100000" kx="0" ky="0" algn="bl" rotWithShape="0" blurRad="76200" dist="25400" dir="16200000">
+              <a:srgbClr val="000000">
+                <a:alpha val="30000"/>
+              </a:srgbClr>
+            </a:outerShdw>
+          </a:effectLst>
+        </p:spPr>
+      </p:sp>
+      <p:sp>
+        <p:nvSpPr>
+          <p:cNvPr id="21" name="Text 19"/>
+          <p:cNvSpPr/>
+          <p:nvPr/>
+        </p:nvSpPr>
+        <p:spPr>
+          <a:xfrm>
+            <a:off x="3383280" y="1874520"/>
+            <a:ext cx="2514600" cy="457200"/>
+          </a:xfrm>
+          <a:prstGeom prst="rect">
+            <a:avLst/>
+          </a:prstGeom>
+          <a:noFill/>
+          <a:ln/>
+        </p:spPr>
+        <p:txBody>
+          <a:bodyPr wrap="square" rtlCol="0" anchor="ctr"/>
+          <a:lstStyle/>
+          <a:p>
+            <a:pPr algn="ctr" indent="0" marL="0">
               <a:buNone/>
             </a:pPr>
             <a:r>
               <a:rPr lang="en-US" sz="1500" b="1" dirty="0">
                 <a:solidFill>
+                  <a:srgbClr val="FFFFFF"/>
+                </a:solidFill>
+                <a:latin typeface="Segoe UI" pitchFamily="34" charset="0"/>
+                <a:ea typeface="Segoe UI" pitchFamily="34" charset="-122"/>
+                <a:cs typeface="Segoe UI" pitchFamily="34" charset="-120"/>
+              </a:rPr>
+              <a:t>BUILD</a:t>
+            </a:r>
+            <a:endParaRPr lang="en-US" sz="1500" dirty="0"/>
+          </a:p>
+        </p:txBody>
+      </p:sp>
+      <p:sp>
+        <p:nvSpPr>
+          <p:cNvPr id="22" name="Shape 20"/>
+          <p:cNvSpPr/>
+          <p:nvPr/>
+        </p:nvSpPr>
+        <p:spPr>
+          <a:xfrm>
+            <a:off x="3383280" y="2514600"/>
+            <a:ext cx="2514600" cy="1005840"/>
+          </a:xfrm>
+          <a:prstGeom prst="roundRect">
+            <a:avLst>
+              <a:gd name="adj" fmla="val 9091"/>
+            </a:avLst>
+          </a:prstGeom>
+          <a:solidFill>
+            <a:srgbClr val="262640"/>
+          </a:solidFill>
+          <a:ln w="12700">
+            <a:solidFill>
+              <a:srgbClr val="262640"/>
+            </a:solidFill>
+            <a:prstDash val="solid"/>
+          </a:ln>
+          <a:effectLst>
+            <a:outerShdw sx="100000" sy="100000" kx="0" ky="0" algn="bl" rotWithShape="0" blurRad="76200" dist="25400" dir="16200000">
+              <a:srgbClr val="000000">
+                <a:alpha val="30000"/>
+              </a:srgbClr>
+            </a:outerShdw>
+          </a:effectLst>
+        </p:spPr>
+      </p:sp>
+      <p:sp>
+        <p:nvSpPr>
+          <p:cNvPr id="23" name="Text 21"/>
+          <p:cNvSpPr/>
+          <p:nvPr/>
+        </p:nvSpPr>
+        <p:spPr>
+          <a:xfrm>
+            <a:off x="3520440" y="2587752"/>
+            <a:ext cx="2240280" cy="320040"/>
+          </a:xfrm>
+          <a:prstGeom prst="rect">
+            <a:avLst/>
+          </a:prstGeom>
+          <a:noFill/>
+          <a:ln/>
+        </p:spPr>
+        <p:txBody>
+          <a:bodyPr wrap="square" rtlCol="0" anchor="ctr"/>
+          <a:lstStyle/>
+          <a:p>
+            <a:pPr indent="0" marL="0">
+              <a:buNone/>
+            </a:pPr>
+            <a:r>
+              <a:rPr lang="en-US" sz="1300" b="1" dirty="0">
+                <a:solidFill>
                   <a:srgbClr val="00B4A0"/>
                 </a:solidFill>
                 <a:latin typeface="Segoe UI" pitchFamily="34" charset="0"/>
                 <a:ea typeface="Segoe UI" pitchFamily="34" charset="-122"/>
                 <a:cs typeface="Segoe UI" pitchFamily="34" charset="-120"/>
               </a:rPr>
-              <a:t>Alignment Behaviors</a:t>
+              <a:t>/tdd</a:t>
+            </a:r>
+            <a:endParaRPr lang="en-US" sz="1300" dirty="0"/>
+          </a:p>
+        </p:txBody>
+      </p:sp>
+      <p:sp>
+        <p:nvSpPr>
+          <p:cNvPr id="24" name="Text 22"/>
+          <p:cNvSpPr/>
+          <p:nvPr/>
+        </p:nvSpPr>
+        <p:spPr>
+          <a:xfrm>
+            <a:off x="3520440" y="2926080"/>
+            <a:ext cx="2240280" cy="502920"/>
+          </a:xfrm>
+          <a:prstGeom prst="rect">
+            <a:avLst/>
+          </a:prstGeom>
+          <a:noFill/>
+          <a:ln/>
+        </p:spPr>
+        <p:txBody>
+          <a:bodyPr wrap="square" rtlCol="0" anchor="ctr"/>
+          <a:lstStyle/>
+          <a:p>
+            <a:pPr indent="0" marL="0">
+              <a:buNone/>
+            </a:pPr>
+            <a:r>
+              <a:rPr lang="en-US" sz="1100" dirty="0">
+                <a:solidFill>
+                  <a:srgbClr val="E0E0E0"/>
+                </a:solidFill>
+                <a:latin typeface="Segoe UI" pitchFamily="34" charset="0"/>
+                <a:ea typeface="Segoe UI" pitchFamily="34" charset="-122"/>
+                <a:cs typeface="Segoe UI" pitchFamily="34" charset="-120"/>
+              </a:rPr>
+              <a:t>RED -&gt; GREEN -&gt; IMPROVE</a:t>
+            </a:r>
+            <a:endParaRPr lang="en-US" sz="1100" dirty="0"/>
+          </a:p>
+        </p:txBody>
+      </p:sp>
+      <p:sp>
+        <p:nvSpPr>
+          <p:cNvPr id="25" name="Shape 23"/>
+          <p:cNvSpPr/>
+          <p:nvPr/>
+        </p:nvSpPr>
+        <p:spPr>
+          <a:xfrm>
+            <a:off x="3383280" y="3703320"/>
+            <a:ext cx="2514600" cy="1005840"/>
+          </a:xfrm>
+          <a:prstGeom prst="roundRect">
+            <a:avLst>
+              <a:gd name="adj" fmla="val 9091"/>
+            </a:avLst>
+          </a:prstGeom>
+          <a:solidFill>
+            <a:srgbClr val="262640"/>
+          </a:solidFill>
+          <a:ln w="12700">
+            <a:solidFill>
+              <a:srgbClr val="262640"/>
+            </a:solidFill>
+            <a:prstDash val="solid"/>
+          </a:ln>
+          <a:effectLst>
+            <a:outerShdw sx="100000" sy="100000" kx="0" ky="0" algn="bl" rotWithShape="0" blurRad="76200" dist="25400" dir="16200000">
+              <a:srgbClr val="000000">
+                <a:alpha val="30000"/>
+              </a:srgbClr>
+            </a:outerShdw>
+          </a:effectLst>
+        </p:spPr>
+      </p:sp>
+      <p:sp>
+        <p:nvSpPr>
+          <p:cNvPr id="26" name="Text 24"/>
+          <p:cNvSpPr/>
+          <p:nvPr/>
+        </p:nvSpPr>
+        <p:spPr>
+          <a:xfrm>
+            <a:off x="3520440" y="3776472"/>
+            <a:ext cx="2240280" cy="320040"/>
+          </a:xfrm>
+          <a:prstGeom prst="rect">
+            <a:avLst/>
+          </a:prstGeom>
+          <a:noFill/>
+          <a:ln/>
+        </p:spPr>
+        <p:txBody>
+          <a:bodyPr wrap="square" rtlCol="0" anchor="ctr"/>
+          <a:lstStyle/>
+          <a:p>
+            <a:pPr indent="0" marL="0">
+              <a:buNone/>
+            </a:pPr>
+            <a:r>
+              <a:rPr lang="en-US" sz="1300" b="1" dirty="0">
+                <a:solidFill>
+                  <a:srgbClr val="00B4A0"/>
+                </a:solidFill>
+                <a:latin typeface="Segoe UI" pitchFamily="34" charset="0"/>
+                <a:ea typeface="Segoe UI" pitchFamily="34" charset="-122"/>
+                <a:cs typeface="Segoe UI" pitchFamily="34" charset="-120"/>
+              </a:rPr>
+              <a:t>/eval</a:t>
+            </a:r>
+            <a:endParaRPr lang="en-US" sz="1300" dirty="0"/>
+          </a:p>
+        </p:txBody>
+      </p:sp>
+      <p:sp>
+        <p:nvSpPr>
+          <p:cNvPr id="27" name="Text 25"/>
+          <p:cNvSpPr/>
+          <p:nvPr/>
+        </p:nvSpPr>
+        <p:spPr>
+          <a:xfrm>
+            <a:off x="3520440" y="4114800"/>
+            <a:ext cx="2240280" cy="502920"/>
+          </a:xfrm>
+          <a:prstGeom prst="rect">
+            <a:avLst/>
+          </a:prstGeom>
+          <a:noFill/>
+          <a:ln/>
+        </p:spPr>
+        <p:txBody>
+          <a:bodyPr wrap="square" rtlCol="0" anchor="ctr"/>
+          <a:lstStyle/>
+          <a:p>
+            <a:pPr indent="0" marL="0">
+              <a:buNone/>
+            </a:pPr>
+            <a:r>
+              <a:rPr lang="en-US" sz="1100" dirty="0">
+                <a:solidFill>
+                  <a:srgbClr val="E0E0E0"/>
+                </a:solidFill>
+                <a:latin typeface="Segoe UI" pitchFamily="34" charset="0"/>
+                <a:ea typeface="Segoe UI" pitchFamily="34" charset="-122"/>
+                <a:cs typeface="Segoe UI" pitchFamily="34" charset="-120"/>
+              </a:rPr>
+              <a:t>Eval-driven development</a:t>
+            </a:r>
+            <a:endParaRPr lang="en-US" sz="1100" dirty="0"/>
+          </a:p>
+        </p:txBody>
+      </p:sp>
+      <p:sp>
+        <p:nvSpPr>
+          <p:cNvPr id="28" name="Shape 26"/>
+          <p:cNvSpPr/>
+          <p:nvPr/>
+        </p:nvSpPr>
+        <p:spPr>
+          <a:xfrm>
+            <a:off x="3383280" y="4892040"/>
+            <a:ext cx="2514600" cy="1005840"/>
+          </a:xfrm>
+          <a:prstGeom prst="roundRect">
+            <a:avLst>
+              <a:gd name="adj" fmla="val 9091"/>
+            </a:avLst>
+          </a:prstGeom>
+          <a:solidFill>
+            <a:srgbClr val="262640"/>
+          </a:solidFill>
+          <a:ln w="12700">
+            <a:solidFill>
+              <a:srgbClr val="262640"/>
+            </a:solidFill>
+            <a:prstDash val="solid"/>
+          </a:ln>
+          <a:effectLst>
+            <a:outerShdw sx="100000" sy="100000" kx="0" ky="0" algn="bl" rotWithShape="0" blurRad="76200" dist="25400" dir="16200000">
+              <a:srgbClr val="000000">
+                <a:alpha val="30000"/>
+              </a:srgbClr>
+            </a:outerShdw>
+          </a:effectLst>
+        </p:spPr>
+      </p:sp>
+      <p:sp>
+        <p:nvSpPr>
+          <p:cNvPr id="29" name="Text 27"/>
+          <p:cNvSpPr/>
+          <p:nvPr/>
+        </p:nvSpPr>
+        <p:spPr>
+          <a:xfrm>
+            <a:off x="3520440" y="4965192"/>
+            <a:ext cx="2240280" cy="320040"/>
+          </a:xfrm>
+          <a:prstGeom prst="rect">
+            <a:avLst/>
+          </a:prstGeom>
+          <a:noFill/>
+          <a:ln/>
+        </p:spPr>
+        <p:txBody>
+          <a:bodyPr wrap="square" rtlCol="0" anchor="ctr"/>
+          <a:lstStyle/>
+          <a:p>
+            <a:pPr indent="0" marL="0">
+              <a:buNone/>
+            </a:pPr>
+            <a:r>
+              <a:rPr lang="en-US" sz="1300" b="1" dirty="0">
+                <a:solidFill>
+                  <a:srgbClr val="00B4A0"/>
+                </a:solidFill>
+                <a:latin typeface="Segoe UI" pitchFamily="34" charset="0"/>
+                <a:ea typeface="Segoe UI" pitchFamily="34" charset="-122"/>
+                <a:cs typeface="Segoe UI" pitchFamily="34" charset="-120"/>
+              </a:rPr>
+              <a:t>/verify</a:t>
+            </a:r>
+            <a:endParaRPr lang="en-US" sz="1300" dirty="0"/>
+          </a:p>
+        </p:txBody>
+      </p:sp>
+      <p:sp>
+        <p:nvSpPr>
+          <p:cNvPr id="30" name="Text 28"/>
+          <p:cNvSpPr/>
+          <p:nvPr/>
+        </p:nvSpPr>
+        <p:spPr>
+          <a:xfrm>
+            <a:off x="3520440" y="5303520"/>
+            <a:ext cx="2240280" cy="502920"/>
+          </a:xfrm>
+          <a:prstGeom prst="rect">
+            <a:avLst/>
+          </a:prstGeom>
+          <a:noFill/>
+          <a:ln/>
+        </p:spPr>
+        <p:txBody>
+          <a:bodyPr wrap="square" rtlCol="0" anchor="ctr"/>
+          <a:lstStyle/>
+          <a:p>
+            <a:pPr indent="0" marL="0">
+              <a:buNone/>
+            </a:pPr>
+            <a:r>
+              <a:rPr lang="en-US" sz="1100" dirty="0">
+                <a:solidFill>
+                  <a:srgbClr val="E0E0E0"/>
+                </a:solidFill>
+                <a:latin typeface="Segoe UI" pitchFamily="34" charset="0"/>
+                <a:ea typeface="Segoe UI" pitchFamily="34" charset="-122"/>
+                <a:cs typeface="Segoe UI" pitchFamily="34" charset="-120"/>
+              </a:rPr>
+              <a:t>6-phase quality check</a:t>
+            </a:r>
+            <a:endParaRPr lang="en-US" sz="1100" dirty="0"/>
+          </a:p>
+        </p:txBody>
+      </p:sp>
+      <p:sp>
+        <p:nvSpPr>
+          <p:cNvPr id="31" name="Shape 29"/>
+          <p:cNvSpPr/>
+          <p:nvPr/>
+        </p:nvSpPr>
+        <p:spPr>
+          <a:xfrm>
+            <a:off x="6217920" y="1737360"/>
+            <a:ext cx="2788920" cy="4572000"/>
+          </a:xfrm>
+          <a:prstGeom prst="roundRect">
+            <a:avLst>
+              <a:gd name="adj" fmla="val 3279"/>
+            </a:avLst>
+          </a:prstGeom>
+          <a:solidFill>
+            <a:srgbClr val="262640"/>
+          </a:solidFill>
+          <a:ln w="12700">
+            <a:solidFill>
+              <a:srgbClr val="262640"/>
+            </a:solidFill>
+            <a:prstDash val="solid"/>
+          </a:ln>
+          <a:effectLst>
+            <a:outerShdw sx="100000" sy="100000" kx="0" ky="0" algn="bl" rotWithShape="0" blurRad="76200" dist="25400" dir="16200000">
+              <a:srgbClr val="000000">
+                <a:alpha val="30000"/>
+              </a:srgbClr>
+            </a:outerShdw>
+          </a:effectLst>
+        </p:spPr>
+      </p:sp>
+      <p:sp>
+        <p:nvSpPr>
+          <p:cNvPr id="32" name="Shape 30"/>
+          <p:cNvSpPr/>
+          <p:nvPr/>
+        </p:nvSpPr>
+        <p:spPr>
+          <a:xfrm>
+            <a:off x="6217920" y="1737360"/>
+            <a:ext cx="2788920" cy="36576"/>
+          </a:xfrm>
+          <a:prstGeom prst="rect">
+            <a:avLst/>
+          </a:prstGeom>
+          <a:solidFill>
+            <a:srgbClr val="2ECC71"/>
+          </a:solidFill>
+          <a:ln/>
+        </p:spPr>
+      </p:sp>
+      <p:sp>
+        <p:nvSpPr>
+          <p:cNvPr id="33" name="Shape 31"/>
+          <p:cNvSpPr/>
+          <p:nvPr/>
+        </p:nvSpPr>
+        <p:spPr>
+          <a:xfrm>
+            <a:off x="6355080" y="1874520"/>
+            <a:ext cx="2514600" cy="457200"/>
+          </a:xfrm>
+          <a:prstGeom prst="roundRect">
+            <a:avLst>
+              <a:gd name="adj" fmla="val 20000"/>
+            </a:avLst>
+          </a:prstGeom>
+          <a:solidFill>
+            <a:srgbClr val="2ECC71"/>
+          </a:solidFill>
+          <a:ln w="12700">
+            <a:solidFill>
+              <a:srgbClr val="2ECC71"/>
+            </a:solidFill>
+            <a:prstDash val="solid"/>
+          </a:ln>
+          <a:effectLst>
+            <a:outerShdw sx="100000" sy="100000" kx="0" ky="0" algn="bl" rotWithShape="0" blurRad="76200" dist="25400" dir="16200000">
+              <a:srgbClr val="000000">
+                <a:alpha val="30000"/>
+              </a:srgbClr>
+            </a:outerShdw>
+          </a:effectLst>
+        </p:spPr>
+      </p:sp>
+      <p:sp>
+        <p:nvSpPr>
+          <p:cNvPr id="34" name="Text 32"/>
+          <p:cNvSpPr/>
+          <p:nvPr/>
+        </p:nvSpPr>
+        <p:spPr>
+          <a:xfrm>
+            <a:off x="6355080" y="1874520"/>
+            <a:ext cx="2514600" cy="457200"/>
+          </a:xfrm>
+          <a:prstGeom prst="rect">
+            <a:avLst/>
+          </a:prstGeom>
+          <a:noFill/>
+          <a:ln/>
+        </p:spPr>
+        <p:txBody>
+          <a:bodyPr wrap="square" rtlCol="0" anchor="ctr"/>
+          <a:lstStyle/>
+          <a:p>
+            <a:pPr algn="ctr" indent="0" marL="0">
+              <a:buNone/>
+            </a:pPr>
+            <a:r>
+              <a:rPr lang="en-US" sz="1500" b="1" dirty="0">
+                <a:solidFill>
+                  <a:srgbClr val="FFFFFF"/>
+                </a:solidFill>
+                <a:latin typeface="Segoe UI" pitchFamily="34" charset="0"/>
+                <a:ea typeface="Segoe UI" pitchFamily="34" charset="-122"/>
+                <a:cs typeface="Segoe UI" pitchFamily="34" charset="-120"/>
+              </a:rPr>
+              <a:t>TEST</a:t>
             </a:r>
             <a:endParaRPr lang="en-US" sz="1500" dirty="0"/>
           </a:p>
@@ -6110,14 +6157,48 @@
       </p:sp>
       <p:sp>
         <p:nvSpPr>
-          <p:cNvPr id="23" name="Text 21"/>
-          <p:cNvSpPr/>
-          <p:nvPr/>
-        </p:nvSpPr>
-        <p:spPr>
-          <a:xfrm>
-            <a:off x="6400800" y="2423160"/>
-            <a:ext cx="5120640" cy="274320"/>
+          <p:cNvPr id="35" name="Shape 33"/>
+          <p:cNvSpPr/>
+          <p:nvPr/>
+        </p:nvSpPr>
+        <p:spPr>
+          <a:xfrm>
+            <a:off x="6355080" y="2514600"/>
+            <a:ext cx="2514600" cy="1005840"/>
+          </a:xfrm>
+          <a:prstGeom prst="roundRect">
+            <a:avLst>
+              <a:gd name="adj" fmla="val 9091"/>
+            </a:avLst>
+          </a:prstGeom>
+          <a:solidFill>
+            <a:srgbClr val="262640"/>
+          </a:solidFill>
+          <a:ln w="12700">
+            <a:solidFill>
+              <a:srgbClr val="262640"/>
+            </a:solidFill>
+            <a:prstDash val="solid"/>
+          </a:ln>
+          <a:effectLst>
+            <a:outerShdw sx="100000" sy="100000" kx="0" ky="0" algn="bl" rotWithShape="0" blurRad="76200" dist="25400" dir="16200000">
+              <a:srgbClr val="000000">
+                <a:alpha val="30000"/>
+              </a:srgbClr>
+            </a:outerShdw>
+          </a:effectLst>
+        </p:spPr>
+      </p:sp>
+      <p:sp>
+        <p:nvSpPr>
+          <p:cNvPr id="36" name="Text 34"/>
+          <p:cNvSpPr/>
+          <p:nvPr/>
+        </p:nvSpPr>
+        <p:spPr>
+          <a:xfrm>
+            <a:off x="6492240" y="2587752"/>
+            <a:ext cx="2240280" cy="320040"/>
           </a:xfrm>
           <a:prstGeom prst="rect">
             <a:avLst/>
@@ -6135,13 +6216,476 @@
             <a:r>
               <a:rPr lang="en-US" sz="1300" b="1" dirty="0">
                 <a:solidFill>
+                  <a:srgbClr val="2ECC71"/>
+                </a:solidFill>
+                <a:latin typeface="Segoe UI" pitchFamily="34" charset="0"/>
+                <a:ea typeface="Segoe UI" pitchFamily="34" charset="-122"/>
+                <a:cs typeface="Segoe UI" pitchFamily="34" charset="-120"/>
+              </a:rPr>
+              <a:t>/qa</a:t>
+            </a:r>
+            <a:endParaRPr lang="en-US" sz="1300" dirty="0"/>
+          </a:p>
+        </p:txBody>
+      </p:sp>
+      <p:sp>
+        <p:nvSpPr>
+          <p:cNvPr id="37" name="Text 35"/>
+          <p:cNvSpPr/>
+          <p:nvPr/>
+        </p:nvSpPr>
+        <p:spPr>
+          <a:xfrm>
+            <a:off x="6492240" y="2926080"/>
+            <a:ext cx="2240280" cy="502920"/>
+          </a:xfrm>
+          <a:prstGeom prst="rect">
+            <a:avLst/>
+          </a:prstGeom>
+          <a:noFill/>
+          <a:ln/>
+        </p:spPr>
+        <p:txBody>
+          <a:bodyPr wrap="square" rtlCol="0" anchor="ctr"/>
+          <a:lstStyle/>
+          <a:p>
+            <a:pPr indent="0" marL="0">
+              <a:buNone/>
+            </a:pPr>
+            <a:r>
+              <a:rPr lang="en-US" sz="1100" dirty="0">
+                <a:solidFill>
+                  <a:srgbClr val="E0E0E0"/>
+                </a:solidFill>
+                <a:latin typeface="Segoe UI" pitchFamily="34" charset="0"/>
+                <a:ea typeface="Segoe UI" pitchFamily="34" charset="-122"/>
+                <a:cs typeface="Segoe UI" pitchFamily="34" charset="-120"/>
+              </a:rPr>
+              <a:t>Browser-based visual QA</a:t>
+            </a:r>
+            <a:endParaRPr lang="en-US" sz="1100" dirty="0"/>
+          </a:p>
+        </p:txBody>
+      </p:sp>
+      <p:sp>
+        <p:nvSpPr>
+          <p:cNvPr id="38" name="Shape 36"/>
+          <p:cNvSpPr/>
+          <p:nvPr/>
+        </p:nvSpPr>
+        <p:spPr>
+          <a:xfrm>
+            <a:off x="6355080" y="3703320"/>
+            <a:ext cx="2514600" cy="1005840"/>
+          </a:xfrm>
+          <a:prstGeom prst="roundRect">
+            <a:avLst>
+              <a:gd name="adj" fmla="val 9091"/>
+            </a:avLst>
+          </a:prstGeom>
+          <a:solidFill>
+            <a:srgbClr val="262640"/>
+          </a:solidFill>
+          <a:ln w="12700">
+            <a:solidFill>
+              <a:srgbClr val="262640"/>
+            </a:solidFill>
+            <a:prstDash val="solid"/>
+          </a:ln>
+          <a:effectLst>
+            <a:outerShdw sx="100000" sy="100000" kx="0" ky="0" algn="bl" rotWithShape="0" blurRad="76200" dist="25400" dir="16200000">
+              <a:srgbClr val="000000">
+                <a:alpha val="30000"/>
+              </a:srgbClr>
+            </a:outerShdw>
+          </a:effectLst>
+        </p:spPr>
+      </p:sp>
+      <p:sp>
+        <p:nvSpPr>
+          <p:cNvPr id="39" name="Text 37"/>
+          <p:cNvSpPr/>
+          <p:nvPr/>
+        </p:nvSpPr>
+        <p:spPr>
+          <a:xfrm>
+            <a:off x="6492240" y="3776472"/>
+            <a:ext cx="2240280" cy="320040"/>
+          </a:xfrm>
+          <a:prstGeom prst="rect">
+            <a:avLst/>
+          </a:prstGeom>
+          <a:noFill/>
+          <a:ln/>
+        </p:spPr>
+        <p:txBody>
+          <a:bodyPr wrap="square" rtlCol="0" anchor="ctr"/>
+          <a:lstStyle/>
+          <a:p>
+            <a:pPr indent="0" marL="0">
+              <a:buNone/>
+            </a:pPr>
+            <a:r>
+              <a:rPr lang="en-US" sz="1300" b="1" dirty="0">
+                <a:solidFill>
+                  <a:srgbClr val="2ECC71"/>
+                </a:solidFill>
+                <a:latin typeface="Segoe UI" pitchFamily="34" charset="0"/>
+                <a:ea typeface="Segoe UI" pitchFamily="34" charset="-122"/>
+                <a:cs typeface="Segoe UI" pitchFamily="34" charset="-120"/>
+              </a:rPr>
+              <a:t>/cso</a:t>
+            </a:r>
+            <a:endParaRPr lang="en-US" sz="1300" dirty="0"/>
+          </a:p>
+        </p:txBody>
+      </p:sp>
+      <p:sp>
+        <p:nvSpPr>
+          <p:cNvPr id="40" name="Text 38"/>
+          <p:cNvSpPr/>
+          <p:nvPr/>
+        </p:nvSpPr>
+        <p:spPr>
+          <a:xfrm>
+            <a:off x="6492240" y="4114800"/>
+            <a:ext cx="2240280" cy="502920"/>
+          </a:xfrm>
+          <a:prstGeom prst="rect">
+            <a:avLst/>
+          </a:prstGeom>
+          <a:noFill/>
+          <a:ln/>
+        </p:spPr>
+        <p:txBody>
+          <a:bodyPr wrap="square" rtlCol="0" anchor="ctr"/>
+          <a:lstStyle/>
+          <a:p>
+            <a:pPr indent="0" marL="0">
+              <a:buNone/>
+            </a:pPr>
+            <a:r>
+              <a:rPr lang="en-US" sz="1100" dirty="0">
+                <a:solidFill>
+                  <a:srgbClr val="E0E0E0"/>
+                </a:solidFill>
+                <a:latin typeface="Segoe UI" pitchFamily="34" charset="0"/>
+                <a:ea typeface="Segoe UI" pitchFamily="34" charset="-122"/>
+                <a:cs typeface="Segoe UI" pitchFamily="34" charset="-120"/>
+              </a:rPr>
+              <a:t>STRIDE + OWASP audit</a:t>
+            </a:r>
+            <a:endParaRPr lang="en-US" sz="1100" dirty="0"/>
+          </a:p>
+        </p:txBody>
+      </p:sp>
+      <p:sp>
+        <p:nvSpPr>
+          <p:cNvPr id="41" name="Shape 39"/>
+          <p:cNvSpPr/>
+          <p:nvPr/>
+        </p:nvSpPr>
+        <p:spPr>
+          <a:xfrm>
+            <a:off x="6355080" y="4892040"/>
+            <a:ext cx="2514600" cy="1005840"/>
+          </a:xfrm>
+          <a:prstGeom prst="roundRect">
+            <a:avLst>
+              <a:gd name="adj" fmla="val 9091"/>
+            </a:avLst>
+          </a:prstGeom>
+          <a:solidFill>
+            <a:srgbClr val="262640"/>
+          </a:solidFill>
+          <a:ln w="12700">
+            <a:solidFill>
+              <a:srgbClr val="262640"/>
+            </a:solidFill>
+            <a:prstDash val="solid"/>
+          </a:ln>
+          <a:effectLst>
+            <a:outerShdw sx="100000" sy="100000" kx="0" ky="0" algn="bl" rotWithShape="0" blurRad="76200" dist="25400" dir="16200000">
+              <a:srgbClr val="000000">
+                <a:alpha val="30000"/>
+              </a:srgbClr>
+            </a:outerShdw>
+          </a:effectLst>
+        </p:spPr>
+      </p:sp>
+      <p:sp>
+        <p:nvSpPr>
+          <p:cNvPr id="42" name="Text 40"/>
+          <p:cNvSpPr/>
+          <p:nvPr/>
+        </p:nvSpPr>
+        <p:spPr>
+          <a:xfrm>
+            <a:off x="6492240" y="4965192"/>
+            <a:ext cx="2240280" cy="320040"/>
+          </a:xfrm>
+          <a:prstGeom prst="rect">
+            <a:avLst/>
+          </a:prstGeom>
+          <a:noFill/>
+          <a:ln/>
+        </p:spPr>
+        <p:txBody>
+          <a:bodyPr wrap="square" rtlCol="0" anchor="ctr"/>
+          <a:lstStyle/>
+          <a:p>
+            <a:pPr indent="0" marL="0">
+              <a:buNone/>
+            </a:pPr>
+            <a:r>
+              <a:rPr lang="en-US" sz="1300" b="1" dirty="0">
+                <a:solidFill>
+                  <a:srgbClr val="2ECC71"/>
+                </a:solidFill>
+                <a:latin typeface="Segoe UI" pitchFamily="34" charset="0"/>
+                <a:ea typeface="Segoe UI" pitchFamily="34" charset="-122"/>
+                <a:cs typeface="Segoe UI" pitchFamily="34" charset="-120"/>
+              </a:rPr>
+              <a:t>/design-review</a:t>
+            </a:r>
+            <a:endParaRPr lang="en-US" sz="1300" dirty="0"/>
+          </a:p>
+        </p:txBody>
+      </p:sp>
+      <p:sp>
+        <p:nvSpPr>
+          <p:cNvPr id="43" name="Text 41"/>
+          <p:cNvSpPr/>
+          <p:nvPr/>
+        </p:nvSpPr>
+        <p:spPr>
+          <a:xfrm>
+            <a:off x="6492240" y="5303520"/>
+            <a:ext cx="2240280" cy="502920"/>
+          </a:xfrm>
+          <a:prstGeom prst="rect">
+            <a:avLst/>
+          </a:prstGeom>
+          <a:noFill/>
+          <a:ln/>
+        </p:spPr>
+        <p:txBody>
+          <a:bodyPr wrap="square" rtlCol="0" anchor="ctr"/>
+          <a:lstStyle/>
+          <a:p>
+            <a:pPr indent="0" marL="0">
+              <a:buNone/>
+            </a:pPr>
+            <a:r>
+              <a:rPr lang="en-US" sz="1100" dirty="0">
+                <a:solidFill>
+                  <a:srgbClr val="E0E0E0"/>
+                </a:solidFill>
+                <a:latin typeface="Segoe UI" pitchFamily="34" charset="0"/>
+                <a:ea typeface="Segoe UI" pitchFamily="34" charset="-122"/>
+                <a:cs typeface="Segoe UI" pitchFamily="34" charset="-120"/>
+              </a:rPr>
+              <a:t>7-dimension design score</a:t>
+            </a:r>
+            <a:endParaRPr lang="en-US" sz="1100" dirty="0"/>
+          </a:p>
+        </p:txBody>
+      </p:sp>
+      <p:sp>
+        <p:nvSpPr>
+          <p:cNvPr id="44" name="Shape 42"/>
+          <p:cNvSpPr/>
+          <p:nvPr/>
+        </p:nvSpPr>
+        <p:spPr>
+          <a:xfrm>
+            <a:off x="9189720" y="1737360"/>
+            <a:ext cx="2788920" cy="4572000"/>
+          </a:xfrm>
+          <a:prstGeom prst="roundRect">
+            <a:avLst>
+              <a:gd name="adj" fmla="val 3279"/>
+            </a:avLst>
+          </a:prstGeom>
+          <a:solidFill>
+            <a:srgbClr val="262640"/>
+          </a:solidFill>
+          <a:ln w="12700">
+            <a:solidFill>
+              <a:srgbClr val="262640"/>
+            </a:solidFill>
+            <a:prstDash val="solid"/>
+          </a:ln>
+          <a:effectLst>
+            <a:outerShdw sx="100000" sy="100000" kx="0" ky="0" algn="bl" rotWithShape="0" blurRad="76200" dist="25400" dir="16200000">
+              <a:srgbClr val="000000">
+                <a:alpha val="30000"/>
+              </a:srgbClr>
+            </a:outerShdw>
+          </a:effectLst>
+        </p:spPr>
+      </p:sp>
+      <p:sp>
+        <p:nvSpPr>
+          <p:cNvPr id="45" name="Shape 43"/>
+          <p:cNvSpPr/>
+          <p:nvPr/>
+        </p:nvSpPr>
+        <p:spPr>
+          <a:xfrm>
+            <a:off x="9189720" y="1737360"/>
+            <a:ext cx="2788920" cy="36576"/>
+          </a:xfrm>
+          <a:prstGeom prst="rect">
+            <a:avLst/>
+          </a:prstGeom>
+          <a:solidFill>
+            <a:srgbClr val="9B59B6"/>
+          </a:solidFill>
+          <a:ln/>
+        </p:spPr>
+      </p:sp>
+      <p:sp>
+        <p:nvSpPr>
+          <p:cNvPr id="46" name="Shape 44"/>
+          <p:cNvSpPr/>
+          <p:nvPr/>
+        </p:nvSpPr>
+        <p:spPr>
+          <a:xfrm>
+            <a:off x="9326880" y="1874520"/>
+            <a:ext cx="2514600" cy="457200"/>
+          </a:xfrm>
+          <a:prstGeom prst="roundRect">
+            <a:avLst>
+              <a:gd name="adj" fmla="val 20000"/>
+            </a:avLst>
+          </a:prstGeom>
+          <a:solidFill>
+            <a:srgbClr val="9B59B6"/>
+          </a:solidFill>
+          <a:ln w="12700">
+            <a:solidFill>
+              <a:srgbClr val="9B59B6"/>
+            </a:solidFill>
+            <a:prstDash val="solid"/>
+          </a:ln>
+          <a:effectLst>
+            <a:outerShdw sx="100000" sy="100000" kx="0" ky="0" algn="bl" rotWithShape="0" blurRad="76200" dist="25400" dir="16200000">
+              <a:srgbClr val="000000">
+                <a:alpha val="30000"/>
+              </a:srgbClr>
+            </a:outerShdw>
+          </a:effectLst>
+        </p:spPr>
+      </p:sp>
+      <p:sp>
+        <p:nvSpPr>
+          <p:cNvPr id="47" name="Text 45"/>
+          <p:cNvSpPr/>
+          <p:nvPr/>
+        </p:nvSpPr>
+        <p:spPr>
+          <a:xfrm>
+            <a:off x="9326880" y="1874520"/>
+            <a:ext cx="2514600" cy="457200"/>
+          </a:xfrm>
+          <a:prstGeom prst="rect">
+            <a:avLst/>
+          </a:prstGeom>
+          <a:noFill/>
+          <a:ln/>
+        </p:spPr>
+        <p:txBody>
+          <a:bodyPr wrap="square" rtlCol="0" anchor="ctr"/>
+          <a:lstStyle/>
+          <a:p>
+            <a:pPr algn="ctr" indent="0" marL="0">
+              <a:buNone/>
+            </a:pPr>
+            <a:r>
+              <a:rPr lang="en-US" sz="1500" b="1" dirty="0">
+                <a:solidFill>
                   <a:srgbClr val="FFFFFF"/>
                 </a:solidFill>
                 <a:latin typeface="Segoe UI" pitchFamily="34" charset="0"/>
                 <a:ea typeface="Segoe UI" pitchFamily="34" charset="-122"/>
                 <a:cs typeface="Segoe UI" pitchFamily="34" charset="-120"/>
               </a:rPr>
-              <a:t>Never assume scope</a:t>
+              <a:t>SHIP</a:t>
+            </a:r>
+            <a:endParaRPr lang="en-US" sz="1500" dirty="0"/>
+          </a:p>
+        </p:txBody>
+      </p:sp>
+      <p:sp>
+        <p:nvSpPr>
+          <p:cNvPr id="48" name="Shape 46"/>
+          <p:cNvSpPr/>
+          <p:nvPr/>
+        </p:nvSpPr>
+        <p:spPr>
+          <a:xfrm>
+            <a:off x="9326880" y="2514600"/>
+            <a:ext cx="2514600" cy="1005840"/>
+          </a:xfrm>
+          <a:prstGeom prst="roundRect">
+            <a:avLst>
+              <a:gd name="adj" fmla="val 9091"/>
+            </a:avLst>
+          </a:prstGeom>
+          <a:solidFill>
+            <a:srgbClr val="262640"/>
+          </a:solidFill>
+          <a:ln w="12700">
+            <a:solidFill>
+              <a:srgbClr val="262640"/>
+            </a:solidFill>
+            <a:prstDash val="solid"/>
+          </a:ln>
+          <a:effectLst>
+            <a:outerShdw sx="100000" sy="100000" kx="0" ky="0" algn="bl" rotWithShape="0" blurRad="76200" dist="25400" dir="16200000">
+              <a:srgbClr val="000000">
+                <a:alpha val="30000"/>
+              </a:srgbClr>
+            </a:outerShdw>
+          </a:effectLst>
+        </p:spPr>
+      </p:sp>
+      <p:sp>
+        <p:nvSpPr>
+          <p:cNvPr id="49" name="Text 47"/>
+          <p:cNvSpPr/>
+          <p:nvPr/>
+        </p:nvSpPr>
+        <p:spPr>
+          <a:xfrm>
+            <a:off x="9464040" y="2587752"/>
+            <a:ext cx="2240280" cy="320040"/>
+          </a:xfrm>
+          <a:prstGeom prst="rect">
+            <a:avLst/>
+          </a:prstGeom>
+          <a:noFill/>
+          <a:ln/>
+        </p:spPr>
+        <p:txBody>
+          <a:bodyPr wrap="square" rtlCol="0" anchor="ctr"/>
+          <a:lstStyle/>
+          <a:p>
+            <a:pPr indent="0" marL="0">
+              <a:buNone/>
+            </a:pPr>
+            <a:r>
+              <a:rPr lang="en-US" sz="1300" b="1" dirty="0">
+                <a:solidFill>
+                  <a:srgbClr val="9B59B6"/>
+                </a:solidFill>
+                <a:latin typeface="Segoe UI" pitchFamily="34" charset="0"/>
+                <a:ea typeface="Segoe UI" pitchFamily="34" charset="-122"/>
+                <a:cs typeface="Segoe UI" pitchFamily="34" charset="-120"/>
+              </a:rPr>
+              <a:t>/doc-sync</a:t>
             </a:r>
             <a:endParaRPr lang="en-US" sz="1300" dirty="0"/>
           </a:p>
@@ -6149,29 +6693,26 @@
       </p:sp>
       <p:sp>
         <p:nvSpPr>
-          <p:cNvPr id="24" name="Text 22"/>
-          <p:cNvSpPr/>
-          <p:nvPr/>
-        </p:nvSpPr>
-        <p:spPr>
-          <a:xfrm>
-            <a:off x="6400800" y="2697480"/>
-            <a:ext cx="5120640" cy="502920"/>
-          </a:xfrm>
-          <a:prstGeom prst="rect">
-            <a:avLst/>
-          </a:prstGeom>
-          <a:noFill/>
-          <a:ln/>
-        </p:spPr>
-        <p:txBody>
-          <a:bodyPr wrap="square" rtlCol="0" anchor="ctr"/>
-          <a:lstStyle/>
-          <a:p>
-            <a:pPr indent="0" marL="0">
-              <a:lnSpc>
-                <a:spcPct val="115000"/>
-              </a:lnSpc>
+          <p:cNvPr id="50" name="Text 48"/>
+          <p:cNvSpPr/>
+          <p:nvPr/>
+        </p:nvSpPr>
+        <p:spPr>
+          <a:xfrm>
+            <a:off x="9464040" y="2926080"/>
+            <a:ext cx="2240280" cy="502920"/>
+          </a:xfrm>
+          <a:prstGeom prst="rect">
+            <a:avLst/>
+          </a:prstGeom>
+          <a:noFill/>
+          <a:ln/>
+        </p:spPr>
+        <p:txBody>
+          <a:bodyPr wrap="square" rtlCol="0" anchor="ctr"/>
+          <a:lstStyle/>
+          <a:p>
+            <a:pPr indent="0" marL="0">
               <a:buNone/>
             </a:pPr>
             <a:r>
@@ -6183,15 +6724,107 @@
                 <a:ea typeface="Segoe UI" pitchFamily="34" charset="-122"/>
                 <a:cs typeface="Segoe UI" pitchFamily="34" charset="-120"/>
               </a:rPr>
-              <a:t>If a request is vague, ask 3 targeted questions</a:t>
+              <a:t>Sync docs to code</a:t>
             </a:r>
             <a:endParaRPr lang="en-US" sz="1100" dirty="0"/>
           </a:p>
-          <a:p>
-            <a:pPr indent="0" marL="0">
-              <a:lnSpc>
-                <a:spcPct val="115000"/>
-              </a:lnSpc>
+        </p:txBody>
+      </p:sp>
+      <p:sp>
+        <p:nvSpPr>
+          <p:cNvPr id="51" name="Shape 49"/>
+          <p:cNvSpPr/>
+          <p:nvPr/>
+        </p:nvSpPr>
+        <p:spPr>
+          <a:xfrm>
+            <a:off x="9326880" y="3703320"/>
+            <a:ext cx="2514600" cy="1005840"/>
+          </a:xfrm>
+          <a:prstGeom prst="roundRect">
+            <a:avLst>
+              <a:gd name="adj" fmla="val 9091"/>
+            </a:avLst>
+          </a:prstGeom>
+          <a:solidFill>
+            <a:srgbClr val="262640"/>
+          </a:solidFill>
+          <a:ln w="12700">
+            <a:solidFill>
+              <a:srgbClr val="262640"/>
+            </a:solidFill>
+            <a:prstDash val="solid"/>
+          </a:ln>
+          <a:effectLst>
+            <a:outerShdw sx="100000" sy="100000" kx="0" ky="0" algn="bl" rotWithShape="0" blurRad="76200" dist="25400" dir="16200000">
+              <a:srgbClr val="000000">
+                <a:alpha val="30000"/>
+              </a:srgbClr>
+            </a:outerShdw>
+          </a:effectLst>
+        </p:spPr>
+      </p:sp>
+      <p:sp>
+        <p:nvSpPr>
+          <p:cNvPr id="52" name="Text 50"/>
+          <p:cNvSpPr/>
+          <p:nvPr/>
+        </p:nvSpPr>
+        <p:spPr>
+          <a:xfrm>
+            <a:off x="9464040" y="3776472"/>
+            <a:ext cx="2240280" cy="320040"/>
+          </a:xfrm>
+          <a:prstGeom prst="rect">
+            <a:avLst/>
+          </a:prstGeom>
+          <a:noFill/>
+          <a:ln/>
+        </p:spPr>
+        <p:txBody>
+          <a:bodyPr wrap="square" rtlCol="0" anchor="ctr"/>
+          <a:lstStyle/>
+          <a:p>
+            <a:pPr indent="0" marL="0">
+              <a:buNone/>
+            </a:pPr>
+            <a:r>
+              <a:rPr lang="en-US" sz="1300" b="1" dirty="0">
+                <a:solidFill>
+                  <a:srgbClr val="9B59B6"/>
+                </a:solidFill>
+                <a:latin typeface="Segoe UI" pitchFamily="34" charset="0"/>
+                <a:ea typeface="Segoe UI" pitchFamily="34" charset="-122"/>
+                <a:cs typeface="Segoe UI" pitchFamily="34" charset="-120"/>
+              </a:rPr>
+              <a:t>/canary</a:t>
+            </a:r>
+            <a:endParaRPr lang="en-US" sz="1300" dirty="0"/>
+          </a:p>
+        </p:txBody>
+      </p:sp>
+      <p:sp>
+        <p:nvSpPr>
+          <p:cNvPr id="53" name="Text 51"/>
+          <p:cNvSpPr/>
+          <p:nvPr/>
+        </p:nvSpPr>
+        <p:spPr>
+          <a:xfrm>
+            <a:off x="9464040" y="4114800"/>
+            <a:ext cx="2240280" cy="502920"/>
+          </a:xfrm>
+          <a:prstGeom prst="rect">
+            <a:avLst/>
+          </a:prstGeom>
+          <a:noFill/>
+          <a:ln/>
+        </p:spPr>
+        <p:txBody>
+          <a:bodyPr wrap="square" rtlCol="0" anchor="ctr"/>
+          <a:lstStyle/>
+          <a:p>
+            <a:pPr indent="0" marL="0">
               <a:buNone/>
             </a:pPr>
             <a:r>
@@ -6203,7 +6836,7 @@
                 <a:ea typeface="Segoe UI" pitchFamily="34" charset="-122"/>
                 <a:cs typeface="Segoe UI" pitchFamily="34" charset="-120"/>
               </a:rPr>
-              <a:t>before proposing a solution</a:t>
+              <a:t>Post-deploy monitoring</a:t>
             </a:r>
             <a:endParaRPr lang="en-US" sz="1100" dirty="0"/>
           </a:p>
@@ -6211,14 +6844,48 @@
       </p:sp>
       <p:sp>
         <p:nvSpPr>
-          <p:cNvPr id="25" name="Text 23"/>
-          <p:cNvSpPr/>
-          <p:nvPr/>
-        </p:nvSpPr>
-        <p:spPr>
-          <a:xfrm>
-            <a:off x="6400800" y="3291840"/>
-            <a:ext cx="5120640" cy="274320"/>
+          <p:cNvPr id="54" name="Shape 52"/>
+          <p:cNvSpPr/>
+          <p:nvPr/>
+        </p:nvSpPr>
+        <p:spPr>
+          <a:xfrm>
+            <a:off x="9326880" y="4892040"/>
+            <a:ext cx="2514600" cy="1005840"/>
+          </a:xfrm>
+          <a:prstGeom prst="roundRect">
+            <a:avLst>
+              <a:gd name="adj" fmla="val 9091"/>
+            </a:avLst>
+          </a:prstGeom>
+          <a:solidFill>
+            <a:srgbClr val="262640"/>
+          </a:solidFill>
+          <a:ln w="12700">
+            <a:solidFill>
+              <a:srgbClr val="262640"/>
+            </a:solidFill>
+            <a:prstDash val="solid"/>
+          </a:ln>
+          <a:effectLst>
+            <a:outerShdw sx="100000" sy="100000" kx="0" ky="0" algn="bl" rotWithShape="0" blurRad="76200" dist="25400" dir="16200000">
+              <a:srgbClr val="000000">
+                <a:alpha val="30000"/>
+              </a:srgbClr>
+            </a:outerShdw>
+          </a:effectLst>
+        </p:spPr>
+      </p:sp>
+      <p:sp>
+        <p:nvSpPr>
+          <p:cNvPr id="55" name="Text 53"/>
+          <p:cNvSpPr/>
+          <p:nvPr/>
+        </p:nvSpPr>
+        <p:spPr>
+          <a:xfrm>
+            <a:off x="9464040" y="4965192"/>
+            <a:ext cx="2240280" cy="320040"/>
           </a:xfrm>
           <a:prstGeom prst="rect">
             <a:avLst/>
@@ -6236,13 +6903,13 @@
             <a:r>
               <a:rPr lang="en-US" sz="1300" b="1" dirty="0">
                 <a:solidFill>
-                  <a:srgbClr val="FFFFFF"/>
-                </a:solidFill>
-                <a:latin typeface="Segoe UI" pitchFamily="34" charset="0"/>
-                <a:ea typeface="Segoe UI" pitchFamily="34" charset="-122"/>
-                <a:cs typeface="Segoe UI" pitchFamily="34" charset="-120"/>
-              </a:rPr>
-              <a:t>Log every decision</a:t>
+                  <a:srgbClr val="9B59B6"/>
+                </a:solidFill>
+                <a:latin typeface="Segoe UI" pitchFamily="34" charset="0"/>
+                <a:ea typeface="Segoe UI" pitchFamily="34" charset="-122"/>
+                <a:cs typeface="Segoe UI" pitchFamily="34" charset="-120"/>
+              </a:rPr>
+              <a:t>/retro</a:t>
             </a:r>
             <a:endParaRPr lang="en-US" sz="1300" dirty="0"/>
           </a:p>
@@ -6250,29 +6917,26 @@
       </p:sp>
       <p:sp>
         <p:nvSpPr>
-          <p:cNvPr id="26" name="Text 24"/>
-          <p:cNvSpPr/>
-          <p:nvPr/>
-        </p:nvSpPr>
-        <p:spPr>
-          <a:xfrm>
-            <a:off x="6400800" y="3566160"/>
-            <a:ext cx="5120640" cy="502920"/>
-          </a:xfrm>
-          <a:prstGeom prst="rect">
-            <a:avLst/>
-          </a:prstGeom>
-          <a:noFill/>
-          <a:ln/>
-        </p:spPr>
-        <p:txBody>
-          <a:bodyPr wrap="square" rtlCol="0" anchor="ctr"/>
-          <a:lstStyle/>
-          <a:p>
-            <a:pPr indent="0" marL="0">
-              <a:lnSpc>
-                <a:spcPct val="115000"/>
-              </a:lnSpc>
+          <p:cNvPr id="56" name="Text 54"/>
+          <p:cNvSpPr/>
+          <p:nvPr/>
+        </p:nvSpPr>
+        <p:spPr>
+          <a:xfrm>
+            <a:off x="9464040" y="5303520"/>
+            <a:ext cx="2240280" cy="502920"/>
+          </a:xfrm>
+          <a:prstGeom prst="rect">
+            <a:avLst/>
+          </a:prstGeom>
+          <a:noFill/>
+          <a:ln/>
+        </p:spPr>
+        <p:txBody>
+          <a:bodyPr wrap="square" rtlCol="0" anchor="ctr"/>
+          <a:lstStyle/>
+          <a:p>
+            <a:pPr indent="0" marL="0">
               <a:buNone/>
             </a:pPr>
             <a:r>
@@ -6284,330 +6948,46 @@
                 <a:ea typeface="Segoe UI" pitchFamily="34" charset="-122"/>
                 <a:cs typeface="Segoe UI" pitchFamily="34" charset="-120"/>
               </a:rPr>
-              <a:t>DECISIONS.md captures what was chosen, what</a:t>
+              <a:t>Git metrics retrospective</a:t>
             </a:r>
             <a:endParaRPr lang="en-US" sz="1100" dirty="0"/>
           </a:p>
-          <a:p>
-            <a:pPr indent="0" marL="0">
-              <a:lnSpc>
-                <a:spcPct val="115000"/>
-              </a:lnSpc>
+        </p:txBody>
+      </p:sp>
+      <p:sp>
+        <p:nvSpPr>
+          <p:cNvPr id="57" name="Text 55"/>
+          <p:cNvSpPr/>
+          <p:nvPr/>
+        </p:nvSpPr>
+        <p:spPr>
+          <a:xfrm>
+            <a:off x="457200" y="6446520"/>
+            <a:ext cx="11247120" cy="274320"/>
+          </a:xfrm>
+          <a:prstGeom prst="rect">
+            <a:avLst/>
+          </a:prstGeom>
+          <a:noFill/>
+          <a:ln/>
+        </p:spPr>
+        <p:txBody>
+          <a:bodyPr wrap="square" rtlCol="0" anchor="ctr"/>
+          <a:lstStyle/>
+          <a:p>
+            <a:pPr algn="ctr" indent="0" marL="0">
               <a:buNone/>
             </a:pPr>
             <a:r>
               <a:rPr lang="en-US" sz="1100" dirty="0">
                 <a:solidFill>
-                  <a:srgbClr val="E0E0E0"/>
-                </a:solidFill>
-                <a:latin typeface="Segoe UI" pitchFamily="34" charset="0"/>
-                <a:ea typeface="Segoe UI" pitchFamily="34" charset="-122"/>
-                <a:cs typeface="Segoe UI" pitchFamily="34" charset="-120"/>
-              </a:rPr>
-              <a:t>was rejected, and why — permanent record</a:t>
-            </a:r>
-            <a:endParaRPr lang="en-US" sz="1100" dirty="0"/>
-          </a:p>
-        </p:txBody>
-      </p:sp>
-      <p:sp>
-        <p:nvSpPr>
-          <p:cNvPr id="27" name="Text 25"/>
-          <p:cNvSpPr/>
-          <p:nvPr/>
-        </p:nvSpPr>
-        <p:spPr>
-          <a:xfrm>
-            <a:off x="6400800" y="4160520"/>
-            <a:ext cx="5120640" cy="274320"/>
-          </a:xfrm>
-          <a:prstGeom prst="rect">
-            <a:avLst/>
-          </a:prstGeom>
-          <a:noFill/>
-          <a:ln/>
-        </p:spPr>
-        <p:txBody>
-          <a:bodyPr wrap="square" rtlCol="0" anchor="ctr"/>
-          <a:lstStyle/>
-          <a:p>
-            <a:pPr indent="0" marL="0">
-              <a:buNone/>
-            </a:pPr>
-            <a:r>
-              <a:rPr lang="en-US" sz="1300" b="1" dirty="0">
-                <a:solidFill>
-                  <a:srgbClr val="FFFFFF"/>
-                </a:solidFill>
-                <a:latin typeface="Segoe UI" pitchFamily="34" charset="0"/>
-                <a:ea typeface="Segoe UI" pitchFamily="34" charset="-122"/>
-                <a:cs typeface="Segoe UI" pitchFamily="34" charset="-120"/>
-              </a:rPr>
-              <a:t>Confirm before building</a:t>
-            </a:r>
-            <a:endParaRPr lang="en-US" sz="1300" dirty="0"/>
-          </a:p>
-        </p:txBody>
-      </p:sp>
-      <p:sp>
-        <p:nvSpPr>
-          <p:cNvPr id="28" name="Text 26"/>
-          <p:cNvSpPr/>
-          <p:nvPr/>
-        </p:nvSpPr>
-        <p:spPr>
-          <a:xfrm>
-            <a:off x="6400800" y="4434840"/>
-            <a:ext cx="5120640" cy="502920"/>
-          </a:xfrm>
-          <a:prstGeom prst="rect">
-            <a:avLst/>
-          </a:prstGeom>
-          <a:noFill/>
-          <a:ln/>
-        </p:spPr>
-        <p:txBody>
-          <a:bodyPr wrap="square" rtlCol="0" anchor="ctr"/>
-          <a:lstStyle/>
-          <a:p>
-            <a:pPr indent="0" marL="0">
-              <a:lnSpc>
-                <a:spcPct val="115000"/>
-              </a:lnSpc>
-              <a:buNone/>
-            </a:pPr>
-            <a:r>
-              <a:rPr lang="en-US" sz="1100" dirty="0">
-                <a:solidFill>
-                  <a:srgbClr val="E0E0E0"/>
-                </a:solidFill>
-                <a:latin typeface="Segoe UI" pitchFamily="34" charset="0"/>
-                <a:ea typeface="Segoe UI" pitchFamily="34" charset="-122"/>
-                <a:cs typeface="Segoe UI" pitchFamily="34" charset="-120"/>
-              </a:rPr>
-              <a:t>Present the plan, get explicit "proceed" before</a:t>
-            </a:r>
-            <a:endParaRPr lang="en-US" sz="1100" dirty="0"/>
-          </a:p>
-          <a:p>
-            <a:pPr indent="0" marL="0">
-              <a:lnSpc>
-                <a:spcPct val="115000"/>
-              </a:lnSpc>
-              <a:buNone/>
-            </a:pPr>
-            <a:r>
-              <a:rPr lang="en-US" sz="1100" dirty="0">
-                <a:solidFill>
-                  <a:srgbClr val="E0E0E0"/>
-                </a:solidFill>
-                <a:latin typeface="Segoe UI" pitchFamily="34" charset="0"/>
-                <a:ea typeface="Segoe UI" pitchFamily="34" charset="-122"/>
-                <a:cs typeface="Segoe UI" pitchFamily="34" charset="-120"/>
-              </a:rPr>
-              <a:t>writing a single line of code</a:t>
-            </a:r>
-            <a:endParaRPr lang="en-US" sz="1100" dirty="0"/>
-          </a:p>
-        </p:txBody>
-      </p:sp>
-      <p:sp>
-        <p:nvSpPr>
-          <p:cNvPr id="29" name="Text 27"/>
-          <p:cNvSpPr/>
-          <p:nvPr/>
-        </p:nvSpPr>
-        <p:spPr>
-          <a:xfrm>
-            <a:off x="6400800" y="5029200"/>
-            <a:ext cx="5120640" cy="274320"/>
-          </a:xfrm>
-          <a:prstGeom prst="rect">
-            <a:avLst/>
-          </a:prstGeom>
-          <a:noFill/>
-          <a:ln/>
-        </p:spPr>
-        <p:txBody>
-          <a:bodyPr wrap="square" rtlCol="0" anchor="ctr"/>
-          <a:lstStyle/>
-          <a:p>
-            <a:pPr indent="0" marL="0">
-              <a:buNone/>
-            </a:pPr>
-            <a:r>
-              <a:rPr lang="en-US" sz="1300" b="1" dirty="0">
-                <a:solidFill>
-                  <a:srgbClr val="FFFFFF"/>
-                </a:solidFill>
-                <a:latin typeface="Segoe UI" pitchFamily="34" charset="0"/>
-                <a:ea typeface="Segoe UI" pitchFamily="34" charset="-122"/>
-                <a:cs typeface="Segoe UI" pitchFamily="34" charset="-120"/>
-              </a:rPr>
-              <a:t>Escalate uncertainty</a:t>
-            </a:r>
-            <a:endParaRPr lang="en-US" sz="1300" dirty="0"/>
-          </a:p>
-        </p:txBody>
-      </p:sp>
-      <p:sp>
-        <p:nvSpPr>
-          <p:cNvPr id="30" name="Text 28"/>
-          <p:cNvSpPr/>
-          <p:nvPr/>
-        </p:nvSpPr>
-        <p:spPr>
-          <a:xfrm>
-            <a:off x="6400800" y="5303520"/>
-            <a:ext cx="5120640" cy="502920"/>
-          </a:xfrm>
-          <a:prstGeom prst="rect">
-            <a:avLst/>
-          </a:prstGeom>
-          <a:noFill/>
-          <a:ln/>
-        </p:spPr>
-        <p:txBody>
-          <a:bodyPr wrap="square" rtlCol="0" anchor="ctr"/>
-          <a:lstStyle/>
-          <a:p>
-            <a:pPr indent="0" marL="0">
-              <a:lnSpc>
-                <a:spcPct val="115000"/>
-              </a:lnSpc>
-              <a:buNone/>
-            </a:pPr>
-            <a:r>
-              <a:rPr lang="en-US" sz="1100" dirty="0">
-                <a:solidFill>
-                  <a:srgbClr val="E0E0E0"/>
-                </a:solidFill>
-                <a:latin typeface="Segoe UI" pitchFamily="34" charset="0"/>
-                <a:ea typeface="Segoe UI" pitchFamily="34" charset="-122"/>
-                <a:cs typeface="Segoe UI" pitchFamily="34" charset="-120"/>
-              </a:rPr>
-              <a:t>If confidence &lt; 70%, surface the uncertainty</a:t>
-            </a:r>
-            <a:endParaRPr lang="en-US" sz="1100" dirty="0"/>
-          </a:p>
-          <a:p>
-            <a:pPr indent="0" marL="0">
-              <a:lnSpc>
-                <a:spcPct val="115000"/>
-              </a:lnSpc>
-              <a:buNone/>
-            </a:pPr>
-            <a:r>
-              <a:rPr lang="en-US" sz="1100" dirty="0">
-                <a:solidFill>
-                  <a:srgbClr val="E0E0E0"/>
-                </a:solidFill>
-                <a:latin typeface="Segoe UI" pitchFamily="34" charset="0"/>
-                <a:ea typeface="Segoe UI" pitchFamily="34" charset="-122"/>
-                <a:cs typeface="Segoe UI" pitchFamily="34" charset="-120"/>
-              </a:rPr>
-              <a:t>to the human rather than guessing</a:t>
-            </a:r>
-            <a:endParaRPr lang="en-US" sz="1100" dirty="0"/>
-          </a:p>
-        </p:txBody>
-      </p:sp>
-      <p:sp>
-        <p:nvSpPr>
-          <p:cNvPr id="31" name="Text 29"/>
-          <p:cNvSpPr/>
-          <p:nvPr/>
-        </p:nvSpPr>
-        <p:spPr>
-          <a:xfrm>
-            <a:off x="6400800" y="5897880"/>
-            <a:ext cx="5120640" cy="274320"/>
-          </a:xfrm>
-          <a:prstGeom prst="rect">
-            <a:avLst/>
-          </a:prstGeom>
-          <a:noFill/>
-          <a:ln/>
-        </p:spPr>
-        <p:txBody>
-          <a:bodyPr wrap="square" rtlCol="0" anchor="ctr"/>
-          <a:lstStyle/>
-          <a:p>
-            <a:pPr indent="0" marL="0">
-              <a:buNone/>
-            </a:pPr>
-            <a:r>
-              <a:rPr lang="en-US" sz="1300" b="1" dirty="0">
-                <a:solidFill>
-                  <a:srgbClr val="FFFFFF"/>
-                </a:solidFill>
-                <a:latin typeface="Segoe UI" pitchFamily="34" charset="0"/>
-                <a:ea typeface="Segoe UI" pitchFamily="34" charset="-122"/>
-                <a:cs typeface="Segoe UI" pitchFamily="34" charset="-120"/>
-              </a:rPr>
-              <a:t>Learn from outcomes</a:t>
-            </a:r>
-            <a:endParaRPr lang="en-US" sz="1300" dirty="0"/>
-          </a:p>
-        </p:txBody>
-      </p:sp>
-      <p:sp>
-        <p:nvSpPr>
-          <p:cNvPr id="32" name="Text 30"/>
-          <p:cNvSpPr/>
-          <p:nvPr/>
-        </p:nvSpPr>
-        <p:spPr>
-          <a:xfrm>
-            <a:off x="6400800" y="6172200"/>
-            <a:ext cx="5120640" cy="502920"/>
-          </a:xfrm>
-          <a:prstGeom prst="rect">
-            <a:avLst/>
-          </a:prstGeom>
-          <a:noFill/>
-          <a:ln/>
-        </p:spPr>
-        <p:txBody>
-          <a:bodyPr wrap="square" rtlCol="0" anchor="ctr"/>
-          <a:lstStyle/>
-          <a:p>
-            <a:pPr indent="0" marL="0">
-              <a:lnSpc>
-                <a:spcPct val="115000"/>
-              </a:lnSpc>
-              <a:buNone/>
-            </a:pPr>
-            <a:r>
-              <a:rPr lang="en-US" sz="1100" dirty="0">
-                <a:solidFill>
-                  <a:srgbClr val="E0E0E0"/>
-                </a:solidFill>
-                <a:latin typeface="Segoe UI" pitchFamily="34" charset="0"/>
-                <a:ea typeface="Segoe UI" pitchFamily="34" charset="-122"/>
-                <a:cs typeface="Segoe UI" pitchFamily="34" charset="-120"/>
-              </a:rPr>
-              <a:t>Confidence-scored patterns. High-confidence</a:t>
-            </a:r>
-            <a:endParaRPr lang="en-US" sz="1100" dirty="0"/>
-          </a:p>
-          <a:p>
-            <a:pPr indent="0" marL="0">
-              <a:lnSpc>
-                <a:spcPct val="115000"/>
-              </a:lnSpc>
-              <a:buNone/>
-            </a:pPr>
-            <a:r>
-              <a:rPr lang="en-US" sz="1100" dirty="0">
-                <a:solidFill>
-                  <a:srgbClr val="E0E0E0"/>
-                </a:solidFill>
-                <a:latin typeface="Segoe UI" pitchFamily="34" charset="0"/>
-                <a:ea typeface="Segoe UI" pitchFamily="34" charset="-122"/>
-                <a:cs typeface="Segoe UI" pitchFamily="34" charset="-120"/>
-              </a:rPr>
-              <a:t>insights get promoted to permanent rules</a:t>
+                  <a:srgbClr val="A0A0A0"/>
+                </a:solidFill>
+                <a:latin typeface="Segoe UI" pitchFamily="34" charset="0"/>
+                <a:ea typeface="Segoe UI" pitchFamily="34" charset="-122"/>
+                <a:cs typeface="Segoe UI" pitchFamily="34" charset="-120"/>
+              </a:rPr>
+              <a:t>+ e2e-testing, deployment-patterns, database-migrations — 15 skills total, all invocable by name</a:t>
             </a:r>
             <a:endParaRPr lang="en-US" sz="1100" dirty="0"/>
           </a:p>
@@ -6892,7 +7272,7 @@
                 <a:ea typeface="Segoe UI" pitchFamily="34" charset="-122"/>
                 <a:cs typeface="Segoe UI" pitchFamily="34" charset="-120"/>
               </a:rPr>
-              <a:t>UX_SPEC, API_CONTRACT, DATA_MODEL,</a:t>
+              <a:t>UX_SPEC, API_CONTRACT, SECURITY_REVIEW,</a:t>
             </a:r>
             <a:endParaRPr lang="en-US" sz="1250" dirty="0"/>
           </a:p>
@@ -6912,7 +7292,7 @@
                 <a:ea typeface="Segoe UI" pitchFamily="34" charset="-122"/>
                 <a:cs typeface="Segoe UI" pitchFamily="34" charset="-120"/>
               </a:rPr>
-              <a:t>TEST_STRATEGY, and more. Structured</a:t>
+              <a:t>and more. Structured markdown templates</a:t>
             </a:r>
             <a:endParaRPr lang="en-US" sz="1250" dirty="0"/>
           </a:p>
@@ -6932,7 +7312,7 @@
                 <a:ea typeface="Segoe UI" pitchFamily="34" charset="-122"/>
                 <a:cs typeface="Segoe UI" pitchFamily="34" charset="-120"/>
               </a:rPr>
-              <a:t>markdown templates for every phase.</a:t>
+              <a:t>for every phase.</a:t>
             </a:r>
             <a:endParaRPr lang="en-US" sz="1250" dirty="0"/>
           </a:p>
@@ -7025,7 +7405,7 @@
                 <a:ea typeface="Segoe UI" pitchFamily="34" charset="-122"/>
                 <a:cs typeface="Segoe UI" pitchFamily="34" charset="-120"/>
               </a:rPr>
-              <a:t>Event-Driven Hooks</a:t>
+              <a:t>7 Event-Driven Hooks</a:t>
             </a:r>
             <a:endParaRPr lang="en-US" sz="1600" dirty="0"/>
           </a:p>
@@ -7087,7 +7467,7 @@
                 <a:ea typeface="Segoe UI" pitchFamily="34" charset="-122"/>
                 <a:cs typeface="Segoe UI" pitchFamily="34" charset="-120"/>
               </a:rPr>
-              <a:t>dangerous command blocking, knowledge</a:t>
+              <a:t>secret detection, dangerous command blocking,</a:t>
             </a:r>
             <a:endParaRPr lang="en-US" sz="1250" dirty="0"/>
           </a:p>
@@ -7107,7 +7487,7 @@
                 <a:ea typeface="Segoe UI" pitchFamily="34" charset="-122"/>
                 <a:cs typeface="Segoe UI" pitchFamily="34" charset="-120"/>
               </a:rPr>
-              <a:t>persistence. Automation that prevents</a:t>
+              <a:t>context preservation. Automated quality</a:t>
             </a:r>
             <a:endParaRPr lang="en-US" sz="1250" dirty="0"/>
           </a:p>
@@ -7127,7 +7507,7 @@
                 <a:ea typeface="Segoe UI" pitchFamily="34" charset="-122"/>
                 <a:cs typeface="Segoe UI" pitchFamily="34" charset="-120"/>
               </a:rPr>
-              <a:t>common AI coding mistakes.</a:t>
+              <a:t>gates that run without asking.</a:t>
             </a:r>
             <a:endParaRPr lang="en-US" sz="1250" dirty="0"/>
           </a:p>
@@ -7182,7 +7562,7 @@
             <a:avLst/>
           </a:prstGeom>
           <a:solidFill>
-            <a:srgbClr val="9B59B6"/>
+            <a:srgbClr val="FF8C00"/>
           </a:solidFill>
           <a:ln/>
         </p:spPr>
@@ -7214,13 +7594,13 @@
             <a:r>
               <a:rPr lang="en-US" sz="1600" b="1" dirty="0">
                 <a:solidFill>
-                  <a:srgbClr val="9B59B6"/>
-                </a:solidFill>
-                <a:latin typeface="Segoe UI" pitchFamily="34" charset="0"/>
-                <a:ea typeface="Segoe UI" pitchFamily="34" charset="-122"/>
-                <a:cs typeface="Segoe UI" pitchFamily="34" charset="-120"/>
-              </a:rPr>
-              <a:t>Reusable Skills Library</a:t>
+                  <a:srgbClr val="FF8C00"/>
+                </a:solidFill>
+                <a:latin typeface="Segoe UI" pitchFamily="34" charset="0"/>
+                <a:ea typeface="Segoe UI" pitchFamily="34" charset="-122"/>
+                <a:cs typeface="Segoe UI" pitchFamily="34" charset="-120"/>
+              </a:rPr>
+              <a:t>Confidence-Scored Learning</a:t>
             </a:r>
             <a:endParaRPr lang="en-US" sz="1600" dirty="0"/>
           </a:p>
@@ -7262,7 +7642,7 @@
                 <a:ea typeface="Segoe UI" pitchFamily="34" charset="-122"/>
                 <a:cs typeface="Segoe UI" pitchFamily="34" charset="-120"/>
               </a:rPr>
-              <a:t>Encapsulated, repeatable capabilities.</a:t>
+              <a:t>Agents capture lessons with scores (0.3-0.9).</a:t>
             </a:r>
             <a:endParaRPr lang="en-US" sz="1250" dirty="0"/>
           </a:p>
@@ -7282,7 +7662,7 @@
                 <a:ea typeface="Segoe UI" pitchFamily="34" charset="-122"/>
                 <a:cs typeface="Segoe UI" pitchFamily="34" charset="-120"/>
               </a:rPr>
-              <a:t>Deployment automation, database migrations,</a:t>
+              <a:t>High-confidence patterns get promoted into</a:t>
             </a:r>
             <a:endParaRPr lang="en-US" sz="1250" dirty="0"/>
           </a:p>
@@ -7302,7 +7682,7 @@
                 <a:ea typeface="Segoe UI" pitchFamily="34" charset="-122"/>
                 <a:cs typeface="Segoe UI" pitchFamily="34" charset="-120"/>
               </a:rPr>
-              <a:t>CI/CD setup — invoke by name,</a:t>
+              <a:t>permanent behavioral rules. Sprint retros</a:t>
             </a:r>
             <a:endParaRPr lang="en-US" sz="1250" dirty="0"/>
           </a:p>
@@ -7322,7 +7702,7 @@
                 <a:ea typeface="Segoe UI" pitchFamily="34" charset="-122"/>
                 <a:cs typeface="Segoe UI" pitchFamily="34" charset="-120"/>
               </a:rPr>
-              <a:t>get consistent results.</a:t>
+              <a:t>with git metrics. Agents that improve.</a:t>
             </a:r>
             <a:endParaRPr lang="en-US" sz="1250" dirty="0"/>
           </a:p>
@@ -7377,7 +7757,7 @@
             <a:avLst/>
           </a:prstGeom>
           <a:solidFill>
-            <a:srgbClr val="FF8C00"/>
+            <a:srgbClr val="E74C3C"/>
           </a:solidFill>
           <a:ln/>
         </p:spPr>
@@ -7409,13 +7789,13 @@
             <a:r>
               <a:rPr lang="en-US" sz="1600" b="1" dirty="0">
                 <a:solidFill>
-                  <a:srgbClr val="FF8C00"/>
-                </a:solidFill>
-                <a:latin typeface="Segoe UI" pitchFamily="34" charset="0"/>
-                <a:ea typeface="Segoe UI" pitchFamily="34" charset="-122"/>
-                <a:cs typeface="Segoe UI" pitchFamily="34" charset="-120"/>
-              </a:rPr>
-              <a:t>Confidence-Scored Learning</a:t>
+                  <a:srgbClr val="E74C3C"/>
+                </a:solidFill>
+                <a:latin typeface="Segoe UI" pitchFamily="34" charset="0"/>
+                <a:ea typeface="Segoe UI" pitchFamily="34" charset="-122"/>
+                <a:cs typeface="Segoe UI" pitchFamily="34" charset="-120"/>
+              </a:rPr>
+              <a:t>STRIDE Threat Modeling</a:t>
             </a:r>
             <a:endParaRPr lang="en-US" sz="1600" dirty="0"/>
           </a:p>
@@ -7457,7 +7837,7 @@
                 <a:ea typeface="Segoe UI" pitchFamily="34" charset="-122"/>
                 <a:cs typeface="Segoe UI" pitchFamily="34" charset="-120"/>
               </a:rPr>
-              <a:t>Agents capture lessons with scores (0.3-0.9).</a:t>
+              <a:t>Security Agent uses STRIDE methodology with</a:t>
             </a:r>
             <a:endParaRPr lang="en-US" sz="1250" dirty="0"/>
           </a:p>
@@ -7477,7 +7857,7 @@
                 <a:ea typeface="Segoe UI" pitchFamily="34" charset="-122"/>
                 <a:cs typeface="Segoe UI" pitchFamily="34" charset="-120"/>
               </a:rPr>
-              <a:t>Project or global scope. High-confidence</a:t>
+              <a:t>confidence gates (8/10+), false positive</a:t>
             </a:r>
             <a:endParaRPr lang="en-US" sz="1250" dirty="0"/>
           </a:p>
@@ -7497,7 +7877,7 @@
                 <a:ea typeface="Segoe UI" pitchFamily="34" charset="-122"/>
                 <a:cs typeface="Segoe UI" pitchFamily="34" charset="-120"/>
               </a:rPr>
-              <a:t>patterns get promoted into permanent</a:t>
+              <a:t>tracking, and concrete exploit scenarios.</a:t>
             </a:r>
             <a:endParaRPr lang="en-US" sz="1250" dirty="0"/>
           </a:p>
@@ -7517,7 +7897,7 @@
                 <a:ea typeface="Segoe UI" pitchFamily="34" charset="-122"/>
                 <a:cs typeface="Segoe UI" pitchFamily="34" charset="-120"/>
               </a:rPr>
-              <a:t>behavioral rules. Agents that improve.</a:t>
+              <a:t>Not checkbox auditing — adversarial thinking.</a:t>
             </a:r>
             <a:endParaRPr lang="en-US" sz="1250" dirty="0"/>
           </a:p>
@@ -7610,7 +7990,7 @@
                 <a:ea typeface="Segoe UI" pitchFamily="34" charset="-122"/>
                 <a:cs typeface="Segoe UI" pitchFamily="34" charset="-120"/>
               </a:rPr>
-              <a:t>Decision Logging</a:t>
+              <a:t>Visual QA + Design Review</a:t>
             </a:r>
             <a:endParaRPr lang="en-US" sz="1600" dirty="0"/>
           </a:p>
@@ -7652,7 +8032,7 @@
                 <a:ea typeface="Segoe UI" pitchFamily="34" charset="-122"/>
                 <a:cs typeface="Segoe UI" pitchFamily="34" charset="-120"/>
               </a:rPr>
-              <a:t>Every architectural choice logged with</a:t>
+              <a:t>Browser-based testing with Playwright.</a:t>
             </a:r>
             <a:endParaRPr lang="en-US" sz="1250" dirty="0"/>
           </a:p>
@@ -7672,7 +8052,7 @@
                 <a:ea typeface="Segoe UI" pitchFamily="34" charset="-122"/>
                 <a:cs typeface="Segoe UI" pitchFamily="34" charset="-120"/>
               </a:rPr>
-              <a:t>context, alternatives considered, and</a:t>
+              <a:t>Design scoring across 7 dimensions.</a:t>
             </a:r>
             <a:endParaRPr lang="en-US" sz="1250" dirty="0"/>
           </a:p>
@@ -7692,7 +8072,7 @@
                 <a:ea typeface="Segoe UI" pitchFamily="34" charset="-122"/>
                 <a:cs typeface="Segoe UI" pitchFamily="34" charset="-120"/>
               </a:rPr>
-              <a:t>rationale. Six months later, you know</a:t>
+              <a:t>AI slop detection. Regression test</a:t>
             </a:r>
             <a:endParaRPr lang="en-US" sz="1250" dirty="0"/>
           </a:p>
@@ -7712,7 +8092,7 @@
                 <a:ea typeface="Segoe UI" pitchFamily="34" charset="-122"/>
                 <a:cs typeface="Segoe UI" pitchFamily="34" charset="-120"/>
               </a:rPr>
-              <a:t>exactly why things were built this way.</a:t>
+              <a:t>generation for every visual bug found.</a:t>
             </a:r>
             <a:endParaRPr lang="en-US" sz="1250" dirty="0"/>
           </a:p>
@@ -7767,7 +8147,7 @@
             <a:avLst/>
           </a:prstGeom>
           <a:solidFill>
-            <a:srgbClr val="E74C3C"/>
+            <a:srgbClr val="9B59B6"/>
           </a:solidFill>
           <a:ln/>
         </p:spPr>
@@ -7799,13 +8179,13 @@
             <a:r>
               <a:rPr lang="en-US" sz="1600" b="1" dirty="0">
                 <a:solidFill>
-                  <a:srgbClr val="E74C3C"/>
-                </a:solidFill>
-                <a:latin typeface="Segoe UI" pitchFamily="34" charset="0"/>
-                <a:ea typeface="Segoe UI" pitchFamily="34" charset="-122"/>
-                <a:cs typeface="Segoe UI" pitchFamily="34" charset="-120"/>
-              </a:rPr>
-              <a:t>Cursor IDE Integration</a:t>
+                  <a:srgbClr val="9B59B6"/>
+                </a:solidFill>
+                <a:latin typeface="Segoe UI" pitchFamily="34" charset="0"/>
+                <a:ea typeface="Segoe UI" pitchFamily="34" charset="-122"/>
+                <a:cs typeface="Segoe UI" pitchFamily="34" charset="-120"/>
+              </a:rPr>
+              <a:t>17 Cursor Rules + 4 Universal</a:t>
             </a:r>
             <a:endParaRPr lang="en-US" sz="1600" dirty="0"/>
           </a:p>
@@ -7847,7 +8227,7 @@
                 <a:ea typeface="Segoe UI" pitchFamily="34" charset="-122"/>
                 <a:cs typeface="Segoe UI" pitchFamily="34" charset="-120"/>
               </a:rPr>
-              <a:t>13 cursor-rule files — one per agent.</a:t>
+              <a:t>One rule file per agent. Drop into any</a:t>
             </a:r>
             <a:endParaRPr lang="en-US" sz="1250" dirty="0"/>
           </a:p>
@@ -7867,7 +8247,7 @@
                 <a:ea typeface="Segoe UI" pitchFamily="34" charset="-122"/>
                 <a:cs typeface="Segoe UI" pitchFamily="34" charset="-120"/>
               </a:rPr>
-              <a:t>Drop into any project. Each rule activates</a:t>
+              <a:t>project. Coding standards, git workflow,</a:t>
             </a:r>
             <a:endParaRPr lang="en-US" sz="1250" dirty="0"/>
           </a:p>
@@ -7887,7 +8267,7 @@
                 <a:ea typeface="Segoe UI" pitchFamily="34" charset="-122"/>
                 <a:cs typeface="Segoe UI" pitchFamily="34" charset="-120"/>
               </a:rPr>
-              <a:t>the right agent behavior for the task</a:t>
+              <a:t>development pipeline, performance — all</a:t>
             </a:r>
             <a:endParaRPr lang="en-US" sz="1250" dirty="0"/>
           </a:p>
@@ -7907,7 +8287,7 @@
                 <a:ea typeface="Segoe UI" pitchFamily="34" charset="-122"/>
                 <a:cs typeface="Segoe UI" pitchFamily="34" charset="-120"/>
               </a:rPr>
-              <a:t>at hand. Zero configuration needed.</a:t>
+              <a:t>enforced automatically.</a:t>
             </a:r>
             <a:endParaRPr lang="en-US" sz="1250" dirty="0"/>
           </a:p>
@@ -7953,8 +8333,413 @@
         </p:nvSpPr>
         <p:spPr>
           <a:xfrm>
-            <a:off x="4114800" y="1645920"/>
-            <a:ext cx="3931920" cy="36576"/>
+            <a:off x="731520" y="457200"/>
+            <a:ext cx="1371600" cy="36576"/>
+          </a:xfrm>
+          <a:prstGeom prst="rect">
+            <a:avLst/>
+          </a:prstGeom>
+          <a:solidFill>
+            <a:srgbClr val="2ECC71"/>
+          </a:solidFill>
+          <a:ln/>
+        </p:spPr>
+      </p:sp>
+      <p:sp>
+        <p:nvSpPr>
+          <p:cNvPr id="3" name="Text 1"/>
+          <p:cNvSpPr/>
+          <p:nvPr/>
+        </p:nvSpPr>
+        <p:spPr>
+          <a:xfrm>
+            <a:off x="731520" y="594360"/>
+            <a:ext cx="10058400" cy="548640"/>
+          </a:xfrm>
+          <a:prstGeom prst="rect">
+            <a:avLst/>
+          </a:prstGeom>
+          <a:noFill/>
+          <a:ln/>
+        </p:spPr>
+        <p:txBody>
+          <a:bodyPr wrap="square" rtlCol="0" anchor="ctr"/>
+          <a:lstStyle/>
+          <a:p>
+            <a:pPr indent="0" marL="0">
+              <a:buNone/>
+            </a:pPr>
+            <a:r>
+              <a:rPr lang="en-US" sz="3000" b="1" dirty="0">
+                <a:solidFill>
+                  <a:srgbClr val="FFFFFF"/>
+                </a:solidFill>
+                <a:latin typeface="Segoe UI" pitchFamily="34" charset="0"/>
+                <a:ea typeface="Segoe UI" pitchFamily="34" charset="-122"/>
+                <a:cs typeface="Segoe UI" pitchFamily="34" charset="-120"/>
+              </a:rPr>
+              <a:t>The Full Sprint — End to End</a:t>
+            </a:r>
+            <a:endParaRPr lang="en-US" sz="3000" dirty="0"/>
+          </a:p>
+        </p:txBody>
+      </p:sp>
+      <p:sp>
+        <p:nvSpPr>
+          <p:cNvPr id="4" name="Text 2"/>
+          <p:cNvSpPr/>
+          <p:nvPr/>
+        </p:nvSpPr>
+        <p:spPr>
+          <a:xfrm>
+            <a:off x="731520" y="1188720"/>
+            <a:ext cx="10058400" cy="365760"/>
+          </a:xfrm>
+          <a:prstGeom prst="rect">
+            <a:avLst/>
+          </a:prstGeom>
+          <a:noFill/>
+          <a:ln/>
+        </p:spPr>
+        <p:txBody>
+          <a:bodyPr wrap="square" rtlCol="0" anchor="ctr"/>
+          <a:lstStyle/>
+          <a:p>
+            <a:pPr indent="0" marL="0">
+              <a:buNone/>
+            </a:pPr>
+            <a:r>
+              <a:rPr lang="en-US" sz="1500" dirty="0">
+                <a:solidFill>
+                  <a:srgbClr val="E0E0E0"/>
+                </a:solidFill>
+                <a:latin typeface="Segoe UI" pitchFamily="34" charset="0"/>
+                <a:ea typeface="Segoe UI" pitchFamily="34" charset="-122"/>
+                <a:cs typeface="Segoe UI" pitchFamily="34" charset="-120"/>
+              </a:rPr>
+              <a:t>One feature, from idea to production-verified. Every step feeds into the next.</a:t>
+            </a:r>
+            <a:endParaRPr lang="en-US" sz="1500" dirty="0"/>
+          </a:p>
+        </p:txBody>
+      </p:sp>
+      <p:sp>
+        <p:nvSpPr>
+          <p:cNvPr id="5" name="Shape 3"/>
+          <p:cNvSpPr/>
+          <p:nvPr/>
+        </p:nvSpPr>
+        <p:spPr>
+          <a:xfrm>
+            <a:off x="182880" y="1828800"/>
+            <a:ext cx="2194560" cy="4114800"/>
+          </a:xfrm>
+          <a:prstGeom prst="roundRect">
+            <a:avLst>
+              <a:gd name="adj" fmla="val 4167"/>
+            </a:avLst>
+          </a:prstGeom>
+          <a:solidFill>
+            <a:srgbClr val="262640"/>
+          </a:solidFill>
+          <a:ln w="12700">
+            <a:solidFill>
+              <a:srgbClr val="262640"/>
+            </a:solidFill>
+            <a:prstDash val="solid"/>
+          </a:ln>
+          <a:effectLst>
+            <a:outerShdw sx="100000" sy="100000" kx="0" ky="0" algn="bl" rotWithShape="0" blurRad="76200" dist="25400" dir="16200000">
+              <a:srgbClr val="000000">
+                <a:alpha val="30000"/>
+              </a:srgbClr>
+            </a:outerShdw>
+          </a:effectLst>
+        </p:spPr>
+      </p:sp>
+      <p:sp>
+        <p:nvSpPr>
+          <p:cNvPr id="6" name="Shape 4"/>
+          <p:cNvSpPr/>
+          <p:nvPr/>
+        </p:nvSpPr>
+        <p:spPr>
+          <a:xfrm>
+            <a:off x="182880" y="1828800"/>
+            <a:ext cx="2194560" cy="36576"/>
+          </a:xfrm>
+          <a:prstGeom prst="rect">
+            <a:avLst/>
+          </a:prstGeom>
+          <a:solidFill>
+            <a:srgbClr val="007ACC"/>
+          </a:solidFill>
+          <a:ln/>
+        </p:spPr>
+      </p:sp>
+      <p:sp>
+        <p:nvSpPr>
+          <p:cNvPr id="7" name="Text 5"/>
+          <p:cNvSpPr/>
+          <p:nvPr/>
+        </p:nvSpPr>
+        <p:spPr>
+          <a:xfrm>
+            <a:off x="274320" y="1965960"/>
+            <a:ext cx="2011680" cy="320040"/>
+          </a:xfrm>
+          <a:prstGeom prst="rect">
+            <a:avLst/>
+          </a:prstGeom>
+          <a:noFill/>
+          <a:ln/>
+        </p:spPr>
+        <p:txBody>
+          <a:bodyPr wrap="square" rtlCol="0" anchor="ctr"/>
+          <a:lstStyle/>
+          <a:p>
+            <a:pPr algn="ctr" indent="0" marL="0">
+              <a:buNone/>
+            </a:pPr>
+            <a:r>
+              <a:rPr lang="en-US" sz="1100" b="1" dirty="0">
+                <a:solidFill>
+                  <a:srgbClr val="007ACC"/>
+                </a:solidFill>
+                <a:latin typeface="Segoe UI" pitchFamily="34" charset="0"/>
+                <a:ea typeface="Segoe UI" pitchFamily="34" charset="-122"/>
+                <a:cs typeface="Segoe UI" pitchFamily="34" charset="-120"/>
+              </a:rPr>
+              <a:t>/autoplan</a:t>
+            </a:r>
+            <a:endParaRPr lang="en-US" sz="1100" dirty="0"/>
+          </a:p>
+        </p:txBody>
+      </p:sp>
+      <p:sp>
+        <p:nvSpPr>
+          <p:cNvPr id="8" name="Text 6"/>
+          <p:cNvSpPr/>
+          <p:nvPr/>
+        </p:nvSpPr>
+        <p:spPr>
+          <a:xfrm>
+            <a:off x="274320" y="2331720"/>
+            <a:ext cx="2011680" cy="365760"/>
+          </a:xfrm>
+          <a:prstGeom prst="rect">
+            <a:avLst/>
+          </a:prstGeom>
+          <a:noFill/>
+          <a:ln/>
+        </p:spPr>
+        <p:txBody>
+          <a:bodyPr wrap="square" rtlCol="0" anchor="ctr"/>
+          <a:lstStyle/>
+          <a:p>
+            <a:pPr algn="ctr" indent="0" marL="0">
+              <a:buNone/>
+            </a:pPr>
+            <a:r>
+              <a:rPr lang="en-US" sz="1500" b="1" dirty="0">
+                <a:solidFill>
+                  <a:srgbClr val="FFFFFF"/>
+                </a:solidFill>
+                <a:latin typeface="Segoe UI" pitchFamily="34" charset="0"/>
+                <a:ea typeface="Segoe UI" pitchFamily="34" charset="-122"/>
+                <a:cs typeface="Segoe UI" pitchFamily="34" charset="-120"/>
+              </a:rPr>
+              <a:t>Think + Plan</a:t>
+            </a:r>
+            <a:endParaRPr lang="en-US" sz="1500" dirty="0"/>
+          </a:p>
+        </p:txBody>
+      </p:sp>
+      <p:sp>
+        <p:nvSpPr>
+          <p:cNvPr id="9" name="Text 7"/>
+          <p:cNvSpPr/>
+          <p:nvPr/>
+        </p:nvSpPr>
+        <p:spPr>
+          <a:xfrm>
+            <a:off x="320040" y="2834640"/>
+            <a:ext cx="1920240" cy="2926080"/>
+          </a:xfrm>
+          <a:prstGeom prst="rect">
+            <a:avLst/>
+          </a:prstGeom>
+          <a:noFill/>
+          <a:ln/>
+        </p:spPr>
+        <p:txBody>
+          <a:bodyPr wrap="square" rtlCol="0" anchor="ctr"/>
+          <a:lstStyle/>
+          <a:p>
+            <a:pPr indent="0" marL="0">
+              <a:lnSpc>
+                <a:spcPct val="130000"/>
+              </a:lnSpc>
+              <a:buNone/>
+            </a:pPr>
+            <a:r>
+              <a:rPr lang="en-US" sz="1200" dirty="0">
+                <a:solidFill>
+                  <a:srgbClr val="E0E0E0"/>
+                </a:solidFill>
+                <a:latin typeface="Segoe UI" pitchFamily="34" charset="0"/>
+                <a:ea typeface="Segoe UI" pitchFamily="34" charset="-122"/>
+                <a:cs typeface="Segoe UI" pitchFamily="34" charset="-120"/>
+              </a:rPr>
+              <a:t>Chains Phases 1-3.</a:t>
+            </a:r>
+            <a:endParaRPr lang="en-US" sz="1200" dirty="0"/>
+          </a:p>
+          <a:p>
+            <a:pPr indent="0" marL="0">
+              <a:lnSpc>
+                <a:spcPct val="130000"/>
+              </a:lnSpc>
+              <a:buNone/>
+            </a:pPr>
+            <a:r>
+              <a:rPr lang="en-US" sz="1200" dirty="0">
+                <a:solidFill>
+                  <a:srgbClr val="E0E0E0"/>
+                </a:solidFill>
+                <a:latin typeface="Segoe UI" pitchFamily="34" charset="0"/>
+                <a:ea typeface="Segoe UI" pitchFamily="34" charset="-122"/>
+                <a:cs typeface="Segoe UI" pitchFamily="34" charset="-120"/>
+              </a:rPr>
+              <a:t>Auto-resolves standard</a:t>
+            </a:r>
+            <a:endParaRPr lang="en-US" sz="1200" dirty="0"/>
+          </a:p>
+          <a:p>
+            <a:pPr indent="0" marL="0">
+              <a:lnSpc>
+                <a:spcPct val="130000"/>
+              </a:lnSpc>
+              <a:buNone/>
+            </a:pPr>
+            <a:r>
+              <a:rPr lang="en-US" sz="1200" dirty="0">
+                <a:solidFill>
+                  <a:srgbClr val="E0E0E0"/>
+                </a:solidFill>
+                <a:latin typeface="Segoe UI" pitchFamily="34" charset="0"/>
+                <a:ea typeface="Segoe UI" pitchFamily="34" charset="-122"/>
+                <a:cs typeface="Segoe UI" pitchFamily="34" charset="-120"/>
+              </a:rPr>
+              <a:t>decisions. Pauses only</a:t>
+            </a:r>
+            <a:endParaRPr lang="en-US" sz="1200" dirty="0"/>
+          </a:p>
+          <a:p>
+            <a:pPr indent="0" marL="0">
+              <a:lnSpc>
+                <a:spcPct val="130000"/>
+              </a:lnSpc>
+              <a:buNone/>
+            </a:pPr>
+            <a:r>
+              <a:rPr lang="en-US" sz="1200" dirty="0">
+                <a:solidFill>
+                  <a:srgbClr val="E0E0E0"/>
+                </a:solidFill>
+                <a:latin typeface="Segoe UI" pitchFamily="34" charset="0"/>
+                <a:ea typeface="Segoe UI" pitchFamily="34" charset="-122"/>
+                <a:cs typeface="Segoe UI" pitchFamily="34" charset="-120"/>
+              </a:rPr>
+              <a:t>for taste choices.</a:t>
+            </a:r>
+            <a:endParaRPr lang="en-US" sz="1200" dirty="0"/>
+          </a:p>
+        </p:txBody>
+      </p:sp>
+      <p:sp>
+        <p:nvSpPr>
+          <p:cNvPr id="10" name="Text 8"/>
+          <p:cNvSpPr/>
+          <p:nvPr/>
+        </p:nvSpPr>
+        <p:spPr>
+          <a:xfrm>
+            <a:off x="2286000" y="3200400"/>
+            <a:ext cx="365760" cy="457200"/>
+          </a:xfrm>
+          <a:prstGeom prst="rect">
+            <a:avLst/>
+          </a:prstGeom>
+          <a:noFill/>
+          <a:ln/>
+        </p:spPr>
+        <p:txBody>
+          <a:bodyPr wrap="square" rtlCol="0" anchor="ctr"/>
+          <a:lstStyle/>
+          <a:p>
+            <a:pPr algn="ctr" indent="0" marL="0">
+              <a:buNone/>
+            </a:pPr>
+            <a:r>
+              <a:rPr lang="en-US" sz="2000" dirty="0">
+                <a:solidFill>
+                  <a:srgbClr val="A0A0A0"/>
+                </a:solidFill>
+                <a:latin typeface="Segoe UI" pitchFamily="34" charset="0"/>
+                <a:ea typeface="Segoe UI" pitchFamily="34" charset="-122"/>
+                <a:cs typeface="Segoe UI" pitchFamily="34" charset="-120"/>
+              </a:rPr>
+              <a:t>→</a:t>
+            </a:r>
+            <a:endParaRPr lang="en-US" sz="2000" dirty="0"/>
+          </a:p>
+        </p:txBody>
+      </p:sp>
+      <p:sp>
+        <p:nvSpPr>
+          <p:cNvPr id="11" name="Shape 9"/>
+          <p:cNvSpPr/>
+          <p:nvPr/>
+        </p:nvSpPr>
+        <p:spPr>
+          <a:xfrm>
+            <a:off x="2560320" y="1828800"/>
+            <a:ext cx="2194560" cy="4114800"/>
+          </a:xfrm>
+          <a:prstGeom prst="roundRect">
+            <a:avLst>
+              <a:gd name="adj" fmla="val 4167"/>
+            </a:avLst>
+          </a:prstGeom>
+          <a:solidFill>
+            <a:srgbClr val="262640"/>
+          </a:solidFill>
+          <a:ln w="12700">
+            <a:solidFill>
+              <a:srgbClr val="262640"/>
+            </a:solidFill>
+            <a:prstDash val="solid"/>
+          </a:ln>
+          <a:effectLst>
+            <a:outerShdw sx="100000" sy="100000" kx="0" ky="0" algn="bl" rotWithShape="0" blurRad="76200" dist="25400" dir="16200000">
+              <a:srgbClr val="000000">
+                <a:alpha val="30000"/>
+              </a:srgbClr>
+            </a:outerShdw>
+          </a:effectLst>
+        </p:spPr>
+      </p:sp>
+      <p:sp>
+        <p:nvSpPr>
+          <p:cNvPr id="12" name="Shape 10"/>
+          <p:cNvSpPr/>
+          <p:nvPr/>
+        </p:nvSpPr>
+        <p:spPr>
+          <a:xfrm>
+            <a:off x="2560320" y="1828800"/>
+            <a:ext cx="2194560" cy="36576"/>
           </a:xfrm>
           <a:prstGeom prst="rect">
             <a:avLst/>
@@ -7967,6 +8752,1130 @@
       </p:sp>
       <p:sp>
         <p:nvSpPr>
+          <p:cNvPr id="13" name="Text 11"/>
+          <p:cNvSpPr/>
+          <p:nvPr/>
+        </p:nvSpPr>
+        <p:spPr>
+          <a:xfrm>
+            <a:off x="2651760" y="1965960"/>
+            <a:ext cx="2011680" cy="320040"/>
+          </a:xfrm>
+          <a:prstGeom prst="rect">
+            <a:avLst/>
+          </a:prstGeom>
+          <a:noFill/>
+          <a:ln/>
+        </p:spPr>
+        <p:txBody>
+          <a:bodyPr wrap="square" rtlCol="0" anchor="ctr"/>
+          <a:lstStyle/>
+          <a:p>
+            <a:pPr algn="ctr" indent="0" marL="0">
+              <a:buNone/>
+            </a:pPr>
+            <a:r>
+              <a:rPr lang="en-US" sz="1100" b="1" dirty="0">
+                <a:solidFill>
+                  <a:srgbClr val="00B4A0"/>
+                </a:solidFill>
+                <a:latin typeface="Segoe UI" pitchFamily="34" charset="0"/>
+                <a:ea typeface="Segoe UI" pitchFamily="34" charset="-122"/>
+                <a:cs typeface="Segoe UI" pitchFamily="34" charset="-120"/>
+              </a:rPr>
+              <a:t>Build</a:t>
+            </a:r>
+            <a:endParaRPr lang="en-US" sz="1100" dirty="0"/>
+          </a:p>
+        </p:txBody>
+      </p:sp>
+      <p:sp>
+        <p:nvSpPr>
+          <p:cNvPr id="14" name="Text 12"/>
+          <p:cNvSpPr/>
+          <p:nvPr/>
+        </p:nvSpPr>
+        <p:spPr>
+          <a:xfrm>
+            <a:off x="2651760" y="2331720"/>
+            <a:ext cx="2011680" cy="365760"/>
+          </a:xfrm>
+          <a:prstGeom prst="rect">
+            <a:avLst/>
+          </a:prstGeom>
+          <a:noFill/>
+          <a:ln/>
+        </p:spPr>
+        <p:txBody>
+          <a:bodyPr wrap="square" rtlCol="0" anchor="ctr"/>
+          <a:lstStyle/>
+          <a:p>
+            <a:pPr algn="ctr" indent="0" marL="0">
+              <a:buNone/>
+            </a:pPr>
+            <a:r>
+              <a:rPr lang="en-US" sz="1500" b="1" dirty="0">
+                <a:solidFill>
+                  <a:srgbClr val="FFFFFF"/>
+                </a:solidFill>
+                <a:latin typeface="Segoe UI" pitchFamily="34" charset="0"/>
+                <a:ea typeface="Segoe UI" pitchFamily="34" charset="-122"/>
+                <a:cs typeface="Segoe UI" pitchFamily="34" charset="-120"/>
+              </a:rPr>
+              <a:t>Backend + Frontend</a:t>
+            </a:r>
+            <a:endParaRPr lang="en-US" sz="1500" dirty="0"/>
+          </a:p>
+        </p:txBody>
+      </p:sp>
+      <p:sp>
+        <p:nvSpPr>
+          <p:cNvPr id="15" name="Text 13"/>
+          <p:cNvSpPr/>
+          <p:nvPr/>
+        </p:nvSpPr>
+        <p:spPr>
+          <a:xfrm>
+            <a:off x="2697480" y="2834640"/>
+            <a:ext cx="1920240" cy="2926080"/>
+          </a:xfrm>
+          <a:prstGeom prst="rect">
+            <a:avLst/>
+          </a:prstGeom>
+          <a:noFill/>
+          <a:ln/>
+        </p:spPr>
+        <p:txBody>
+          <a:bodyPr wrap="square" rtlCol="0" anchor="ctr"/>
+          <a:lstStyle/>
+          <a:p>
+            <a:pPr indent="0" marL="0">
+              <a:lnSpc>
+                <a:spcPct val="130000"/>
+              </a:lnSpc>
+              <a:buNone/>
+            </a:pPr>
+            <a:r>
+              <a:rPr lang="en-US" sz="1200" dirty="0">
+                <a:solidFill>
+                  <a:srgbClr val="E0E0E0"/>
+                </a:solidFill>
+                <a:latin typeface="Segoe UI" pitchFamily="34" charset="0"/>
+                <a:ea typeface="Segoe UI" pitchFamily="34" charset="-122"/>
+                <a:cs typeface="Segoe UI" pitchFamily="34" charset="-120"/>
+              </a:rPr>
+              <a:t>TDD workflow.</a:t>
+            </a:r>
+            <a:endParaRPr lang="en-US" sz="1200" dirty="0"/>
+          </a:p>
+          <a:p>
+            <a:pPr indent="0" marL="0">
+              <a:lnSpc>
+                <a:spcPct val="130000"/>
+              </a:lnSpc>
+              <a:buNone/>
+            </a:pPr>
+            <a:r>
+              <a:rPr lang="en-US" sz="1200" dirty="0">
+                <a:solidFill>
+                  <a:srgbClr val="E0E0E0"/>
+                </a:solidFill>
+                <a:latin typeface="Segoe UI" pitchFamily="34" charset="0"/>
+                <a:ea typeface="Segoe UI" pitchFamily="34" charset="-122"/>
+                <a:cs typeface="Segoe UI" pitchFamily="34" charset="-120"/>
+              </a:rPr>
+              <a:t>Search-first for deps.</a:t>
+            </a:r>
+            <a:endParaRPr lang="en-US" sz="1200" dirty="0"/>
+          </a:p>
+          <a:p>
+            <a:pPr indent="0" marL="0">
+              <a:lnSpc>
+                <a:spcPct val="130000"/>
+              </a:lnSpc>
+              <a:buNone/>
+            </a:pPr>
+            <a:r>
+              <a:rPr lang="en-US" sz="1200" dirty="0">
+                <a:solidFill>
+                  <a:srgbClr val="E0E0E0"/>
+                </a:solidFill>
+                <a:latin typeface="Segoe UI" pitchFamily="34" charset="0"/>
+                <a:ea typeface="Segoe UI" pitchFamily="34" charset="-122"/>
+                <a:cs typeface="Segoe UI" pitchFamily="34" charset="-120"/>
+              </a:rPr>
+              <a:t>Artifact-driven —</a:t>
+            </a:r>
+            <a:endParaRPr lang="en-US" sz="1200" dirty="0"/>
+          </a:p>
+          <a:p>
+            <a:pPr indent="0" marL="0">
+              <a:lnSpc>
+                <a:spcPct val="130000"/>
+              </a:lnSpc>
+              <a:buNone/>
+            </a:pPr>
+            <a:r>
+              <a:rPr lang="en-US" sz="1200" dirty="0">
+                <a:solidFill>
+                  <a:srgbClr val="E0E0E0"/>
+                </a:solidFill>
+                <a:latin typeface="Segoe UI" pitchFamily="34" charset="0"/>
+                <a:ea typeface="Segoe UI" pitchFamily="34" charset="-122"/>
+                <a:cs typeface="Segoe UI" pitchFamily="34" charset="-120"/>
+              </a:rPr>
+              <a:t>specs, not assumptions.</a:t>
+            </a:r>
+            <a:endParaRPr lang="en-US" sz="1200" dirty="0"/>
+          </a:p>
+        </p:txBody>
+      </p:sp>
+      <p:sp>
+        <p:nvSpPr>
+          <p:cNvPr id="16" name="Text 14"/>
+          <p:cNvSpPr/>
+          <p:nvPr/>
+        </p:nvSpPr>
+        <p:spPr>
+          <a:xfrm>
+            <a:off x="4663440" y="3200400"/>
+            <a:ext cx="365760" cy="457200"/>
+          </a:xfrm>
+          <a:prstGeom prst="rect">
+            <a:avLst/>
+          </a:prstGeom>
+          <a:noFill/>
+          <a:ln/>
+        </p:spPr>
+        <p:txBody>
+          <a:bodyPr wrap="square" rtlCol="0" anchor="ctr"/>
+          <a:lstStyle/>
+          <a:p>
+            <a:pPr algn="ctr" indent="0" marL="0">
+              <a:buNone/>
+            </a:pPr>
+            <a:r>
+              <a:rPr lang="en-US" sz="2000" dirty="0">
+                <a:solidFill>
+                  <a:srgbClr val="A0A0A0"/>
+                </a:solidFill>
+                <a:latin typeface="Segoe UI" pitchFamily="34" charset="0"/>
+                <a:ea typeface="Segoe UI" pitchFamily="34" charset="-122"/>
+                <a:cs typeface="Segoe UI" pitchFamily="34" charset="-120"/>
+              </a:rPr>
+              <a:t>→</a:t>
+            </a:r>
+            <a:endParaRPr lang="en-US" sz="2000" dirty="0"/>
+          </a:p>
+        </p:txBody>
+      </p:sp>
+      <p:sp>
+        <p:nvSpPr>
+          <p:cNvPr id="17" name="Shape 15"/>
+          <p:cNvSpPr/>
+          <p:nvPr/>
+        </p:nvSpPr>
+        <p:spPr>
+          <a:xfrm>
+            <a:off x="4937760" y="1828800"/>
+            <a:ext cx="2194560" cy="4114800"/>
+          </a:xfrm>
+          <a:prstGeom prst="roundRect">
+            <a:avLst>
+              <a:gd name="adj" fmla="val 4167"/>
+            </a:avLst>
+          </a:prstGeom>
+          <a:solidFill>
+            <a:srgbClr val="262640"/>
+          </a:solidFill>
+          <a:ln w="12700">
+            <a:solidFill>
+              <a:srgbClr val="262640"/>
+            </a:solidFill>
+            <a:prstDash val="solid"/>
+          </a:ln>
+          <a:effectLst>
+            <a:outerShdw sx="100000" sy="100000" kx="0" ky="0" algn="bl" rotWithShape="0" blurRad="76200" dist="25400" dir="16200000">
+              <a:srgbClr val="000000">
+                <a:alpha val="30000"/>
+              </a:srgbClr>
+            </a:outerShdw>
+          </a:effectLst>
+        </p:spPr>
+      </p:sp>
+      <p:sp>
+        <p:nvSpPr>
+          <p:cNvPr id="18" name="Shape 16"/>
+          <p:cNvSpPr/>
+          <p:nvPr/>
+        </p:nvSpPr>
+        <p:spPr>
+          <a:xfrm>
+            <a:off x="4937760" y="1828800"/>
+            <a:ext cx="2194560" cy="36576"/>
+          </a:xfrm>
+          <a:prstGeom prst="rect">
+            <a:avLst/>
+          </a:prstGeom>
+          <a:solidFill>
+            <a:srgbClr val="2ECC71"/>
+          </a:solidFill>
+          <a:ln/>
+        </p:spPr>
+      </p:sp>
+      <p:sp>
+        <p:nvSpPr>
+          <p:cNvPr id="19" name="Text 17"/>
+          <p:cNvSpPr/>
+          <p:nvPr/>
+        </p:nvSpPr>
+        <p:spPr>
+          <a:xfrm>
+            <a:off x="5029200" y="1965960"/>
+            <a:ext cx="2011680" cy="320040"/>
+          </a:xfrm>
+          <a:prstGeom prst="rect">
+            <a:avLst/>
+          </a:prstGeom>
+          <a:noFill/>
+          <a:ln/>
+        </p:spPr>
+        <p:txBody>
+          <a:bodyPr wrap="square" rtlCol="0" anchor="ctr"/>
+          <a:lstStyle/>
+          <a:p>
+            <a:pPr algn="ctr" indent="0" marL="0">
+              <a:buNone/>
+            </a:pPr>
+            <a:r>
+              <a:rPr lang="en-US" sz="1100" b="1" dirty="0">
+                <a:solidFill>
+                  <a:srgbClr val="2ECC71"/>
+                </a:solidFill>
+                <a:latin typeface="Segoe UI" pitchFamily="34" charset="0"/>
+                <a:ea typeface="Segoe UI" pitchFamily="34" charset="-122"/>
+                <a:cs typeface="Segoe UI" pitchFamily="34" charset="-120"/>
+              </a:rPr>
+              <a:t>/verify + /qa</a:t>
+            </a:r>
+            <a:endParaRPr lang="en-US" sz="1100" dirty="0"/>
+          </a:p>
+        </p:txBody>
+      </p:sp>
+      <p:sp>
+        <p:nvSpPr>
+          <p:cNvPr id="20" name="Text 18"/>
+          <p:cNvSpPr/>
+          <p:nvPr/>
+        </p:nvSpPr>
+        <p:spPr>
+          <a:xfrm>
+            <a:off x="5029200" y="2331720"/>
+            <a:ext cx="2011680" cy="365760"/>
+          </a:xfrm>
+          <a:prstGeom prst="rect">
+            <a:avLst/>
+          </a:prstGeom>
+          <a:noFill/>
+          <a:ln/>
+        </p:spPr>
+        <p:txBody>
+          <a:bodyPr wrap="square" rtlCol="0" anchor="ctr"/>
+          <a:lstStyle/>
+          <a:p>
+            <a:pPr algn="ctr" indent="0" marL="0">
+              <a:buNone/>
+            </a:pPr>
+            <a:r>
+              <a:rPr lang="en-US" sz="1500" b="1" dirty="0">
+                <a:solidFill>
+                  <a:srgbClr val="FFFFFF"/>
+                </a:solidFill>
+                <a:latin typeface="Segoe UI" pitchFamily="34" charset="0"/>
+                <a:ea typeface="Segoe UI" pitchFamily="34" charset="-122"/>
+                <a:cs typeface="Segoe UI" pitchFamily="34" charset="-120"/>
+              </a:rPr>
+              <a:t>Test + Review</a:t>
+            </a:r>
+            <a:endParaRPr lang="en-US" sz="1500" dirty="0"/>
+          </a:p>
+        </p:txBody>
+      </p:sp>
+      <p:sp>
+        <p:nvSpPr>
+          <p:cNvPr id="21" name="Text 19"/>
+          <p:cNvSpPr/>
+          <p:nvPr/>
+        </p:nvSpPr>
+        <p:spPr>
+          <a:xfrm>
+            <a:off x="5074920" y="2834640"/>
+            <a:ext cx="1920240" cy="2926080"/>
+          </a:xfrm>
+          <a:prstGeom prst="rect">
+            <a:avLst/>
+          </a:prstGeom>
+          <a:noFill/>
+          <a:ln/>
+        </p:spPr>
+        <p:txBody>
+          <a:bodyPr wrap="square" rtlCol="0" anchor="ctr"/>
+          <a:lstStyle/>
+          <a:p>
+            <a:pPr indent="0" marL="0">
+              <a:lnSpc>
+                <a:spcPct val="130000"/>
+              </a:lnSpc>
+              <a:buNone/>
+            </a:pPr>
+            <a:r>
+              <a:rPr lang="en-US" sz="1200" dirty="0">
+                <a:solidFill>
+                  <a:srgbClr val="E0E0E0"/>
+                </a:solidFill>
+                <a:latin typeface="Segoe UI" pitchFamily="34" charset="0"/>
+                <a:ea typeface="Segoe UI" pitchFamily="34" charset="-122"/>
+                <a:cs typeface="Segoe UI" pitchFamily="34" charset="-120"/>
+              </a:rPr>
+              <a:t>6-phase verification.</a:t>
+            </a:r>
+            <a:endParaRPr lang="en-US" sz="1200" dirty="0"/>
+          </a:p>
+          <a:p>
+            <a:pPr indent="0" marL="0">
+              <a:lnSpc>
+                <a:spcPct val="130000"/>
+              </a:lnSpc>
+              <a:buNone/>
+            </a:pPr>
+            <a:r>
+              <a:rPr lang="en-US" sz="1200" dirty="0">
+                <a:solidFill>
+                  <a:srgbClr val="E0E0E0"/>
+                </a:solidFill>
+                <a:latin typeface="Segoe UI" pitchFamily="34" charset="0"/>
+                <a:ea typeface="Segoe UI" pitchFamily="34" charset="-122"/>
+                <a:cs typeface="Segoe UI" pitchFamily="34" charset="-120"/>
+              </a:rPr>
+              <a:t>Browser-based visual QA.</a:t>
+            </a:r>
+            <a:endParaRPr lang="en-US" sz="1200" dirty="0"/>
+          </a:p>
+          <a:p>
+            <a:pPr indent="0" marL="0">
+              <a:lnSpc>
+                <a:spcPct val="130000"/>
+              </a:lnSpc>
+              <a:buNone/>
+            </a:pPr>
+            <a:r>
+              <a:rPr lang="en-US" sz="1200" dirty="0">
+                <a:solidFill>
+                  <a:srgbClr val="E0E0E0"/>
+                </a:solidFill>
+                <a:latin typeface="Segoe UI" pitchFamily="34" charset="0"/>
+                <a:ea typeface="Segoe UI" pitchFamily="34" charset="-122"/>
+                <a:cs typeface="Segoe UI" pitchFamily="34" charset="-120"/>
+              </a:rPr>
+              <a:t>Design review (0-10).</a:t>
+            </a:r>
+            <a:endParaRPr lang="en-US" sz="1200" dirty="0"/>
+          </a:p>
+          <a:p>
+            <a:pPr indent="0" marL="0">
+              <a:lnSpc>
+                <a:spcPct val="130000"/>
+              </a:lnSpc>
+              <a:buNone/>
+            </a:pPr>
+            <a:r>
+              <a:rPr lang="en-US" sz="1200" dirty="0">
+                <a:solidFill>
+                  <a:srgbClr val="E0E0E0"/>
+                </a:solidFill>
+                <a:latin typeface="Segoe UI" pitchFamily="34" charset="0"/>
+                <a:ea typeface="Segoe UI" pitchFamily="34" charset="-122"/>
+                <a:cs typeface="Segoe UI" pitchFamily="34" charset="-120"/>
+              </a:rPr>
+              <a:t>AI slop detection.</a:t>
+            </a:r>
+            <a:endParaRPr lang="en-US" sz="1200" dirty="0"/>
+          </a:p>
+        </p:txBody>
+      </p:sp>
+      <p:sp>
+        <p:nvSpPr>
+          <p:cNvPr id="22" name="Text 20"/>
+          <p:cNvSpPr/>
+          <p:nvPr/>
+        </p:nvSpPr>
+        <p:spPr>
+          <a:xfrm>
+            <a:off x="7040880" y="3200400"/>
+            <a:ext cx="365760" cy="457200"/>
+          </a:xfrm>
+          <a:prstGeom prst="rect">
+            <a:avLst/>
+          </a:prstGeom>
+          <a:noFill/>
+          <a:ln/>
+        </p:spPr>
+        <p:txBody>
+          <a:bodyPr wrap="square" rtlCol="0" anchor="ctr"/>
+          <a:lstStyle/>
+          <a:p>
+            <a:pPr algn="ctr" indent="0" marL="0">
+              <a:buNone/>
+            </a:pPr>
+            <a:r>
+              <a:rPr lang="en-US" sz="2000" dirty="0">
+                <a:solidFill>
+                  <a:srgbClr val="A0A0A0"/>
+                </a:solidFill>
+                <a:latin typeface="Segoe UI" pitchFamily="34" charset="0"/>
+                <a:ea typeface="Segoe UI" pitchFamily="34" charset="-122"/>
+                <a:cs typeface="Segoe UI" pitchFamily="34" charset="-120"/>
+              </a:rPr>
+              <a:t>→</a:t>
+            </a:r>
+            <a:endParaRPr lang="en-US" sz="2000" dirty="0"/>
+          </a:p>
+        </p:txBody>
+      </p:sp>
+      <p:sp>
+        <p:nvSpPr>
+          <p:cNvPr id="23" name="Shape 21"/>
+          <p:cNvSpPr/>
+          <p:nvPr/>
+        </p:nvSpPr>
+        <p:spPr>
+          <a:xfrm>
+            <a:off x="7315200" y="1828800"/>
+            <a:ext cx="2194560" cy="4114800"/>
+          </a:xfrm>
+          <a:prstGeom prst="roundRect">
+            <a:avLst>
+              <a:gd name="adj" fmla="val 4167"/>
+            </a:avLst>
+          </a:prstGeom>
+          <a:solidFill>
+            <a:srgbClr val="262640"/>
+          </a:solidFill>
+          <a:ln w="12700">
+            <a:solidFill>
+              <a:srgbClr val="262640"/>
+            </a:solidFill>
+            <a:prstDash val="solid"/>
+          </a:ln>
+          <a:effectLst>
+            <a:outerShdw sx="100000" sy="100000" kx="0" ky="0" algn="bl" rotWithShape="0" blurRad="76200" dist="25400" dir="16200000">
+              <a:srgbClr val="000000">
+                <a:alpha val="30000"/>
+              </a:srgbClr>
+            </a:outerShdw>
+          </a:effectLst>
+        </p:spPr>
+      </p:sp>
+      <p:sp>
+        <p:nvSpPr>
+          <p:cNvPr id="24" name="Shape 22"/>
+          <p:cNvSpPr/>
+          <p:nvPr/>
+        </p:nvSpPr>
+        <p:spPr>
+          <a:xfrm>
+            <a:off x="7315200" y="1828800"/>
+            <a:ext cx="2194560" cy="36576"/>
+          </a:xfrm>
+          <a:prstGeom prst="rect">
+            <a:avLst/>
+          </a:prstGeom>
+          <a:solidFill>
+            <a:srgbClr val="E74C3C"/>
+          </a:solidFill>
+          <a:ln/>
+        </p:spPr>
+      </p:sp>
+      <p:sp>
+        <p:nvSpPr>
+          <p:cNvPr id="25" name="Text 23"/>
+          <p:cNvSpPr/>
+          <p:nvPr/>
+        </p:nvSpPr>
+        <p:spPr>
+          <a:xfrm>
+            <a:off x="7406640" y="1965960"/>
+            <a:ext cx="2011680" cy="320040"/>
+          </a:xfrm>
+          <a:prstGeom prst="rect">
+            <a:avLst/>
+          </a:prstGeom>
+          <a:noFill/>
+          <a:ln/>
+        </p:spPr>
+        <p:txBody>
+          <a:bodyPr wrap="square" rtlCol="0" anchor="ctr"/>
+          <a:lstStyle/>
+          <a:p>
+            <a:pPr algn="ctr" indent="0" marL="0">
+              <a:buNone/>
+            </a:pPr>
+            <a:r>
+              <a:rPr lang="en-US" sz="1100" b="1" dirty="0">
+                <a:solidFill>
+                  <a:srgbClr val="E74C3C"/>
+                </a:solidFill>
+                <a:latin typeface="Segoe UI" pitchFamily="34" charset="0"/>
+                <a:ea typeface="Segoe UI" pitchFamily="34" charset="-122"/>
+                <a:cs typeface="Segoe UI" pitchFamily="34" charset="-120"/>
+              </a:rPr>
+              <a:t>/cso</a:t>
+            </a:r>
+            <a:endParaRPr lang="en-US" sz="1100" dirty="0"/>
+          </a:p>
+        </p:txBody>
+      </p:sp>
+      <p:sp>
+        <p:nvSpPr>
+          <p:cNvPr id="26" name="Text 24"/>
+          <p:cNvSpPr/>
+          <p:nvPr/>
+        </p:nvSpPr>
+        <p:spPr>
+          <a:xfrm>
+            <a:off x="7406640" y="2331720"/>
+            <a:ext cx="2011680" cy="365760"/>
+          </a:xfrm>
+          <a:prstGeom prst="rect">
+            <a:avLst/>
+          </a:prstGeom>
+          <a:noFill/>
+          <a:ln/>
+        </p:spPr>
+        <p:txBody>
+          <a:bodyPr wrap="square" rtlCol="0" anchor="ctr"/>
+          <a:lstStyle/>
+          <a:p>
+            <a:pPr algn="ctr" indent="0" marL="0">
+              <a:buNone/>
+            </a:pPr>
+            <a:r>
+              <a:rPr lang="en-US" sz="1500" b="1" dirty="0">
+                <a:solidFill>
+                  <a:srgbClr val="FFFFFF"/>
+                </a:solidFill>
+                <a:latin typeface="Segoe UI" pitchFamily="34" charset="0"/>
+                <a:ea typeface="Segoe UI" pitchFamily="34" charset="-122"/>
+                <a:cs typeface="Segoe UI" pitchFamily="34" charset="-120"/>
+              </a:rPr>
+              <a:t>Security</a:t>
+            </a:r>
+            <a:endParaRPr lang="en-US" sz="1500" dirty="0"/>
+          </a:p>
+        </p:txBody>
+      </p:sp>
+      <p:sp>
+        <p:nvSpPr>
+          <p:cNvPr id="27" name="Text 25"/>
+          <p:cNvSpPr/>
+          <p:nvPr/>
+        </p:nvSpPr>
+        <p:spPr>
+          <a:xfrm>
+            <a:off x="7452360" y="2834640"/>
+            <a:ext cx="1920240" cy="2926080"/>
+          </a:xfrm>
+          <a:prstGeom prst="rect">
+            <a:avLst/>
+          </a:prstGeom>
+          <a:noFill/>
+          <a:ln/>
+        </p:spPr>
+        <p:txBody>
+          <a:bodyPr wrap="square" rtlCol="0" anchor="ctr"/>
+          <a:lstStyle/>
+          <a:p>
+            <a:pPr indent="0" marL="0">
+              <a:lnSpc>
+                <a:spcPct val="130000"/>
+              </a:lnSpc>
+              <a:buNone/>
+            </a:pPr>
+            <a:r>
+              <a:rPr lang="en-US" sz="1200" dirty="0">
+                <a:solidFill>
+                  <a:srgbClr val="E0E0E0"/>
+                </a:solidFill>
+                <a:latin typeface="Segoe UI" pitchFamily="34" charset="0"/>
+                <a:ea typeface="Segoe UI" pitchFamily="34" charset="-122"/>
+                <a:cs typeface="Segoe UI" pitchFamily="34" charset="-120"/>
+              </a:rPr>
+              <a:t>STRIDE threat model.</a:t>
+            </a:r>
+            <a:endParaRPr lang="en-US" sz="1200" dirty="0"/>
+          </a:p>
+          <a:p>
+            <a:pPr indent="0" marL="0">
+              <a:lnSpc>
+                <a:spcPct val="130000"/>
+              </a:lnSpc>
+              <a:buNone/>
+            </a:pPr>
+            <a:r>
+              <a:rPr lang="en-US" sz="1200" dirty="0">
+                <a:solidFill>
+                  <a:srgbClr val="E0E0E0"/>
+                </a:solidFill>
+                <a:latin typeface="Segoe UI" pitchFamily="34" charset="0"/>
+                <a:ea typeface="Segoe UI" pitchFamily="34" charset="-122"/>
+                <a:cs typeface="Segoe UI" pitchFamily="34" charset="-120"/>
+              </a:rPr>
+              <a:t>OWASP Top 10.</a:t>
+            </a:r>
+            <a:endParaRPr lang="en-US" sz="1200" dirty="0"/>
+          </a:p>
+          <a:p>
+            <a:pPr indent="0" marL="0">
+              <a:lnSpc>
+                <a:spcPct val="130000"/>
+              </a:lnSpc>
+              <a:buNone/>
+            </a:pPr>
+            <a:r>
+              <a:rPr lang="en-US" sz="1200" dirty="0">
+                <a:solidFill>
+                  <a:srgbClr val="E0E0E0"/>
+                </a:solidFill>
+                <a:latin typeface="Segoe UI" pitchFamily="34" charset="0"/>
+                <a:ea typeface="Segoe UI" pitchFamily="34" charset="-122"/>
+                <a:cs typeface="Segoe UI" pitchFamily="34" charset="-120"/>
+              </a:rPr>
+              <a:t>Confidence gates.</a:t>
+            </a:r>
+            <a:endParaRPr lang="en-US" sz="1200" dirty="0"/>
+          </a:p>
+          <a:p>
+            <a:pPr indent="0" marL="0">
+              <a:lnSpc>
+                <a:spcPct val="130000"/>
+              </a:lnSpc>
+              <a:buNone/>
+            </a:pPr>
+            <a:r>
+              <a:rPr lang="en-US" sz="1200" dirty="0">
+                <a:solidFill>
+                  <a:srgbClr val="E0E0E0"/>
+                </a:solidFill>
+                <a:latin typeface="Segoe UI" pitchFamily="34" charset="0"/>
+                <a:ea typeface="Segoe UI" pitchFamily="34" charset="-122"/>
+                <a:cs typeface="Segoe UI" pitchFamily="34" charset="-120"/>
+              </a:rPr>
+              <a:t>Exploit scenarios.</a:t>
+            </a:r>
+            <a:endParaRPr lang="en-US" sz="1200" dirty="0"/>
+          </a:p>
+        </p:txBody>
+      </p:sp>
+      <p:sp>
+        <p:nvSpPr>
+          <p:cNvPr id="28" name="Text 26"/>
+          <p:cNvSpPr/>
+          <p:nvPr/>
+        </p:nvSpPr>
+        <p:spPr>
+          <a:xfrm>
+            <a:off x="9418320" y="3200400"/>
+            <a:ext cx="365760" cy="457200"/>
+          </a:xfrm>
+          <a:prstGeom prst="rect">
+            <a:avLst/>
+          </a:prstGeom>
+          <a:noFill/>
+          <a:ln/>
+        </p:spPr>
+        <p:txBody>
+          <a:bodyPr wrap="square" rtlCol="0" anchor="ctr"/>
+          <a:lstStyle/>
+          <a:p>
+            <a:pPr algn="ctr" indent="0" marL="0">
+              <a:buNone/>
+            </a:pPr>
+            <a:r>
+              <a:rPr lang="en-US" sz="2000" dirty="0">
+                <a:solidFill>
+                  <a:srgbClr val="A0A0A0"/>
+                </a:solidFill>
+                <a:latin typeface="Segoe UI" pitchFamily="34" charset="0"/>
+                <a:ea typeface="Segoe UI" pitchFamily="34" charset="-122"/>
+                <a:cs typeface="Segoe UI" pitchFamily="34" charset="-120"/>
+              </a:rPr>
+              <a:t>→</a:t>
+            </a:r>
+            <a:endParaRPr lang="en-US" sz="2000" dirty="0"/>
+          </a:p>
+        </p:txBody>
+      </p:sp>
+      <p:sp>
+        <p:nvSpPr>
+          <p:cNvPr id="29" name="Shape 27"/>
+          <p:cNvSpPr/>
+          <p:nvPr/>
+        </p:nvSpPr>
+        <p:spPr>
+          <a:xfrm>
+            <a:off x="9692640" y="1828800"/>
+            <a:ext cx="2194560" cy="4114800"/>
+          </a:xfrm>
+          <a:prstGeom prst="roundRect">
+            <a:avLst>
+              <a:gd name="adj" fmla="val 4167"/>
+            </a:avLst>
+          </a:prstGeom>
+          <a:solidFill>
+            <a:srgbClr val="262640"/>
+          </a:solidFill>
+          <a:ln w="12700">
+            <a:solidFill>
+              <a:srgbClr val="262640"/>
+            </a:solidFill>
+            <a:prstDash val="solid"/>
+          </a:ln>
+          <a:effectLst>
+            <a:outerShdw sx="100000" sy="100000" kx="0" ky="0" algn="bl" rotWithShape="0" blurRad="76200" dist="25400" dir="16200000">
+              <a:srgbClr val="000000">
+                <a:alpha val="30000"/>
+              </a:srgbClr>
+            </a:outerShdw>
+          </a:effectLst>
+        </p:spPr>
+      </p:sp>
+      <p:sp>
+        <p:nvSpPr>
+          <p:cNvPr id="30" name="Shape 28"/>
+          <p:cNvSpPr/>
+          <p:nvPr/>
+        </p:nvSpPr>
+        <p:spPr>
+          <a:xfrm>
+            <a:off x="9692640" y="1828800"/>
+            <a:ext cx="2194560" cy="36576"/>
+          </a:xfrm>
+          <a:prstGeom prst="rect">
+            <a:avLst/>
+          </a:prstGeom>
+          <a:solidFill>
+            <a:srgbClr val="9B59B6"/>
+          </a:solidFill>
+          <a:ln/>
+        </p:spPr>
+      </p:sp>
+      <p:sp>
+        <p:nvSpPr>
+          <p:cNvPr id="31" name="Text 29"/>
+          <p:cNvSpPr/>
+          <p:nvPr/>
+        </p:nvSpPr>
+        <p:spPr>
+          <a:xfrm>
+            <a:off x="9784080" y="1965960"/>
+            <a:ext cx="2011680" cy="320040"/>
+          </a:xfrm>
+          <a:prstGeom prst="rect">
+            <a:avLst/>
+          </a:prstGeom>
+          <a:noFill/>
+          <a:ln/>
+        </p:spPr>
+        <p:txBody>
+          <a:bodyPr wrap="square" rtlCol="0" anchor="ctr"/>
+          <a:lstStyle/>
+          <a:p>
+            <a:pPr algn="ctr" indent="0" marL="0">
+              <a:buNone/>
+            </a:pPr>
+            <a:r>
+              <a:rPr lang="en-US" sz="1100" b="1" dirty="0">
+                <a:solidFill>
+                  <a:srgbClr val="9B59B6"/>
+                </a:solidFill>
+                <a:latin typeface="Segoe UI" pitchFamily="34" charset="0"/>
+                <a:ea typeface="Segoe UI" pitchFamily="34" charset="-122"/>
+                <a:cs typeface="Segoe UI" pitchFamily="34" charset="-120"/>
+              </a:rPr>
+              <a:t>Deploy</a:t>
+            </a:r>
+            <a:endParaRPr lang="en-US" sz="1100" dirty="0"/>
+          </a:p>
+        </p:txBody>
+      </p:sp>
+      <p:sp>
+        <p:nvSpPr>
+          <p:cNvPr id="32" name="Text 30"/>
+          <p:cNvSpPr/>
+          <p:nvPr/>
+        </p:nvSpPr>
+        <p:spPr>
+          <a:xfrm>
+            <a:off x="9784080" y="2331720"/>
+            <a:ext cx="2011680" cy="365760"/>
+          </a:xfrm>
+          <a:prstGeom prst="rect">
+            <a:avLst/>
+          </a:prstGeom>
+          <a:noFill/>
+          <a:ln/>
+        </p:spPr>
+        <p:txBody>
+          <a:bodyPr wrap="square" rtlCol="0" anchor="ctr"/>
+          <a:lstStyle/>
+          <a:p>
+            <a:pPr algn="ctr" indent="0" marL="0">
+              <a:buNone/>
+            </a:pPr>
+            <a:r>
+              <a:rPr lang="en-US" sz="1500" b="1" dirty="0">
+                <a:solidFill>
+                  <a:srgbClr val="FFFFFF"/>
+                </a:solidFill>
+                <a:latin typeface="Segoe UI" pitchFamily="34" charset="0"/>
+                <a:ea typeface="Segoe UI" pitchFamily="34" charset="-122"/>
+                <a:cs typeface="Segoe UI" pitchFamily="34" charset="-120"/>
+              </a:rPr>
+              <a:t>Ship + Monitor</a:t>
+            </a:r>
+            <a:endParaRPr lang="en-US" sz="1500" dirty="0"/>
+          </a:p>
+        </p:txBody>
+      </p:sp>
+      <p:sp>
+        <p:nvSpPr>
+          <p:cNvPr id="33" name="Text 31"/>
+          <p:cNvSpPr/>
+          <p:nvPr/>
+        </p:nvSpPr>
+        <p:spPr>
+          <a:xfrm>
+            <a:off x="9829800" y="2834640"/>
+            <a:ext cx="1920240" cy="2926080"/>
+          </a:xfrm>
+          <a:prstGeom prst="rect">
+            <a:avLst/>
+          </a:prstGeom>
+          <a:noFill/>
+          <a:ln/>
+        </p:spPr>
+        <p:txBody>
+          <a:bodyPr wrap="square" rtlCol="0" anchor="ctr"/>
+          <a:lstStyle/>
+          <a:p>
+            <a:pPr indent="0" marL="0">
+              <a:lnSpc>
+                <a:spcPct val="130000"/>
+              </a:lnSpc>
+              <a:buNone/>
+            </a:pPr>
+            <a:r>
+              <a:rPr lang="en-US" sz="1200" dirty="0">
+                <a:solidFill>
+                  <a:srgbClr val="E0E0E0"/>
+                </a:solidFill>
+                <a:latin typeface="Segoe UI" pitchFamily="34" charset="0"/>
+                <a:ea typeface="Segoe UI" pitchFamily="34" charset="-122"/>
+                <a:cs typeface="Segoe UI" pitchFamily="34" charset="-120"/>
+              </a:rPr>
+              <a:t>CI/CD pipeline.</a:t>
+            </a:r>
+            <a:endParaRPr lang="en-US" sz="1200" dirty="0"/>
+          </a:p>
+          <a:p>
+            <a:pPr indent="0" marL="0">
+              <a:lnSpc>
+                <a:spcPct val="130000"/>
+              </a:lnSpc>
+              <a:buNone/>
+            </a:pPr>
+            <a:r>
+              <a:rPr lang="en-US" sz="1200" dirty="0">
+                <a:solidFill>
+                  <a:srgbClr val="E0E0E0"/>
+                </a:solidFill>
+                <a:latin typeface="Segoe UI" pitchFamily="34" charset="0"/>
+                <a:ea typeface="Segoe UI" pitchFamily="34" charset="-122"/>
+                <a:cs typeface="Segoe UI" pitchFamily="34" charset="-120"/>
+              </a:rPr>
+              <a:t>Canary monitoring.</a:t>
+            </a:r>
+            <a:endParaRPr lang="en-US" sz="1200" dirty="0"/>
+          </a:p>
+          <a:p>
+            <a:pPr indent="0" marL="0">
+              <a:lnSpc>
+                <a:spcPct val="130000"/>
+              </a:lnSpc>
+              <a:buNone/>
+            </a:pPr>
+            <a:r>
+              <a:rPr lang="en-US" sz="1200" dirty="0">
+                <a:solidFill>
+                  <a:srgbClr val="E0E0E0"/>
+                </a:solidFill>
+                <a:latin typeface="Segoe UI" pitchFamily="34" charset="0"/>
+                <a:ea typeface="Segoe UI" pitchFamily="34" charset="-122"/>
+                <a:cs typeface="Segoe UI" pitchFamily="34" charset="-120"/>
+              </a:rPr>
+              <a:t>Doc sync.</a:t>
+            </a:r>
+            <a:endParaRPr lang="en-US" sz="1200" dirty="0"/>
+          </a:p>
+          <a:p>
+            <a:pPr indent="0" marL="0">
+              <a:lnSpc>
+                <a:spcPct val="130000"/>
+              </a:lnSpc>
+              <a:buNone/>
+            </a:pPr>
+            <a:r>
+              <a:rPr lang="en-US" sz="1200" dirty="0">
+                <a:solidFill>
+                  <a:srgbClr val="E0E0E0"/>
+                </a:solidFill>
+                <a:latin typeface="Segoe UI" pitchFamily="34" charset="0"/>
+                <a:ea typeface="Segoe UI" pitchFamily="34" charset="-122"/>
+                <a:cs typeface="Segoe UI" pitchFamily="34" charset="-120"/>
+              </a:rPr>
+              <a:t>Sprint retro.</a:t>
+            </a:r>
+            <a:endParaRPr lang="en-US" sz="1200" dirty="0"/>
+          </a:p>
+        </p:txBody>
+      </p:sp>
+      <p:sp>
+        <p:nvSpPr>
+          <p:cNvPr id="34" name="Shape 32"/>
+          <p:cNvSpPr/>
+          <p:nvPr/>
+        </p:nvSpPr>
+        <p:spPr>
+          <a:xfrm>
+            <a:off x="457200" y="6217920"/>
+            <a:ext cx="11247120" cy="457200"/>
+          </a:xfrm>
+          <a:prstGeom prst="roundRect">
+            <a:avLst>
+              <a:gd name="adj" fmla="val 20000"/>
+            </a:avLst>
+          </a:prstGeom>
+          <a:solidFill>
+            <a:srgbClr val="F1C40F"/>
+          </a:solidFill>
+          <a:ln w="12700">
+            <a:solidFill>
+              <a:srgbClr val="F1C40F"/>
+            </a:solidFill>
+            <a:prstDash val="solid"/>
+          </a:ln>
+          <a:effectLst>
+            <a:outerShdw sx="100000" sy="100000" kx="0" ky="0" algn="bl" rotWithShape="0" blurRad="76200" dist="25400" dir="16200000">
+              <a:srgbClr val="000000">
+                <a:alpha val="30000"/>
+              </a:srgbClr>
+            </a:outerShdw>
+          </a:effectLst>
+        </p:spPr>
+      </p:sp>
+      <p:sp>
+        <p:nvSpPr>
+          <p:cNvPr id="35" name="Text 33"/>
+          <p:cNvSpPr/>
+          <p:nvPr/>
+        </p:nvSpPr>
+        <p:spPr>
+          <a:xfrm>
+            <a:off x="457200" y="6217920"/>
+            <a:ext cx="11247120" cy="457200"/>
+          </a:xfrm>
+          <a:prstGeom prst="rect">
+            <a:avLst/>
+          </a:prstGeom>
+          <a:noFill/>
+          <a:ln/>
+        </p:spPr>
+        <p:txBody>
+          <a:bodyPr wrap="square" rtlCol="0" anchor="ctr"/>
+          <a:lstStyle/>
+          <a:p>
+            <a:pPr algn="ctr" indent="0" marL="0">
+              <a:buNone/>
+            </a:pPr>
+            <a:r>
+              <a:rPr lang="en-US" sz="1200" b="1" dirty="0">
+                <a:solidFill>
+                  <a:srgbClr val="1B1B2F"/>
+                </a:solidFill>
+                <a:latin typeface="Segoe UI" pitchFamily="34" charset="0"/>
+                <a:ea typeface="Segoe UI" pitchFamily="34" charset="-122"/>
+                <a:cs typeface="Segoe UI" pitchFamily="34" charset="-120"/>
+              </a:rPr>
+              <a:t>Every phase has a gate. Every gate needs approval. Learning Agent captures lessons after every gate, escalation, and sprint.</a:t>
+            </a:r>
+            <a:endParaRPr lang="en-US" sz="1200" dirty="0"/>
+          </a:p>
+        </p:txBody>
+      </p:sp>
+    </p:spTree>
+  </p:cSld>
+  <p:clrMapOvr>
+    <a:masterClrMapping/>
+  </p:clrMapOvr>
+</p:sld>
+</file>
+
+<file path=ppt/slides/slide8.xml><?xml version="1.0" encoding="utf-8"?>
+<p:sld xmlns:a="http://schemas.openxmlformats.org/drawingml/2006/main" xmlns:r="http://schemas.openxmlformats.org/officeDocument/2006/relationships" xmlns:p="http://schemas.openxmlformats.org/presentationml/2006/main">
+  <p:cSld name="Slide 8">
+    <p:bg>
+      <p:bgPr>
+        <a:solidFill>
+          <a:srgbClr val="1B1B2F"/>
+        </a:solidFill>
+      </p:bgPr>
+    </p:bg>
+    <p:spTree>
+      <p:nvGrpSpPr>
+        <p:cNvPr id="1" name=""/>
+        <p:cNvGrpSpPr/>
+        <p:nvPr/>
+      </p:nvGrpSpPr>
+      <p:grpSpPr>
+        <a:xfrm>
+          <a:off x="0" y="0"/>
+          <a:ext cx="0" cy="0"/>
+          <a:chOff x="0" y="0"/>
+          <a:chExt cx="0" cy="0"/>
+        </a:xfrm>
+      </p:grpSpPr>
+      <p:sp>
+        <p:nvSpPr>
+          <p:cNvPr id="2" name="Shape 0"/>
+          <p:cNvSpPr/>
+          <p:nvPr/>
+        </p:nvSpPr>
+        <p:spPr>
+          <a:xfrm>
+            <a:off x="4114800" y="1645920"/>
+            <a:ext cx="3931920" cy="36576"/>
+          </a:xfrm>
+          <a:prstGeom prst="rect">
+            <a:avLst/>
+          </a:prstGeom>
+          <a:solidFill>
+            <a:srgbClr val="00B4A0"/>
+          </a:solidFill>
+          <a:ln/>
+        </p:spPr>
+      </p:sp>
+      <p:sp>
+        <p:nvSpPr>
           <p:cNvPr id="3" name="Text 1"/>
           <p:cNvSpPr/>
           <p:nvPr/>
@@ -8129,7 +10038,7 @@
         </p:nvSpPr>
         <p:spPr>
           <a:xfrm>
-            <a:off x="3383280" y="3840480"/>
+            <a:off x="2926080" y="3840480"/>
             <a:ext cx="1828800" cy="731520"/>
           </a:xfrm>
           <a:prstGeom prst="rect">
@@ -8154,7 +10063,7 @@
                 <a:ea typeface="Segoe UI" pitchFamily="34" charset="-122"/>
                 <a:cs typeface="Segoe UI" pitchFamily="34" charset="-120"/>
               </a:rPr>
-              <a:t>4</a:t>
+              <a:t>15</a:t>
             </a:r>
             <a:endParaRPr lang="en-US" sz="3600" dirty="0"/>
           </a:p>
@@ -8168,7 +10077,7 @@
         </p:nvSpPr>
         <p:spPr>
           <a:xfrm>
-            <a:off x="3383280" y="4572000"/>
+            <a:off x="2926080" y="4572000"/>
             <a:ext cx="1828800" cy="365760"/>
           </a:xfrm>
           <a:prstGeom prst="rect">
@@ -8193,7 +10102,7 @@
                 <a:ea typeface="Segoe UI" pitchFamily="34" charset="-122"/>
                 <a:cs typeface="Segoe UI" pitchFamily="34" charset="-120"/>
               </a:rPr>
-              <a:t>Hierarchy Levels</a:t>
+              <a:t>Skills</a:t>
             </a:r>
             <a:endParaRPr lang="en-US" sz="1400" dirty="0"/>
           </a:p>
@@ -8207,7 +10116,7 @@
         </p:nvSpPr>
         <p:spPr>
           <a:xfrm>
-            <a:off x="5669280" y="3840480"/>
+            <a:off x="4754880" y="3840480"/>
             <a:ext cx="1828800" cy="731520"/>
           </a:xfrm>
           <a:prstGeom prst="rect">
@@ -8246,7 +10155,7 @@
         </p:nvSpPr>
         <p:spPr>
           <a:xfrm>
-            <a:off x="5669280" y="4572000"/>
+            <a:off x="4754880" y="4572000"/>
             <a:ext cx="1828800" cy="365760"/>
           </a:xfrm>
           <a:prstGeom prst="rect">
@@ -8271,7 +10180,7 @@
                 <a:ea typeface="Segoe UI" pitchFamily="34" charset="-122"/>
                 <a:cs typeface="Segoe UI" pitchFamily="34" charset="-120"/>
               </a:rPr>
-              <a:t>Artifact Templates</a:t>
+              <a:t>Artifacts</a:t>
             </a:r>
             <a:endParaRPr lang="en-US" sz="1400" dirty="0"/>
           </a:p>
@@ -8285,7 +10194,7 @@
         </p:nvSpPr>
         <p:spPr>
           <a:xfrm>
-            <a:off x="7955280" y="3840480"/>
+            <a:off x="6583680" y="3840480"/>
             <a:ext cx="1828800" cy="731520"/>
           </a:xfrm>
           <a:prstGeom prst="rect">
@@ -8310,7 +10219,7 @@
                 <a:ea typeface="Segoe UI" pitchFamily="34" charset="-122"/>
                 <a:cs typeface="Segoe UI" pitchFamily="34" charset="-120"/>
               </a:rPr>
-              <a:t>4</a:t>
+              <a:t>7</a:t>
             </a:r>
             <a:endParaRPr lang="en-US" sz="3600" dirty="0"/>
           </a:p>
@@ -8324,7 +10233,7 @@
         </p:nvSpPr>
         <p:spPr>
           <a:xfrm>
-            <a:off x="7955280" y="4572000"/>
+            <a:off x="6583680" y="4572000"/>
             <a:ext cx="1828800" cy="365760"/>
           </a:xfrm>
           <a:prstGeom prst="rect">
@@ -8349,7 +10258,7 @@
                 <a:ea typeface="Segoe UI" pitchFamily="34" charset="-122"/>
                 <a:cs typeface="Segoe UI" pitchFamily="34" charset="-120"/>
               </a:rPr>
-              <a:t>Phase Gates</a:t>
+              <a:t>Hooks</a:t>
             </a:r>
             <a:endParaRPr lang="en-US" sz="1400" dirty="0"/>
           </a:p>
@@ -8358,6 +10267,84 @@
       <p:sp>
         <p:nvSpPr>
           <p:cNvPr id="13" name="Text 11"/>
+          <p:cNvSpPr/>
+          <p:nvPr/>
+        </p:nvSpPr>
+        <p:spPr>
+          <a:xfrm>
+            <a:off x="8412480" y="3840480"/>
+            <a:ext cx="1828800" cy="731520"/>
+          </a:xfrm>
+          <a:prstGeom prst="rect">
+            <a:avLst/>
+          </a:prstGeom>
+          <a:noFill/>
+          <a:ln/>
+        </p:spPr>
+        <p:txBody>
+          <a:bodyPr wrap="square" rtlCol="0" anchor="ctr"/>
+          <a:lstStyle/>
+          <a:p>
+            <a:pPr algn="ctr" indent="0" marL="0">
+              <a:buNone/>
+            </a:pPr>
+            <a:r>
+              <a:rPr lang="en-US" sz="3600" b="1" dirty="0">
+                <a:solidFill>
+                  <a:srgbClr val="FF8C00"/>
+                </a:solidFill>
+                <a:latin typeface="Segoe UI" pitchFamily="34" charset="0"/>
+                <a:ea typeface="Segoe UI" pitchFamily="34" charset="-122"/>
+                <a:cs typeface="Segoe UI" pitchFamily="34" charset="-120"/>
+              </a:rPr>
+              <a:t>6</a:t>
+            </a:r>
+            <a:endParaRPr lang="en-US" sz="3600" dirty="0"/>
+          </a:p>
+        </p:txBody>
+      </p:sp>
+      <p:sp>
+        <p:nvSpPr>
+          <p:cNvPr id="14" name="Text 12"/>
+          <p:cNvSpPr/>
+          <p:nvPr/>
+        </p:nvSpPr>
+        <p:spPr>
+          <a:xfrm>
+            <a:off x="8412480" y="4572000"/>
+            <a:ext cx="1828800" cy="365760"/>
+          </a:xfrm>
+          <a:prstGeom prst="rect">
+            <a:avLst/>
+          </a:prstGeom>
+          <a:noFill/>
+          <a:ln/>
+        </p:spPr>
+        <p:txBody>
+          <a:bodyPr wrap="square" rtlCol="0" anchor="ctr"/>
+          <a:lstStyle/>
+          <a:p>
+            <a:pPr algn="ctr" indent="0" marL="0">
+              <a:buNone/>
+            </a:pPr>
+            <a:r>
+              <a:rPr lang="en-US" sz="1400" dirty="0">
+                <a:solidFill>
+                  <a:srgbClr val="E0E0E0"/>
+                </a:solidFill>
+                <a:latin typeface="Segoe UI" pitchFamily="34" charset="0"/>
+                <a:ea typeface="Segoe UI" pitchFamily="34" charset="-122"/>
+                <a:cs typeface="Segoe UI" pitchFamily="34" charset="-120"/>
+              </a:rPr>
+              <a:t>Gates</a:t>
+            </a:r>
+            <a:endParaRPr lang="en-US" sz="1400" dirty="0"/>
+          </a:p>
+        </p:txBody>
+      </p:sp>
+      <p:sp>
+        <p:nvSpPr>
+          <p:cNvPr id="15" name="Text 13"/>
           <p:cNvSpPr/>
           <p:nvPr/>
         </p:nvSpPr>
